--- a/docs/slide-deck/sentinel-proposal-deck.pptx
+++ b/docs/slide-deck/sentinel-proposal-deck.pptx
@@ -728,7 +728,7 @@
           <a:lstStyle/>
           <a:p>
             <a:r>
-              <a:t>Land the scalability story without internal targeting specifics. Progressive autonomy reassures: we don't ask for trust up front, we earn it.</a:t>
+              <a:t>Land the scalability story without internal targeting specifics. Progressive autonomy reassures: we don't ask for trust up front, we earn it. The Airflow DAG-failure and LLM-eval examples are especially apt for a data-science/AIOps buyer — and they also become monitoring surfaces in Mission Control (DAG stats, LLM eval-metric trends).</a:t>
             </a:r>
           </a:p>
         </p:txBody>
@@ -6669,7 +6669,7 @@
         </p:nvSpPr>
         <p:spPr>
           <a:xfrm>
-            <a:off x="640080" y="1737360"/>
+            <a:off x="640080" y="1691640"/>
             <a:ext cx="10972800" cy="4937760"/>
           </a:xfrm>
           <a:prstGeom prst="rect">
@@ -6688,7 +6688,7 @@
                 <a:spcPct val="105000"/>
               </a:lnSpc>
               <a:spcAft>
-                <a:spcPts val="1000"/>
+                <a:spcPts val="900"/>
               </a:spcAft>
             </a:pPr>
             <a:r>
@@ -6707,7 +6707,7 @@
                 <a:spcPct val="105000"/>
               </a:lnSpc>
               <a:spcAft>
-                <a:spcPts val="1000"/>
+                <a:spcPts val="900"/>
               </a:spcAft>
             </a:pPr>
             <a:r>
@@ -6717,7 +6717,7 @@
                 </a:solidFill>
                 <a:latin typeface="Calibri"/>
               </a:rPr>
-              <a:t>•  Start with Splunk-driven incidents on microservices; broaden to any incident type the queue receives.</a:t>
+              <a:t>•  Start with Splunk-driven incidents on microservices; broaden to any incident type — e.g. Airflow DAG/task failures, or LLM-output quality-metric alerts.</a:t>
             </a:r>
           </a:p>
           <a:p>
@@ -6726,7 +6726,7 @@
                 <a:spcPct val="105000"/>
               </a:lnSpc>
               <a:spcAft>
-                <a:spcPts val="1000"/>
+                <a:spcPts val="900"/>
               </a:spcAft>
             </a:pPr>
             <a:r>
@@ -6736,7 +6736,7 @@
                 </a:solidFill>
                 <a:latin typeface="Calibri"/>
               </a:rPr>
-              <a:t>•  Progressive autonomy — automation is earned: human-approved first, then opt-in auto-apply on lower-tier systems once the track record is proven (always audited and reversible).</a:t>
+              <a:t>•  Triggers generalise too — ServiceNow today; Airflow events and email alerts next.</a:t>
             </a:r>
           </a:p>
           <a:p>
@@ -6745,7 +6745,26 @@
                 <a:spcPct val="105000"/>
               </a:lnSpc>
               <a:spcAft>
-                <a:spcPts val="1000"/>
+                <a:spcPts val="900"/>
+              </a:spcAft>
+            </a:pPr>
+            <a:r>
+              <a:rPr sz="1800" b="0">
+                <a:solidFill>
+                  <a:srgbClr val="333F4A"/>
+                </a:solidFill>
+                <a:latin typeface="Calibri"/>
+              </a:rPr>
+              <a:t>•  Progressive autonomy — automation is earned: human-approved first, then opt-in auto-apply on lower-tier systems once the track record is proven (always audited and reversible).</a:t>
+            </a:r>
+          </a:p>
+          <a:p>
+            <a:pPr algn="l">
+              <a:lnSpc>
+                <a:spcPct val="105000"/>
+              </a:lnSpc>
+              <a:spcAft>
+                <a:spcPts val="900"/>
               </a:spcAft>
             </a:pPr>
             <a:r>

--- a/docs/slide-deck/sentinel-proposal-deck.pptx
+++ b/docs/slide-deck/sentinel-proposal-deck.pptx
@@ -22,6 +22,7 @@
     <p:sldId id="270" r:id="rId22"/>
     <p:sldId id="271" r:id="rId23"/>
     <p:sldId id="272" r:id="rId24"/>
+    <p:sldId id="273" r:id="rId25"/>
   </p:sldIdLst>
   <p:sldSz cx="12191695" cy="6858000" type="screen4x3"/>
   <p:notesSz cx="6858000" cy="9144000"/>
@@ -658,7 +659,7 @@
           <a:lstStyle/>
           <a:p>
             <a:r>
-              <a:t>Tier 1 needs instant human action; Tier 3 has slack we can fill — easy, low-risk, KPI-boosting first win.</a:t>
+              <a:t>This is the newly designed deployment model, not a claim that every packaging and onboarding component is already implemented. The key message is repeatability: shared versioned images, per-client configuration, automated dependency/documentation checks, and an air-gap path — not bespoke forks.</a:t>
             </a:r>
           </a:p>
         </p:txBody>
@@ -728,7 +729,7 @@
           <a:lstStyle/>
           <a:p>
             <a:r>
-              <a:t>Land the scalability story without internal targeting specifics. Progressive autonomy reassures: we don't ask for trust up front, we earn it. The Airflow DAG-failure and LLM-eval examples are especially apt for a data-science/AIOps buyer — and they also become monitoring surfaces in Mission Control (DAG stats, LLM eval-metric trends).</a:t>
+              <a:t>Tier 1 needs instant human action; Tier 3 has slack we can fill — easy, low-risk, KPI-boosting first win.</a:t>
             </a:r>
           </a:p>
         </p:txBody>
@@ -798,7 +799,7 @@
           <a:lstStyle/>
           <a:p>
             <a:r>
-              <a:t>Frame: we ship Sentinel first (the wedge and the differentiator). It is the first feature of a broader platform, Mission Control, for the monitoring teams that own many apps. Same in-client deployment. ServiceNow stays authoritative. The dashboard hub and analytics follow on the same application-catalog foundation. Keep the focus on Sentinel; this slide just shows where it's heading. (The knowledge-capture benefits this enables are on the next slide.)</a:t>
+              <a:t>Land the scalability story without internal targeting specifics. Progressive autonomy reassures: we don't ask for trust up front, we earn it. The Airflow DAG-failure and LLM-eval examples are especially apt for a data-science/AIOps buyer — and they also become monitoring surfaces in Mission Control (DAG stats, LLM eval-metric trends).</a:t>
             </a:r>
           </a:p>
         </p:txBody>
@@ -868,7 +869,7 @@
           <a:lstStyle/>
           <a:p>
             <a:r>
-              <a:t>PRESENTER FRAMING — keep these as UPSIDE, never criticism: (1) frame as 'the platform rewards and surfaces good knowledge', not 'your docs are bad'; (2) it's a MULTIPLIER, not a prerequisite — Sentinel works on logs + code regardless. Order the story from the cleanest point: lead with KT/handover (pure operational win), then tribal-knowledge capture (bus-factor / survives turnover), then the documentation flywheel (docs finally pay off, visible per-app KPIs).</a:t>
+              <a:t>Frame: we ship Sentinel first (the wedge and the differentiator). It is the first feature of a broader platform, Mission Control, for the monitoring teams that own many apps. Same in-client deployment. ServiceNow stays authoritative. The dashboard hub and analytics follow on the same application-catalog foundation. Keep the focus on Sentinel; this slide just shows where it's heading. Ask Mission Control is explicitly future scope: permission-aware Q&amp;A over Confluence plus deployed code/Intent Layer and authorised incident history. ServiceNow and Confluence remain authoritative.</a:t>
             </a:r>
           </a:p>
         </p:txBody>
@@ -938,7 +939,7 @@
           <a:lstStyle/>
           <a:p>
             <a:r>
-              <a:t>Baseline these metrics before rollout so the 'after' delta is provable.</a:t>
+              <a:t>Lead with structured handover and operational resilience, not criticism of current documentation. Confluence remains the source of truth; Mission Control defines the onboarding contract, checks accessibility/freshness and maintains a permission-aware index with citations. Say 'reduces routine dependence', not 'replaces developers'. Ask Mission Control is roadmap. The Rovo distinction is code context: planned answers combine Confluence with deployed code/Intent Layer and incident history, not docs alone.</a:t>
             </a:r>
           </a:p>
         </p:txBody>
@@ -1008,7 +1009,7 @@
           <a:lstStyle/>
           <a:p>
             <a:r>
-              <a:t>Client-safe commercial framing. Keep specific numbers for the live conversation. The analysis-first step de-risks pricing for both sides.</a:t>
+              <a:t>Baseline MTTD, accuracy, fix acceptance, senior-engineer hours and routine developer escalations before rollout so the after delta is provable. Human verdict capture and golden-dataset replay answer the buyer question: 'how do we know it's right?'</a:t>
             </a:r>
           </a:p>
         </p:txBody>
@@ -1078,6 +1079,76 @@
           <a:lstStyle/>
           <a:p>
             <a:r>
+              <a:t>Client-safe commercial framing. Keep specific numbers for the live conversation. The analysis-first step de-risks pricing for both sides.</a:t>
+            </a:r>
+          </a:p>
+        </p:txBody>
+      </p:sp>
+      <p:sp>
+        <p:nvSpPr>
+          <p:cNvPr id="4" name="Slide Number Placeholder 3"/>
+          <p:cNvSpPr>
+            <a:spLocks noGrp="1"/>
+          </p:cNvSpPr>
+          <p:nvPr>
+            <p:ph type="sldNum" idx="5" sz="quarter"/>
+          </p:nvPr>
+        </p:nvSpPr>
+        <p:spPr/>
+      </p:sp>
+    </p:spTree>
+  </p:cSld>
+  <p:clrMapOvr>
+    <a:masterClrMapping/>
+  </p:clrMapOvr>
+</p:notes>
+</file>
+
+<file path=ppt/notesSlides/notesSlide18.xml><?xml version="1.0" encoding="utf-8"?>
+<p:notes xmlns:a="http://schemas.openxmlformats.org/drawingml/2006/main" xmlns:p="http://schemas.openxmlformats.org/presentationml/2006/main" xmlns:r="http://schemas.openxmlformats.org/officeDocument/2006/relationships">
+  <p:cSld>
+    <p:spTree>
+      <p:nvGrpSpPr>
+        <p:cNvPr id="1" name=""/>
+        <p:cNvGrpSpPr/>
+        <p:nvPr/>
+      </p:nvGrpSpPr>
+      <p:grpSpPr>
+        <a:xfrm>
+          <a:off x="0" y="0"/>
+          <a:ext cx="0" cy="0"/>
+          <a:chOff x="0" y="0"/>
+          <a:chExt cx="0" cy="0"/>
+        </a:xfrm>
+      </p:grpSpPr>
+      <p:sp>
+        <p:nvSpPr>
+          <p:cNvPr id="2" name="Slide Image Placeholder 1"/>
+          <p:cNvSpPr>
+            <a:spLocks noGrp="1"/>
+          </p:cNvSpPr>
+          <p:nvPr>
+            <p:ph type="sldImg" idx="2"/>
+          </p:nvPr>
+        </p:nvSpPr>
+        <p:spPr/>
+      </p:sp>
+      <p:sp>
+        <p:nvSpPr>
+          <p:cNvPr id="3" name="Notes Placeholder 2"/>
+          <p:cNvSpPr>
+            <a:spLocks noGrp="1"/>
+          </p:cNvSpPr>
+          <p:nvPr>
+            <p:ph type="body" idx="3" sz="quarter"/>
+          </p:nvPr>
+        </p:nvSpPr>
+        <p:spPr/>
+        <p:txBody>
+          <a:bodyPr/>
+          <a:lstStyle/>
+          <a:p>
+            <a:r>
               <a:t>Close with a concrete, low-commitment ask: agree one platform and run the analysis. Momentum over perfection. Sentinel is step one toward Mission Control.</a:t>
             </a:r>
           </a:p>
@@ -1568,7 +1639,7 @@
           <a:lstStyle/>
           <a:p>
             <a:r>
-              <a:t>Three pillars to land: MCP-first (scales), model-agnostic (compliance/lock-in), in-client (data never leaves). Intent Layer is the quality multiplier.</a:t>
+              <a:t>Three pillars to land: MCP-first (scales), model-agnostic (compliance/lock-in), in-client (data never leaves). Intent Layer is the quality multiplier. Engine note: Sentinel uses the OpenAI Agents SDK (right-sized; human gate is a post-run boundary, not a mid-run pause); LangGraph is kept for heavier future incident types, chosen per type behind shared seams.</a:t>
             </a:r>
           </a:p>
         </p:txBody>
@@ -1638,7 +1709,7 @@
           <a:lstStyle/>
           <a:p>
             <a:r>
-              <a:t>Companion visual to the architecture slide: ServiceNow -&gt; ingestion/triage -&gt; LangGraph graph -&gt; MCP layer -&gt; read-only data sources; model-agnostic LLM + isolated playground on the right; all inside the client boundary; outputs go back to ticket / PR / Teams for human review.</a:t>
+              <a:t>Companion visual to the architecture slide: ServiceNow -&gt; ingestion/triage -&gt; Agents SDK pipeline -&gt; MCP layer -&gt; read-only data sources; model-agnostic LLM + isolated playground on the right; all inside the client boundary; outputs go back to ticket / PR / Teams for human review.</a:t>
             </a:r>
           </a:p>
         </p:txBody>
@@ -6325,7 +6396,7 @@
                 </a:solidFill>
                 <a:latin typeface="Calibri"/>
               </a:rPr>
-              <a:t>WHERE WE START</a:t>
+              <a:t>DEPLOYMENT &amp; ONBOARDING</a:t>
             </a:r>
           </a:p>
         </p:txBody>
@@ -6367,7 +6438,7 @@
                 </a:solidFill>
                 <a:latin typeface="Calibri"/>
               </a:rPr>
-              <a:t>Prove it on lower-tier systems first</a:t>
+              <a:t>Designed to run anywhere — without client-specific forks</a:t>
             </a:r>
           </a:p>
         </p:txBody>
@@ -6380,8 +6451,8 @@
         </p:nvSpPr>
         <p:spPr>
           <a:xfrm>
-            <a:off x="640080" y="1737360"/>
-            <a:ext cx="10972800" cy="4937760"/>
+            <a:off x="640080" y="1481328"/>
+            <a:ext cx="10972800" cy="594360"/>
           </a:xfrm>
           <a:prstGeom prst="rect">
             <a:avLst/>
@@ -6399,74 +6470,619 @@
                 <a:spcPct val="105000"/>
               </a:lnSpc>
               <a:spcAft>
-                <a:spcPts val="1000"/>
+                <a:spcPts val="600"/>
               </a:spcAft>
             </a:pPr>
             <a:r>
-              <a:rPr sz="1800" b="0">
+              <a:rPr sz="1600" b="0">
                 <a:solidFill>
                   <a:srgbClr val="333F4A"/>
                 </a:solidFill>
                 <a:latin typeface="Calibri"/>
               </a:rPr>
-              <a:t>•  Begin on Tier 3 platforms — low criticality, ~3-day resolution turnaround.</a:t>
-            </a:r>
-          </a:p>
+              <a:t>One product, configured for each client and validated before go-live:</a:t>
+            </a:r>
+          </a:p>
+        </p:txBody>
+      </p:sp>
+      <p:sp>
+        <p:nvSpPr>
+          <p:cNvPr id="7" name="Rectangle 6"/>
+          <p:cNvSpPr/>
+          <p:nvPr/>
+        </p:nvSpPr>
+        <p:spPr>
+          <a:xfrm>
+            <a:off x="640080" y="2148840"/>
+            <a:ext cx="3454298" cy="2880360"/>
+          </a:xfrm>
+          <a:prstGeom prst="rect">
+            <a:avLst/>
+          </a:prstGeom>
+          <a:solidFill>
+            <a:srgbClr val="F2F5F7"/>
+          </a:solidFill>
+          <a:ln>
+            <a:noFill/>
+          </a:ln>
+          <a:effectLst/>
+        </p:spPr>
+        <p:style>
+          <a:lnRef idx="1">
+            <a:schemeClr val="accent1"/>
+          </a:lnRef>
+          <a:fillRef idx="3">
+            <a:schemeClr val="accent1"/>
+          </a:fillRef>
+          <a:effectRef idx="2">
+            <a:schemeClr val="accent1"/>
+          </a:effectRef>
+          <a:fontRef idx="minor">
+            <a:schemeClr val="lt1"/>
+          </a:fontRef>
+        </p:style>
+        <p:txBody>
+          <a:bodyPr rtlCol="0" anchor="ctr"/>
+          <a:lstStyle/>
+          <a:p>
+            <a:pPr algn="ctr"/>
+          </a:p>
+        </p:txBody>
+      </p:sp>
+      <p:sp>
+        <p:nvSpPr>
+          <p:cNvPr id="8" name="Rectangle 7"/>
+          <p:cNvSpPr/>
+          <p:nvPr/>
+        </p:nvSpPr>
+        <p:spPr>
+          <a:xfrm>
+            <a:off x="640080" y="2148840"/>
+            <a:ext cx="3454298" cy="713232"/>
+          </a:xfrm>
+          <a:prstGeom prst="rect">
+            <a:avLst/>
+          </a:prstGeom>
+          <a:solidFill>
+            <a:srgbClr val="0F2A47"/>
+          </a:solidFill>
+          <a:ln>
+            <a:noFill/>
+          </a:ln>
+          <a:effectLst/>
+        </p:spPr>
+        <p:style>
+          <a:lnRef idx="1">
+            <a:schemeClr val="accent1"/>
+          </a:lnRef>
+          <a:fillRef idx="3">
+            <a:schemeClr val="accent1"/>
+          </a:fillRef>
+          <a:effectRef idx="2">
+            <a:schemeClr val="accent1"/>
+          </a:effectRef>
+          <a:fontRef idx="minor">
+            <a:schemeClr val="lt1"/>
+          </a:fontRef>
+        </p:style>
+        <p:txBody>
+          <a:bodyPr rtlCol="0" anchor="ctr"/>
+          <a:lstStyle/>
+          <a:p>
+            <a:pPr algn="ctr"/>
+          </a:p>
+        </p:txBody>
+      </p:sp>
+      <p:sp>
+        <p:nvSpPr>
+          <p:cNvPr id="9" name="TextBox 8"/>
+          <p:cNvSpPr txBox="1"/>
+          <p:nvPr/>
+        </p:nvSpPr>
+        <p:spPr>
+          <a:xfrm>
+            <a:off x="640080" y="2148840"/>
+            <a:ext cx="3454298" cy="713232"/>
+          </a:xfrm>
+          <a:prstGeom prst="rect">
+            <a:avLst/>
+          </a:prstGeom>
+          <a:noFill/>
+        </p:spPr>
+        <p:txBody>
+          <a:bodyPr wrap="square" anchor="ctr">
+            <a:spAutoFit/>
+          </a:bodyPr>
+          <a:lstStyle/>
+          <a:p>
+            <a:pPr algn="ctr">
+              <a:lnSpc>
+                <a:spcPct val="105000"/>
+              </a:lnSpc>
+              <a:spcAft>
+                <a:spcPts val="600"/>
+              </a:spcAft>
+            </a:pPr>
+            <a:r>
+              <a:rPr sz="1500" b="1">
+                <a:solidFill>
+                  <a:srgbClr val="FFFFFF"/>
+                </a:solidFill>
+                <a:latin typeface="Calibri"/>
+              </a:rPr>
+              <a:t>Portable by default</a:t>
+            </a:r>
+          </a:p>
+        </p:txBody>
+      </p:sp>
+      <p:sp>
+        <p:nvSpPr>
+          <p:cNvPr id="10" name="TextBox 9"/>
+          <p:cNvSpPr txBox="1"/>
+          <p:nvPr/>
+        </p:nvSpPr>
+        <p:spPr>
+          <a:xfrm>
+            <a:off x="868680" y="3081528"/>
+            <a:ext cx="2997098" cy="1783080"/>
+          </a:xfrm>
+          <a:prstGeom prst="rect">
+            <a:avLst/>
+          </a:prstGeom>
+          <a:noFill/>
+        </p:spPr>
+        <p:txBody>
+          <a:bodyPr wrap="square" anchor="t">
+            <a:spAutoFit/>
+          </a:bodyPr>
+          <a:lstStyle/>
           <a:p>
             <a:pPr algn="l">
               <a:lnSpc>
                 <a:spcPct val="105000"/>
               </a:lnSpc>
               <a:spcAft>
-                <a:spcPts val="1000"/>
+                <a:spcPts val="600"/>
               </a:spcAft>
             </a:pPr>
             <a:r>
-              <a:rPr sz="1800" b="0">
+              <a:rPr sz="1320" b="0">
                 <a:solidFill>
                   <a:srgbClr val="333F4A"/>
                 </a:solidFill>
                 <a:latin typeface="Calibri"/>
               </a:rPr>
-              <a:t>•  An instant automated investigation there turbocharges the monitoring teams' resolution-time KPIs and dashboards.</a:t>
-            </a:r>
-          </a:p>
+              <a:t>The same versioned container images run on-prem or in AWS, Azure or GCP — via Docker Compose or Helm, with an offline bundle for air-gapped environments.</a:t>
+            </a:r>
+          </a:p>
+        </p:txBody>
+      </p:sp>
+      <p:sp>
+        <p:nvSpPr>
+          <p:cNvPr id="11" name="Rectangle 10"/>
+          <p:cNvSpPr/>
+          <p:nvPr/>
+        </p:nvSpPr>
+        <p:spPr>
+          <a:xfrm>
+            <a:off x="4368698" y="2148840"/>
+            <a:ext cx="3454298" cy="2880360"/>
+          </a:xfrm>
+          <a:prstGeom prst="rect">
+            <a:avLst/>
+          </a:prstGeom>
+          <a:solidFill>
+            <a:srgbClr val="F2F5F7"/>
+          </a:solidFill>
+          <a:ln>
+            <a:noFill/>
+          </a:ln>
+          <a:effectLst/>
+        </p:spPr>
+        <p:style>
+          <a:lnRef idx="1">
+            <a:schemeClr val="accent1"/>
+          </a:lnRef>
+          <a:fillRef idx="3">
+            <a:schemeClr val="accent1"/>
+          </a:fillRef>
+          <a:effectRef idx="2">
+            <a:schemeClr val="accent1"/>
+          </a:effectRef>
+          <a:fontRef idx="minor">
+            <a:schemeClr val="lt1"/>
+          </a:fontRef>
+        </p:style>
+        <p:txBody>
+          <a:bodyPr rtlCol="0" anchor="ctr"/>
+          <a:lstStyle/>
+          <a:p>
+            <a:pPr algn="ctr"/>
+          </a:p>
+        </p:txBody>
+      </p:sp>
+      <p:sp>
+        <p:nvSpPr>
+          <p:cNvPr id="12" name="Rectangle 11"/>
+          <p:cNvSpPr/>
+          <p:nvPr/>
+        </p:nvSpPr>
+        <p:spPr>
+          <a:xfrm>
+            <a:off x="4368698" y="2148840"/>
+            <a:ext cx="3454298" cy="713232"/>
+          </a:xfrm>
+          <a:prstGeom prst="rect">
+            <a:avLst/>
+          </a:prstGeom>
+          <a:solidFill>
+            <a:srgbClr val="0F2A47"/>
+          </a:solidFill>
+          <a:ln>
+            <a:noFill/>
+          </a:ln>
+          <a:effectLst/>
+        </p:spPr>
+        <p:style>
+          <a:lnRef idx="1">
+            <a:schemeClr val="accent1"/>
+          </a:lnRef>
+          <a:fillRef idx="3">
+            <a:schemeClr val="accent1"/>
+          </a:fillRef>
+          <a:effectRef idx="2">
+            <a:schemeClr val="accent1"/>
+          </a:effectRef>
+          <a:fontRef idx="minor">
+            <a:schemeClr val="lt1"/>
+          </a:fontRef>
+        </p:style>
+        <p:txBody>
+          <a:bodyPr rtlCol="0" anchor="ctr"/>
+          <a:lstStyle/>
+          <a:p>
+            <a:pPr algn="ctr"/>
+          </a:p>
+        </p:txBody>
+      </p:sp>
+      <p:sp>
+        <p:nvSpPr>
+          <p:cNvPr id="13" name="TextBox 12"/>
+          <p:cNvSpPr txBox="1"/>
+          <p:nvPr/>
+        </p:nvSpPr>
+        <p:spPr>
+          <a:xfrm>
+            <a:off x="4368698" y="2148840"/>
+            <a:ext cx="3454298" cy="713232"/>
+          </a:xfrm>
+          <a:prstGeom prst="rect">
+            <a:avLst/>
+          </a:prstGeom>
+          <a:noFill/>
+        </p:spPr>
+        <p:txBody>
+          <a:bodyPr wrap="square" anchor="ctr">
+            <a:spAutoFit/>
+          </a:bodyPr>
+          <a:lstStyle/>
+          <a:p>
+            <a:pPr algn="ctr">
+              <a:lnSpc>
+                <a:spcPct val="105000"/>
+              </a:lnSpc>
+              <a:spcAft>
+                <a:spcPts val="600"/>
+              </a:spcAft>
+            </a:pPr>
+            <a:r>
+              <a:rPr sz="1500" b="1">
+                <a:solidFill>
+                  <a:srgbClr val="FFFFFF"/>
+                </a:solidFill>
+                <a:latin typeface="Calibri"/>
+              </a:rPr>
+              <a:t>Configuration, not custom code</a:t>
+            </a:r>
+          </a:p>
+        </p:txBody>
+      </p:sp>
+      <p:sp>
+        <p:nvSpPr>
+          <p:cNvPr id="14" name="TextBox 13"/>
+          <p:cNvSpPr txBox="1"/>
+          <p:nvPr/>
+        </p:nvSpPr>
+        <p:spPr>
+          <a:xfrm>
+            <a:off x="4597298" y="3081528"/>
+            <a:ext cx="2997098" cy="1783080"/>
+          </a:xfrm>
+          <a:prstGeom prst="rect">
+            <a:avLst/>
+          </a:prstGeom>
+          <a:noFill/>
+        </p:spPr>
+        <p:txBody>
+          <a:bodyPr wrap="square" anchor="t">
+            <a:spAutoFit/>
+          </a:bodyPr>
+          <a:lstStyle/>
           <a:p>
             <a:pPr algn="l">
               <a:lnSpc>
                 <a:spcPct val="105000"/>
               </a:lnSpc>
               <a:spcAft>
-                <a:spcPts val="1000"/>
+                <a:spcPts val="600"/>
               </a:spcAft>
             </a:pPr>
             <a:r>
-              <a:rPr sz="1800" b="0">
+              <a:rPr sz="1320" b="0">
                 <a:solidFill>
                   <a:srgbClr val="333F4A"/>
                 </a:solidFill>
                 <a:latin typeface="Calibri"/>
               </a:rPr>
-              <a:t>•  Demonstrate value and build trust with zero risk to business-critical systems.</a:t>
-            </a:r>
-          </a:p>
+              <a:t>A deployment is a reviewed config bundle + secret references + MCP/content-source endpoints. Open protocols avoid cloud lock-in and per-client forks.</a:t>
+            </a:r>
+          </a:p>
+        </p:txBody>
+      </p:sp>
+      <p:sp>
+        <p:nvSpPr>
+          <p:cNvPr id="15" name="Rectangle 14"/>
+          <p:cNvSpPr/>
+          <p:nvPr/>
+        </p:nvSpPr>
+        <p:spPr>
+          <a:xfrm>
+            <a:off x="8097316" y="2148840"/>
+            <a:ext cx="3454298" cy="2880360"/>
+          </a:xfrm>
+          <a:prstGeom prst="rect">
+            <a:avLst/>
+          </a:prstGeom>
+          <a:solidFill>
+            <a:srgbClr val="F2F5F7"/>
+          </a:solidFill>
+          <a:ln>
+            <a:noFill/>
+          </a:ln>
+          <a:effectLst/>
+        </p:spPr>
+        <p:style>
+          <a:lnRef idx="1">
+            <a:schemeClr val="accent1"/>
+          </a:lnRef>
+          <a:fillRef idx="3">
+            <a:schemeClr val="accent1"/>
+          </a:fillRef>
+          <a:effectRef idx="2">
+            <a:schemeClr val="accent1"/>
+          </a:effectRef>
+          <a:fontRef idx="minor">
+            <a:schemeClr val="lt1"/>
+          </a:fontRef>
+        </p:style>
+        <p:txBody>
+          <a:bodyPr rtlCol="0" anchor="ctr"/>
+          <a:lstStyle/>
+          <a:p>
+            <a:pPr algn="ctr"/>
+          </a:p>
+        </p:txBody>
+      </p:sp>
+      <p:sp>
+        <p:nvSpPr>
+          <p:cNvPr id="16" name="Rectangle 15"/>
+          <p:cNvSpPr/>
+          <p:nvPr/>
+        </p:nvSpPr>
+        <p:spPr>
+          <a:xfrm>
+            <a:off x="8097316" y="2148840"/>
+            <a:ext cx="3454298" cy="713232"/>
+          </a:xfrm>
+          <a:prstGeom prst="rect">
+            <a:avLst/>
+          </a:prstGeom>
+          <a:solidFill>
+            <a:srgbClr val="0F2A47"/>
+          </a:solidFill>
+          <a:ln>
+            <a:noFill/>
+          </a:ln>
+          <a:effectLst/>
+        </p:spPr>
+        <p:style>
+          <a:lnRef idx="1">
+            <a:schemeClr val="accent1"/>
+          </a:lnRef>
+          <a:fillRef idx="3">
+            <a:schemeClr val="accent1"/>
+          </a:fillRef>
+          <a:effectRef idx="2">
+            <a:schemeClr val="accent1"/>
+          </a:effectRef>
+          <a:fontRef idx="minor">
+            <a:schemeClr val="lt1"/>
+          </a:fontRef>
+        </p:style>
+        <p:txBody>
+          <a:bodyPr rtlCol="0" anchor="ctr"/>
+          <a:lstStyle/>
+          <a:p>
+            <a:pPr algn="ctr"/>
+          </a:p>
+        </p:txBody>
+      </p:sp>
+      <p:sp>
+        <p:nvSpPr>
+          <p:cNvPr id="17" name="TextBox 16"/>
+          <p:cNvSpPr txBox="1"/>
+          <p:nvPr/>
+        </p:nvSpPr>
+        <p:spPr>
+          <a:xfrm>
+            <a:off x="8097316" y="2148840"/>
+            <a:ext cx="3454298" cy="713232"/>
+          </a:xfrm>
+          <a:prstGeom prst="rect">
+            <a:avLst/>
+          </a:prstGeom>
+          <a:noFill/>
+        </p:spPr>
+        <p:txBody>
+          <a:bodyPr wrap="square" anchor="ctr">
+            <a:spAutoFit/>
+          </a:bodyPr>
+          <a:lstStyle/>
+          <a:p>
+            <a:pPr algn="ctr">
+              <a:lnSpc>
+                <a:spcPct val="105000"/>
+              </a:lnSpc>
+              <a:spcAft>
+                <a:spcPts val="600"/>
+              </a:spcAft>
+            </a:pPr>
+            <a:r>
+              <a:rPr sz="1500" b="1">
+                <a:solidFill>
+                  <a:srgbClr val="FFFFFF"/>
+                </a:solidFill>
+                <a:latin typeface="Calibri"/>
+              </a:rPr>
+              <a:t>Preflight before go-live</a:t>
+            </a:r>
+          </a:p>
+        </p:txBody>
+      </p:sp>
+      <p:sp>
+        <p:nvSpPr>
+          <p:cNvPr id="18" name="TextBox 17"/>
+          <p:cNvSpPr txBox="1"/>
+          <p:nvPr/>
+        </p:nvSpPr>
+        <p:spPr>
+          <a:xfrm>
+            <a:off x="8325916" y="3081528"/>
+            <a:ext cx="2997098" cy="1783080"/>
+          </a:xfrm>
+          <a:prstGeom prst="rect">
+            <a:avLst/>
+          </a:prstGeom>
+          <a:noFill/>
+        </p:spPr>
+        <p:txBody>
+          <a:bodyPr wrap="square" anchor="t">
+            <a:spAutoFit/>
+          </a:bodyPr>
+          <a:lstStyle/>
           <a:p>
             <a:pPr algn="l">
               <a:lnSpc>
                 <a:spcPct val="105000"/>
               </a:lnSpc>
               <a:spcAft>
-                <a:spcPts val="1000"/>
+                <a:spcPts val="600"/>
               </a:spcAft>
             </a:pPr>
             <a:r>
-              <a:rPr sz="1800" b="0">
+              <a:rPr sz="1320" b="0">
                 <a:solidFill>
                   <a:srgbClr val="333F4A"/>
                 </a:solidFill>
                 <a:latin typeface="Calibri"/>
               </a:rPr>
-              <a:t>•  Then scale up the tiers as confidence grows.</a:t>
+              <a:t>The onboarding CLI validates config, connectivity, documentation access and index freshness, then bootstraps and smoke-tests retrieval and an investigation.</a:t>
+            </a:r>
+          </a:p>
+        </p:txBody>
+      </p:sp>
+      <p:sp>
+        <p:nvSpPr>
+          <p:cNvPr id="19" name="Rectangle 18"/>
+          <p:cNvSpPr/>
+          <p:nvPr/>
+        </p:nvSpPr>
+        <p:spPr>
+          <a:xfrm>
+            <a:off x="640080" y="5303520"/>
+            <a:ext cx="10911535" cy="658368"/>
+          </a:xfrm>
+          <a:prstGeom prst="rect">
+            <a:avLst/>
+          </a:prstGeom>
+          <a:solidFill>
+            <a:srgbClr val="E4F3F6"/>
+          </a:solidFill>
+          <a:ln>
+            <a:noFill/>
+          </a:ln>
+          <a:effectLst/>
+        </p:spPr>
+        <p:style>
+          <a:lnRef idx="1">
+            <a:schemeClr val="accent1"/>
+          </a:lnRef>
+          <a:fillRef idx="3">
+            <a:schemeClr val="accent1"/>
+          </a:fillRef>
+          <a:effectRef idx="2">
+            <a:schemeClr val="accent1"/>
+          </a:effectRef>
+          <a:fontRef idx="minor">
+            <a:schemeClr val="lt1"/>
+          </a:fontRef>
+        </p:style>
+        <p:txBody>
+          <a:bodyPr rtlCol="0" anchor="ctr"/>
+          <a:lstStyle/>
+          <a:p>
+            <a:pPr algn="ctr"/>
+          </a:p>
+        </p:txBody>
+      </p:sp>
+      <p:sp>
+        <p:nvSpPr>
+          <p:cNvPr id="20" name="TextBox 19"/>
+          <p:cNvSpPr txBox="1"/>
+          <p:nvPr/>
+        </p:nvSpPr>
+        <p:spPr>
+          <a:xfrm>
+            <a:off x="777240" y="5303520"/>
+            <a:ext cx="10637215" cy="658368"/>
+          </a:xfrm>
+          <a:prstGeom prst="rect">
+            <a:avLst/>
+          </a:prstGeom>
+          <a:noFill/>
+        </p:spPr>
+        <p:txBody>
+          <a:bodyPr wrap="square" anchor="ctr">
+            <a:spAutoFit/>
+          </a:bodyPr>
+          <a:lstStyle/>
+          <a:p>
+            <a:pPr algn="ctr">
+              <a:lnSpc>
+                <a:spcPct val="105000"/>
+              </a:lnSpc>
+              <a:spcAft>
+                <a:spcPts val="600"/>
+              </a:spcAft>
+            </a:pPr>
+            <a:r>
+              <a:rPr sz="1350" b="1">
+                <a:solidFill>
+                  <a:srgbClr val="0F2A47"/>
+                </a:solidFill>
+                <a:latin typeface="Calibri"/>
+              </a:rPr>
+              <a:t>One isolated instance per client · no phone-home · all code, evidence and inference stay inside the approved boundary</a:t>
             </a:r>
           </a:p>
         </p:txBody>
@@ -6614,7 +7230,7 @@
                 </a:solidFill>
                 <a:latin typeface="Calibri"/>
               </a:rPr>
-              <a:t>HOW IT SCALES</a:t>
+              <a:t>WHERE WE START</a:t>
             </a:r>
           </a:p>
         </p:txBody>
@@ -6656,7 +7272,7 @@
                 </a:solidFill>
                 <a:latin typeface="Calibri"/>
               </a:rPr>
-              <a:t>One system today — the whole estate over time</a:t>
+              <a:t>Prove it on lower-tier systems first</a:t>
             </a:r>
           </a:p>
         </p:txBody>
@@ -6669,7 +7285,7 @@
         </p:nvSpPr>
         <p:spPr>
           <a:xfrm>
-            <a:off x="640080" y="1691640"/>
+            <a:off x="640080" y="1737360"/>
             <a:ext cx="10972800" cy="4937760"/>
           </a:xfrm>
           <a:prstGeom prst="rect">
@@ -6688,7 +7304,7 @@
                 <a:spcPct val="105000"/>
               </a:lnSpc>
               <a:spcAft>
-                <a:spcPts val="900"/>
+                <a:spcPts val="1000"/>
               </a:spcAft>
             </a:pPr>
             <a:r>
@@ -6698,7 +7314,7 @@
                 </a:solidFill>
                 <a:latin typeface="Calibri"/>
               </a:rPr>
-              <a:t>•  MCP-first design means new incident types and new systems are additive, reusing the core agent, governance and reporting unchanged.</a:t>
+              <a:t>•  Begin on Tier 3 platforms — low criticality, ~3-day resolution turnaround.</a:t>
             </a:r>
           </a:p>
           <a:p>
@@ -6707,7 +7323,7 @@
                 <a:spcPct val="105000"/>
               </a:lnSpc>
               <a:spcAft>
-                <a:spcPts val="900"/>
+                <a:spcPts val="1000"/>
               </a:spcAft>
             </a:pPr>
             <a:r>
@@ -6717,7 +7333,7 @@
                 </a:solidFill>
                 <a:latin typeface="Calibri"/>
               </a:rPr>
-              <a:t>•  Start with Splunk-driven incidents on microservices; broaden to any incident type — e.g. Airflow DAG/task failures, or LLM-output quality-metric alerts.</a:t>
+              <a:t>•  An instant automated investigation there turbocharges the monitoring teams' resolution-time KPIs and dashboards.</a:t>
             </a:r>
           </a:p>
           <a:p>
@@ -6726,7 +7342,7 @@
                 <a:spcPct val="105000"/>
               </a:lnSpc>
               <a:spcAft>
-                <a:spcPts val="900"/>
+                <a:spcPts val="1000"/>
               </a:spcAft>
             </a:pPr>
             <a:r>
@@ -6736,7 +7352,7 @@
                 </a:solidFill>
                 <a:latin typeface="Calibri"/>
               </a:rPr>
-              <a:t>•  Triggers generalise too — ServiceNow today; Airflow events and email alerts next.</a:t>
+              <a:t>•  Demonstrate value and build trust with zero risk to business-critical systems.</a:t>
             </a:r>
           </a:p>
           <a:p>
@@ -6745,7 +7361,7 @@
                 <a:spcPct val="105000"/>
               </a:lnSpc>
               <a:spcAft>
-                <a:spcPts val="900"/>
+                <a:spcPts val="1000"/>
               </a:spcAft>
             </a:pPr>
             <a:r>
@@ -6755,26 +7371,7 @@
                 </a:solidFill>
                 <a:latin typeface="Calibri"/>
               </a:rPr>
-              <a:t>•  Progressive autonomy — automation is earned: human-approved first, then opt-in auto-apply on lower-tier systems once the track record is proven (always audited and reversible).</a:t>
-            </a:r>
-          </a:p>
-          <a:p>
-            <a:pPr algn="l">
-              <a:lnSpc>
-                <a:spcPct val="105000"/>
-              </a:lnSpc>
-              <a:spcAft>
-                <a:spcPts val="900"/>
-              </a:spcAft>
-            </a:pPr>
-            <a:r>
-              <a:rPr sz="1800" b="0">
-                <a:solidFill>
-                  <a:srgbClr val="333F4A"/>
-                </a:solidFill>
-                <a:latin typeface="Calibri"/>
-              </a:rPr>
-              <a:t>•  Applicable across independent business areas, each with many candidate systems.</a:t>
+              <a:t>•  Then scale up the tiers as confidence grows.</a:t>
             </a:r>
           </a:p>
         </p:txBody>
@@ -6922,7 +7519,7 @@
                 </a:solidFill>
                 <a:latin typeface="Calibri"/>
               </a:rPr>
-              <a:t>THE BIGGER PICTURE</a:t>
+              <a:t>HOW IT SCALES</a:t>
             </a:r>
           </a:p>
         </p:txBody>
@@ -6964,7 +7561,7 @@
                 </a:solidFill>
                 <a:latin typeface="Calibri"/>
               </a:rPr>
-              <a:t>Sentinel is the first feature of Mission Control</a:t>
+              <a:t>One system today — the whole estate over time</a:t>
             </a:r>
           </a:p>
         </p:txBody>
@@ -6977,7 +7574,7 @@
         </p:nvSpPr>
         <p:spPr>
           <a:xfrm>
-            <a:off x="640080" y="1554480"/>
+            <a:off x="640080" y="1691640"/>
             <a:ext cx="10972800" cy="4937760"/>
           </a:xfrm>
           <a:prstGeom prst="rect">
@@ -6996,17 +7593,17 @@
                 <a:spcPct val="105000"/>
               </a:lnSpc>
               <a:spcAft>
-                <a:spcPts val="800"/>
+                <a:spcPts val="900"/>
               </a:spcAft>
             </a:pPr>
             <a:r>
-              <a:rPr sz="1700" b="0">
+              <a:rPr sz="1800" b="0">
                 <a:solidFill>
                   <a:srgbClr val="333F4A"/>
                 </a:solidFill>
                 <a:latin typeface="Calibri"/>
               </a:rPr>
-              <a:t>•  Mission Control is an operations cockpit for the teams that monitor and support many applications across a shared incident queue.</a:t>
+              <a:t>•  MCP-first design means new incident types and new systems are additive, reusing the core agent, governance and reporting unchanged.</a:t>
             </a:r>
           </a:p>
           <a:p>
@@ -7015,878 +7612,74 @@
                 <a:spcPct val="105000"/>
               </a:lnSpc>
               <a:spcAft>
-                <a:spcPts val="800"/>
+                <a:spcPts val="900"/>
               </a:spcAft>
             </a:pPr>
             <a:r>
-              <a:rPr sz="1700" b="0">
+              <a:rPr sz="1800" b="0">
                 <a:solidFill>
                   <a:srgbClr val="333F4A"/>
                 </a:solidFill>
                 <a:latin typeface="Calibri"/>
               </a:rPr>
-              <a:t>•  It organises incidents per application, centralises monitoring dashboards, and — through Sentinel — auto-investigates and resolves them.</a:t>
-            </a:r>
-          </a:p>
-        </p:txBody>
-      </p:sp>
-      <p:sp>
-        <p:nvSpPr>
-          <p:cNvPr id="7" name="Rectangle 6"/>
-          <p:cNvSpPr/>
-          <p:nvPr/>
-        </p:nvSpPr>
-        <p:spPr>
-          <a:xfrm>
-            <a:off x="640080" y="3154680"/>
-            <a:ext cx="2522143" cy="1600200"/>
-          </a:xfrm>
-          <a:prstGeom prst="rect">
-            <a:avLst/>
-          </a:prstGeom>
-          <a:solidFill>
-            <a:srgbClr val="F2F5F7"/>
-          </a:solidFill>
-          <a:ln>
-            <a:noFill/>
-          </a:ln>
-          <a:effectLst/>
-        </p:spPr>
-        <p:style>
-          <a:lnRef idx="1">
-            <a:schemeClr val="accent1"/>
-          </a:lnRef>
-          <a:fillRef idx="3">
-            <a:schemeClr val="accent1"/>
-          </a:fillRef>
-          <a:effectRef idx="2">
-            <a:schemeClr val="accent1"/>
-          </a:effectRef>
-          <a:fontRef idx="minor">
-            <a:schemeClr val="lt1"/>
-          </a:fontRef>
-        </p:style>
-        <p:txBody>
-          <a:bodyPr rtlCol="0" anchor="ctr"/>
-          <a:lstStyle/>
-          <a:p>
-            <a:pPr algn="ctr"/>
-          </a:p>
-        </p:txBody>
-      </p:sp>
-      <p:sp>
-        <p:nvSpPr>
-          <p:cNvPr id="8" name="Rectangle 7"/>
-          <p:cNvSpPr/>
-          <p:nvPr/>
-        </p:nvSpPr>
-        <p:spPr>
-          <a:xfrm>
-            <a:off x="640080" y="3154680"/>
-            <a:ext cx="2522143" cy="548640"/>
-          </a:xfrm>
-          <a:prstGeom prst="rect">
-            <a:avLst/>
-          </a:prstGeom>
-          <a:solidFill>
-            <a:srgbClr val="189AB4"/>
-          </a:solidFill>
-          <a:ln>
-            <a:noFill/>
-          </a:ln>
-          <a:effectLst/>
-        </p:spPr>
-        <p:style>
-          <a:lnRef idx="1">
-            <a:schemeClr val="accent1"/>
-          </a:lnRef>
-          <a:fillRef idx="3">
-            <a:schemeClr val="accent1"/>
-          </a:fillRef>
-          <a:effectRef idx="2">
-            <a:schemeClr val="accent1"/>
-          </a:effectRef>
-          <a:fontRef idx="minor">
-            <a:schemeClr val="lt1"/>
-          </a:fontRef>
-        </p:style>
-        <p:txBody>
-          <a:bodyPr rtlCol="0" anchor="ctr"/>
-          <a:lstStyle/>
-          <a:p>
-            <a:pPr algn="ctr"/>
-          </a:p>
-        </p:txBody>
-      </p:sp>
-      <p:sp>
-        <p:nvSpPr>
-          <p:cNvPr id="9" name="TextBox 8"/>
-          <p:cNvSpPr txBox="1"/>
-          <p:nvPr/>
-        </p:nvSpPr>
-        <p:spPr>
-          <a:xfrm>
-            <a:off x="640080" y="3154680"/>
-            <a:ext cx="2522143" cy="548640"/>
-          </a:xfrm>
-          <a:prstGeom prst="rect">
-            <a:avLst/>
-          </a:prstGeom>
-          <a:noFill/>
-        </p:spPr>
-        <p:txBody>
-          <a:bodyPr wrap="square" anchor="ctr">
-            <a:spAutoFit/>
-          </a:bodyPr>
-          <a:lstStyle/>
-          <a:p>
-            <a:pPr algn="ctr">
+              <a:t>•  Start with Splunk-driven incidents on microservices; broaden to any incident type — e.g. Airflow DAG/task failures, or LLM-output quality-metric alerts.</a:t>
+            </a:r>
+          </a:p>
+          <a:p>
+            <a:pPr algn="l">
               <a:lnSpc>
                 <a:spcPct val="105000"/>
               </a:lnSpc>
               <a:spcAft>
-                <a:spcPts val="600"/>
+                <a:spcPts val="900"/>
               </a:spcAft>
             </a:pPr>
             <a:r>
-              <a:rPr sz="1500" b="1">
-                <a:solidFill>
-                  <a:srgbClr val="FFFFFF"/>
-                </a:solidFill>
-                <a:latin typeface="Calibri"/>
-              </a:rPr>
-              <a:t>Sentinel</a:t>
-            </a:r>
-          </a:p>
-        </p:txBody>
-      </p:sp>
-      <p:sp>
-        <p:nvSpPr>
-          <p:cNvPr id="10" name="TextBox 9"/>
-          <p:cNvSpPr txBox="1"/>
-          <p:nvPr/>
-        </p:nvSpPr>
-        <p:spPr>
-          <a:xfrm>
-            <a:off x="640080" y="3813048"/>
-            <a:ext cx="2522143" cy="731520"/>
-          </a:xfrm>
-          <a:prstGeom prst="rect">
-            <a:avLst/>
-          </a:prstGeom>
-          <a:noFill/>
-        </p:spPr>
-        <p:txBody>
-          <a:bodyPr wrap="square" anchor="t">
-            <a:spAutoFit/>
-          </a:bodyPr>
-          <a:lstStyle/>
-          <a:p>
-            <a:pPr algn="ctr">
+              <a:rPr sz="1800" b="0">
+                <a:solidFill>
+                  <a:srgbClr val="333F4A"/>
+                </a:solidFill>
+                <a:latin typeface="Calibri"/>
+              </a:rPr>
+              <a:t>•  Triggers generalise too — ServiceNow today; Airflow events and email alerts next.</a:t>
+            </a:r>
+          </a:p>
+          <a:p>
+            <a:pPr algn="l">
               <a:lnSpc>
                 <a:spcPct val="105000"/>
               </a:lnSpc>
               <a:spcAft>
-                <a:spcPts val="600"/>
+                <a:spcPts val="900"/>
               </a:spcAft>
             </a:pPr>
             <a:r>
-              <a:rPr sz="1250" b="0">
+              <a:rPr sz="1800" b="0">
                 <a:solidFill>
                   <a:srgbClr val="333F4A"/>
                 </a:solidFill>
                 <a:latin typeface="Calibri"/>
               </a:rPr>
-              <a:t>Auto-investigation
-&amp; resolution</a:t>
-            </a:r>
-          </a:p>
-        </p:txBody>
-      </p:sp>
-      <p:sp>
-        <p:nvSpPr>
-          <p:cNvPr id="11" name="TextBox 10"/>
-          <p:cNvSpPr txBox="1"/>
-          <p:nvPr/>
-        </p:nvSpPr>
-        <p:spPr>
-          <a:xfrm>
-            <a:off x="640080" y="4453128"/>
-            <a:ext cx="2522143" cy="274320"/>
-          </a:xfrm>
-          <a:prstGeom prst="rect">
-            <a:avLst/>
-          </a:prstGeom>
-          <a:noFill/>
-        </p:spPr>
-        <p:txBody>
-          <a:bodyPr wrap="square" anchor="t">
-            <a:spAutoFit/>
-          </a:bodyPr>
-          <a:lstStyle/>
-          <a:p>
-            <a:pPr algn="ctr">
+              <a:t>•  Progressive autonomy — automation is earned: human-approved first, then opt-in auto-apply on lower-tier systems once the track record is proven (always audited and reversible).</a:t>
+            </a:r>
+          </a:p>
+          <a:p>
+            <a:pPr algn="l">
               <a:lnSpc>
                 <a:spcPct val="105000"/>
               </a:lnSpc>
               <a:spcAft>
-                <a:spcPts val="600"/>
+                <a:spcPts val="900"/>
               </a:spcAft>
             </a:pPr>
             <a:r>
-              <a:rPr sz="1100" b="1">
-                <a:solidFill>
-                  <a:srgbClr val="189AB4"/>
-                </a:solidFill>
-                <a:latin typeface="Calibri"/>
-              </a:rPr>
-              <a:t>◆ ships first</a:t>
-            </a:r>
-          </a:p>
-        </p:txBody>
-      </p:sp>
-      <p:sp>
-        <p:nvSpPr>
-          <p:cNvPr id="12" name="Rectangle 11"/>
-          <p:cNvSpPr/>
-          <p:nvPr/>
-        </p:nvSpPr>
-        <p:spPr>
-          <a:xfrm>
-            <a:off x="3436543" y="3154680"/>
-            <a:ext cx="2522143" cy="1600200"/>
-          </a:xfrm>
-          <a:prstGeom prst="rect">
-            <a:avLst/>
-          </a:prstGeom>
-          <a:solidFill>
-            <a:srgbClr val="F2F5F7"/>
-          </a:solidFill>
-          <a:ln>
-            <a:noFill/>
-          </a:ln>
-          <a:effectLst/>
-        </p:spPr>
-        <p:style>
-          <a:lnRef idx="1">
-            <a:schemeClr val="accent1"/>
-          </a:lnRef>
-          <a:fillRef idx="3">
-            <a:schemeClr val="accent1"/>
-          </a:fillRef>
-          <a:effectRef idx="2">
-            <a:schemeClr val="accent1"/>
-          </a:effectRef>
-          <a:fontRef idx="minor">
-            <a:schemeClr val="lt1"/>
-          </a:fontRef>
-        </p:style>
-        <p:txBody>
-          <a:bodyPr rtlCol="0" anchor="ctr"/>
-          <a:lstStyle/>
-          <a:p>
-            <a:pPr algn="ctr"/>
-          </a:p>
-        </p:txBody>
-      </p:sp>
-      <p:sp>
-        <p:nvSpPr>
-          <p:cNvPr id="13" name="Rectangle 12"/>
-          <p:cNvSpPr/>
-          <p:nvPr/>
-        </p:nvSpPr>
-        <p:spPr>
-          <a:xfrm>
-            <a:off x="3436543" y="3154680"/>
-            <a:ext cx="2522143" cy="548640"/>
-          </a:xfrm>
-          <a:prstGeom prst="rect">
-            <a:avLst/>
-          </a:prstGeom>
-          <a:solidFill>
-            <a:srgbClr val="0F2A47"/>
-          </a:solidFill>
-          <a:ln>
-            <a:noFill/>
-          </a:ln>
-          <a:effectLst/>
-        </p:spPr>
-        <p:style>
-          <a:lnRef idx="1">
-            <a:schemeClr val="accent1"/>
-          </a:lnRef>
-          <a:fillRef idx="3">
-            <a:schemeClr val="accent1"/>
-          </a:fillRef>
-          <a:effectRef idx="2">
-            <a:schemeClr val="accent1"/>
-          </a:effectRef>
-          <a:fontRef idx="minor">
-            <a:schemeClr val="lt1"/>
-          </a:fontRef>
-        </p:style>
-        <p:txBody>
-          <a:bodyPr rtlCol="0" anchor="ctr"/>
-          <a:lstStyle/>
-          <a:p>
-            <a:pPr algn="ctr"/>
-          </a:p>
-        </p:txBody>
-      </p:sp>
-      <p:sp>
-        <p:nvSpPr>
-          <p:cNvPr id="14" name="TextBox 13"/>
-          <p:cNvSpPr txBox="1"/>
-          <p:nvPr/>
-        </p:nvSpPr>
-        <p:spPr>
-          <a:xfrm>
-            <a:off x="3436543" y="3154680"/>
-            <a:ext cx="2522143" cy="548640"/>
-          </a:xfrm>
-          <a:prstGeom prst="rect">
-            <a:avLst/>
-          </a:prstGeom>
-          <a:noFill/>
-        </p:spPr>
-        <p:txBody>
-          <a:bodyPr wrap="square" anchor="ctr">
-            <a:spAutoFit/>
-          </a:bodyPr>
-          <a:lstStyle/>
-          <a:p>
-            <a:pPr algn="ctr">
-              <a:lnSpc>
-                <a:spcPct val="105000"/>
-              </a:lnSpc>
-              <a:spcAft>
-                <a:spcPts val="600"/>
-              </a:spcAft>
-            </a:pPr>
-            <a:r>
-              <a:rPr sz="1500" b="1">
-                <a:solidFill>
-                  <a:srgbClr val="FFFFFF"/>
-                </a:solidFill>
-                <a:latin typeface="Calibri"/>
-              </a:rPr>
-              <a:t>Incident cockpit</a:t>
-            </a:r>
-          </a:p>
-        </p:txBody>
-      </p:sp>
-      <p:sp>
-        <p:nvSpPr>
-          <p:cNvPr id="15" name="TextBox 14"/>
-          <p:cNvSpPr txBox="1"/>
-          <p:nvPr/>
-        </p:nvSpPr>
-        <p:spPr>
-          <a:xfrm>
-            <a:off x="3436543" y="3813048"/>
-            <a:ext cx="2522143" cy="731520"/>
-          </a:xfrm>
-          <a:prstGeom prst="rect">
-            <a:avLst/>
-          </a:prstGeom>
-          <a:noFill/>
-        </p:spPr>
-        <p:txBody>
-          <a:bodyPr wrap="square" anchor="t">
-            <a:spAutoFit/>
-          </a:bodyPr>
-          <a:lstStyle/>
-          <a:p>
-            <a:pPr algn="ctr">
-              <a:lnSpc>
-                <a:spcPct val="105000"/>
-              </a:lnSpc>
-              <a:spcAft>
-                <a:spcPts val="600"/>
-              </a:spcAft>
-            </a:pPr>
-            <a:r>
-              <a:rPr sz="1250" b="0">
+              <a:rPr sz="1800" b="0">
                 <a:solidFill>
                   <a:srgbClr val="333F4A"/>
                 </a:solidFill>
                 <a:latin typeface="Calibri"/>
               </a:rPr>
-              <a:t>Per-application,
-historical view</a:t>
-            </a:r>
-          </a:p>
-        </p:txBody>
-      </p:sp>
-      <p:sp>
-        <p:nvSpPr>
-          <p:cNvPr id="16" name="Rectangle 15"/>
-          <p:cNvSpPr/>
-          <p:nvPr/>
-        </p:nvSpPr>
-        <p:spPr>
-          <a:xfrm>
-            <a:off x="6233006" y="3154680"/>
-            <a:ext cx="2522143" cy="1600200"/>
-          </a:xfrm>
-          <a:prstGeom prst="rect">
-            <a:avLst/>
-          </a:prstGeom>
-          <a:solidFill>
-            <a:srgbClr val="F2F5F7"/>
-          </a:solidFill>
-          <a:ln>
-            <a:noFill/>
-          </a:ln>
-          <a:effectLst/>
-        </p:spPr>
-        <p:style>
-          <a:lnRef idx="1">
-            <a:schemeClr val="accent1"/>
-          </a:lnRef>
-          <a:fillRef idx="3">
-            <a:schemeClr val="accent1"/>
-          </a:fillRef>
-          <a:effectRef idx="2">
-            <a:schemeClr val="accent1"/>
-          </a:effectRef>
-          <a:fontRef idx="minor">
-            <a:schemeClr val="lt1"/>
-          </a:fontRef>
-        </p:style>
-        <p:txBody>
-          <a:bodyPr rtlCol="0" anchor="ctr"/>
-          <a:lstStyle/>
-          <a:p>
-            <a:pPr algn="ctr"/>
-          </a:p>
-        </p:txBody>
-      </p:sp>
-      <p:sp>
-        <p:nvSpPr>
-          <p:cNvPr id="17" name="Rectangle 16"/>
-          <p:cNvSpPr/>
-          <p:nvPr/>
-        </p:nvSpPr>
-        <p:spPr>
-          <a:xfrm>
-            <a:off x="6233006" y="3154680"/>
-            <a:ext cx="2522143" cy="548640"/>
-          </a:xfrm>
-          <a:prstGeom prst="rect">
-            <a:avLst/>
-          </a:prstGeom>
-          <a:solidFill>
-            <a:srgbClr val="0F2A47"/>
-          </a:solidFill>
-          <a:ln>
-            <a:noFill/>
-          </a:ln>
-          <a:effectLst/>
-        </p:spPr>
-        <p:style>
-          <a:lnRef idx="1">
-            <a:schemeClr val="accent1"/>
-          </a:lnRef>
-          <a:fillRef idx="3">
-            <a:schemeClr val="accent1"/>
-          </a:fillRef>
-          <a:effectRef idx="2">
-            <a:schemeClr val="accent1"/>
-          </a:effectRef>
-          <a:fontRef idx="minor">
-            <a:schemeClr val="lt1"/>
-          </a:fontRef>
-        </p:style>
-        <p:txBody>
-          <a:bodyPr rtlCol="0" anchor="ctr"/>
-          <a:lstStyle/>
-          <a:p>
-            <a:pPr algn="ctr"/>
-          </a:p>
-        </p:txBody>
-      </p:sp>
-      <p:sp>
-        <p:nvSpPr>
-          <p:cNvPr id="18" name="TextBox 17"/>
-          <p:cNvSpPr txBox="1"/>
-          <p:nvPr/>
-        </p:nvSpPr>
-        <p:spPr>
-          <a:xfrm>
-            <a:off x="6233006" y="3154680"/>
-            <a:ext cx="2522143" cy="548640"/>
-          </a:xfrm>
-          <a:prstGeom prst="rect">
-            <a:avLst/>
-          </a:prstGeom>
-          <a:noFill/>
-        </p:spPr>
-        <p:txBody>
-          <a:bodyPr wrap="square" anchor="ctr">
-            <a:spAutoFit/>
-          </a:bodyPr>
-          <a:lstStyle/>
-          <a:p>
-            <a:pPr algn="ctr">
-              <a:lnSpc>
-                <a:spcPct val="105000"/>
-              </a:lnSpc>
-              <a:spcAft>
-                <a:spcPts val="600"/>
-              </a:spcAft>
-            </a:pPr>
-            <a:r>
-              <a:rPr sz="1500" b="1">
-                <a:solidFill>
-                  <a:srgbClr val="FFFFFF"/>
-                </a:solidFill>
-                <a:latin typeface="Calibri"/>
-              </a:rPr>
-              <a:t>Dashboard hub</a:t>
-            </a:r>
-          </a:p>
-        </p:txBody>
-      </p:sp>
-      <p:sp>
-        <p:nvSpPr>
-          <p:cNvPr id="19" name="TextBox 18"/>
-          <p:cNvSpPr txBox="1"/>
-          <p:nvPr/>
-        </p:nvSpPr>
-        <p:spPr>
-          <a:xfrm>
-            <a:off x="6233006" y="3813048"/>
-            <a:ext cx="2522143" cy="731520"/>
-          </a:xfrm>
-          <a:prstGeom prst="rect">
-            <a:avLst/>
-          </a:prstGeom>
-          <a:noFill/>
-        </p:spPr>
-        <p:txBody>
-          <a:bodyPr wrap="square" anchor="t">
-            <a:spAutoFit/>
-          </a:bodyPr>
-          <a:lstStyle/>
-          <a:p>
-            <a:pPr algn="ctr">
-              <a:lnSpc>
-                <a:spcPct val="105000"/>
-              </a:lnSpc>
-              <a:spcAft>
-                <a:spcPts val="600"/>
-              </a:spcAft>
-            </a:pPr>
-            <a:r>
-              <a:rPr sz="1250" b="0">
-                <a:solidFill>
-                  <a:srgbClr val="333F4A"/>
-                </a:solidFill>
-                <a:latin typeface="Calibri"/>
-              </a:rPr>
-              <a:t>QuickSight, Tableau
-in one place</a:t>
-            </a:r>
-          </a:p>
-        </p:txBody>
-      </p:sp>
-      <p:sp>
-        <p:nvSpPr>
-          <p:cNvPr id="20" name="Rectangle 19"/>
-          <p:cNvSpPr/>
-          <p:nvPr/>
-        </p:nvSpPr>
-        <p:spPr>
-          <a:xfrm>
-            <a:off x="9029469" y="3154680"/>
-            <a:ext cx="2522143" cy="1600200"/>
-          </a:xfrm>
-          <a:prstGeom prst="rect">
-            <a:avLst/>
-          </a:prstGeom>
-          <a:solidFill>
-            <a:srgbClr val="F2F5F7"/>
-          </a:solidFill>
-          <a:ln>
-            <a:noFill/>
-          </a:ln>
-          <a:effectLst/>
-        </p:spPr>
-        <p:style>
-          <a:lnRef idx="1">
-            <a:schemeClr val="accent1"/>
-          </a:lnRef>
-          <a:fillRef idx="3">
-            <a:schemeClr val="accent1"/>
-          </a:fillRef>
-          <a:effectRef idx="2">
-            <a:schemeClr val="accent1"/>
-          </a:effectRef>
-          <a:fontRef idx="minor">
-            <a:schemeClr val="lt1"/>
-          </a:fontRef>
-        </p:style>
-        <p:txBody>
-          <a:bodyPr rtlCol="0" anchor="ctr"/>
-          <a:lstStyle/>
-          <a:p>
-            <a:pPr algn="ctr"/>
-          </a:p>
-        </p:txBody>
-      </p:sp>
-      <p:sp>
-        <p:nvSpPr>
-          <p:cNvPr id="21" name="Rectangle 20"/>
-          <p:cNvSpPr/>
-          <p:nvPr/>
-        </p:nvSpPr>
-        <p:spPr>
-          <a:xfrm>
-            <a:off x="9029469" y="3154680"/>
-            <a:ext cx="2522143" cy="548640"/>
-          </a:xfrm>
-          <a:prstGeom prst="rect">
-            <a:avLst/>
-          </a:prstGeom>
-          <a:solidFill>
-            <a:srgbClr val="0F2A47"/>
-          </a:solidFill>
-          <a:ln>
-            <a:noFill/>
-          </a:ln>
-          <a:effectLst/>
-        </p:spPr>
-        <p:style>
-          <a:lnRef idx="1">
-            <a:schemeClr val="accent1"/>
-          </a:lnRef>
-          <a:fillRef idx="3">
-            <a:schemeClr val="accent1"/>
-          </a:fillRef>
-          <a:effectRef idx="2">
-            <a:schemeClr val="accent1"/>
-          </a:effectRef>
-          <a:fontRef idx="minor">
-            <a:schemeClr val="lt1"/>
-          </a:fontRef>
-        </p:style>
-        <p:txBody>
-          <a:bodyPr rtlCol="0" anchor="ctr"/>
-          <a:lstStyle/>
-          <a:p>
-            <a:pPr algn="ctr"/>
-          </a:p>
-        </p:txBody>
-      </p:sp>
-      <p:sp>
-        <p:nvSpPr>
-          <p:cNvPr id="22" name="TextBox 21"/>
-          <p:cNvSpPr txBox="1"/>
-          <p:nvPr/>
-        </p:nvSpPr>
-        <p:spPr>
-          <a:xfrm>
-            <a:off x="9029469" y="3154680"/>
-            <a:ext cx="2522143" cy="548640"/>
-          </a:xfrm>
-          <a:prstGeom prst="rect">
-            <a:avLst/>
-          </a:prstGeom>
-          <a:noFill/>
-        </p:spPr>
-        <p:txBody>
-          <a:bodyPr wrap="square" anchor="ctr">
-            <a:spAutoFit/>
-          </a:bodyPr>
-          <a:lstStyle/>
-          <a:p>
-            <a:pPr algn="ctr">
-              <a:lnSpc>
-                <a:spcPct val="105000"/>
-              </a:lnSpc>
-              <a:spcAft>
-                <a:spcPts val="600"/>
-              </a:spcAft>
-            </a:pPr>
-            <a:r>
-              <a:rPr sz="1500" b="1">
-                <a:solidFill>
-                  <a:srgbClr val="FFFFFF"/>
-                </a:solidFill>
-                <a:latin typeface="Calibri"/>
-              </a:rPr>
-              <a:t>Analytics</a:t>
-            </a:r>
-          </a:p>
-        </p:txBody>
-      </p:sp>
-      <p:sp>
-        <p:nvSpPr>
-          <p:cNvPr id="23" name="TextBox 22"/>
-          <p:cNvSpPr txBox="1"/>
-          <p:nvPr/>
-        </p:nvSpPr>
-        <p:spPr>
-          <a:xfrm>
-            <a:off x="9029469" y="3813048"/>
-            <a:ext cx="2522143" cy="731520"/>
-          </a:xfrm>
-          <a:prstGeom prst="rect">
-            <a:avLst/>
-          </a:prstGeom>
-          <a:noFill/>
-        </p:spPr>
-        <p:txBody>
-          <a:bodyPr wrap="square" anchor="t">
-            <a:spAutoFit/>
-          </a:bodyPr>
-          <a:lstStyle/>
-          <a:p>
-            <a:pPr algn="ctr">
-              <a:lnSpc>
-                <a:spcPct val="105000"/>
-              </a:lnSpc>
-              <a:spcAft>
-                <a:spcPts val="600"/>
-              </a:spcAft>
-            </a:pPr>
-            <a:r>
-              <a:rPr sz="1250" b="0">
-                <a:solidFill>
-                  <a:srgbClr val="333F4A"/>
-                </a:solidFill>
-                <a:latin typeface="Calibri"/>
-              </a:rPr>
-              <a:t>MTTR, trends, KPIs</a:t>
-            </a:r>
-          </a:p>
-        </p:txBody>
-      </p:sp>
-      <p:sp>
-        <p:nvSpPr>
-          <p:cNvPr id="24" name="Rectangle 23"/>
-          <p:cNvSpPr/>
-          <p:nvPr/>
-        </p:nvSpPr>
-        <p:spPr>
-          <a:xfrm>
-            <a:off x="640080" y="4983480"/>
-            <a:ext cx="10911535" cy="566928"/>
-          </a:xfrm>
-          <a:prstGeom prst="rect">
-            <a:avLst/>
-          </a:prstGeom>
-          <a:solidFill>
-            <a:srgbClr val="E4F3F6"/>
-          </a:solidFill>
-          <a:ln>
-            <a:noFill/>
-          </a:ln>
-          <a:effectLst/>
-        </p:spPr>
-        <p:style>
-          <a:lnRef idx="1">
-            <a:schemeClr val="accent1"/>
-          </a:lnRef>
-          <a:fillRef idx="3">
-            <a:schemeClr val="accent1"/>
-          </a:fillRef>
-          <a:effectRef idx="2">
-            <a:schemeClr val="accent1"/>
-          </a:effectRef>
-          <a:fontRef idx="minor">
-            <a:schemeClr val="lt1"/>
-          </a:fontRef>
-        </p:style>
-        <p:txBody>
-          <a:bodyPr rtlCol="0" anchor="ctr"/>
-          <a:lstStyle/>
-          <a:p>
-            <a:pPr algn="ctr"/>
-          </a:p>
-        </p:txBody>
-      </p:sp>
-      <p:sp>
-        <p:nvSpPr>
-          <p:cNvPr id="25" name="TextBox 24"/>
-          <p:cNvSpPr txBox="1"/>
-          <p:nvPr/>
-        </p:nvSpPr>
-        <p:spPr>
-          <a:xfrm>
-            <a:off x="640080" y="4983480"/>
-            <a:ext cx="10911535" cy="566928"/>
-          </a:xfrm>
-          <a:prstGeom prst="rect">
-            <a:avLst/>
-          </a:prstGeom>
-          <a:noFill/>
-        </p:spPr>
-        <p:txBody>
-          <a:bodyPr wrap="square" anchor="ctr">
-            <a:spAutoFit/>
-          </a:bodyPr>
-          <a:lstStyle/>
-          <a:p>
-            <a:pPr algn="ctr">
-              <a:lnSpc>
-                <a:spcPct val="105000"/>
-              </a:lnSpc>
-              <a:spcAft>
-                <a:spcPts val="600"/>
-              </a:spcAft>
-            </a:pPr>
-            <a:r>
-              <a:rPr sz="1300" b="1">
-                <a:solidFill>
-                  <a:srgbClr val="0F2A47"/>
-                </a:solidFill>
-                <a:latin typeface="Calibri"/>
-              </a:rPr>
-              <a:t>Application catalog — the shared foundation (apps · tiers · repos · log indices · data sources)</a:t>
-            </a:r>
-          </a:p>
-        </p:txBody>
-      </p:sp>
-      <p:sp>
-        <p:nvSpPr>
-          <p:cNvPr id="26" name="TextBox 25"/>
-          <p:cNvSpPr txBox="1"/>
-          <p:nvPr/>
-        </p:nvSpPr>
-        <p:spPr>
-          <a:xfrm>
-            <a:off x="640080" y="5806440"/>
-            <a:ext cx="10972800" cy="640080"/>
-          </a:xfrm>
-          <a:prstGeom prst="rect">
-            <a:avLst/>
-          </a:prstGeom>
-          <a:noFill/>
-        </p:spPr>
-        <p:txBody>
-          <a:bodyPr wrap="square" anchor="t">
-            <a:spAutoFit/>
-          </a:bodyPr>
-          <a:lstStyle/>
-          <a:p>
-            <a:pPr algn="ctr">
-              <a:lnSpc>
-                <a:spcPct val="105000"/>
-              </a:lnSpc>
-              <a:spcAft>
-                <a:spcPts val="600"/>
-              </a:spcAft>
-            </a:pPr>
-            <a:r>
-              <a:rPr sz="1400" b="1">
-                <a:solidFill>
-                  <a:srgbClr val="6B7780"/>
-                </a:solidFill>
-                <a:latin typeface="Calibri"/>
-              </a:rPr>
-              <a:t>ServiceNow stays the system of record — Mission Control works off it, not instead of it.</a:t>
+              <a:t>•  Applicable across independent business areas, each with many candidate systems.</a:t>
             </a:r>
           </a:p>
         </p:txBody>
@@ -8034,7 +7827,7 @@
                 </a:solidFill>
                 <a:latin typeface="Calibri"/>
               </a:rPr>
-              <a:t>BEYOND RESOLUTION</a:t>
+              <a:t>THE BIGGER PICTURE</a:t>
             </a:r>
           </a:p>
         </p:txBody>
@@ -8076,7 +7869,7 @@
                 </a:solidFill>
                 <a:latin typeface="Calibri"/>
               </a:rPr>
-              <a:t>A compounding knowledge dividend</a:t>
+              <a:t>Sentinel is the first feature of Mission Control</a:t>
             </a:r>
           </a:p>
         </p:txBody>
@@ -8089,8 +7882,8 @@
         </p:nvSpPr>
         <p:spPr>
           <a:xfrm>
-            <a:off x="640080" y="1463040"/>
-            <a:ext cx="10972800" cy="640080"/>
+            <a:off x="640080" y="1554480"/>
+            <a:ext cx="10972800" cy="4937760"/>
           </a:xfrm>
           <a:prstGeom prst="rect">
             <a:avLst/>
@@ -8108,17 +7901,36 @@
                 <a:spcPct val="105000"/>
               </a:lnSpc>
               <a:spcAft>
-                <a:spcPts val="600"/>
+                <a:spcPts val="800"/>
               </a:spcAft>
             </a:pPr>
             <a:r>
-              <a:rPr sz="1600" b="0">
+              <a:rPr sz="1700" b="0">
                 <a:solidFill>
                   <a:srgbClr val="333F4A"/>
                 </a:solidFill>
                 <a:latin typeface="Calibri"/>
               </a:rPr>
-              <a:t>Sentinel and the support team run on captured knowledge — so the platform turns it into a durable, growing asset:</a:t>
+              <a:t>•  Mission Control is an operations cockpit for the teams that monitor and support many applications across a shared incident queue.</a:t>
+            </a:r>
+          </a:p>
+          <a:p>
+            <a:pPr algn="l">
+              <a:lnSpc>
+                <a:spcPct val="105000"/>
+              </a:lnSpc>
+              <a:spcAft>
+                <a:spcPts val="800"/>
+              </a:spcAft>
+            </a:pPr>
+            <a:r>
+              <a:rPr sz="1700" b="0">
+                <a:solidFill>
+                  <a:srgbClr val="333F4A"/>
+                </a:solidFill>
+                <a:latin typeface="Calibri"/>
+              </a:rPr>
+              <a:t>•  It organises incidents per application, centralises monitoring dashboards, and — through Sentinel — auto-investigates and resolves them.</a:t>
             </a:r>
           </a:p>
         </p:txBody>
@@ -8131,8 +7943,8 @@
         </p:nvSpPr>
         <p:spPr>
           <a:xfrm>
-            <a:off x="640080" y="2286000"/>
-            <a:ext cx="3454298" cy="3017520"/>
+            <a:off x="640080" y="3154680"/>
+            <a:ext cx="2522143" cy="1600200"/>
           </a:xfrm>
           <a:prstGeom prst="rect">
             <a:avLst/>
@@ -8175,14 +7987,14 @@
         </p:nvSpPr>
         <p:spPr>
           <a:xfrm>
-            <a:off x="640080" y="2286000"/>
-            <a:ext cx="3454298" cy="777240"/>
+            <a:off x="640080" y="3154680"/>
+            <a:ext cx="2522143" cy="548640"/>
           </a:xfrm>
           <a:prstGeom prst="rect">
             <a:avLst/>
           </a:prstGeom>
           <a:solidFill>
-            <a:srgbClr val="0F2A47"/>
+            <a:srgbClr val="189AB4"/>
           </a:solidFill>
           <a:ln>
             <a:noFill/>
@@ -8219,8 +8031,8 @@
         </p:nvSpPr>
         <p:spPr>
           <a:xfrm>
-            <a:off x="777240" y="2286000"/>
-            <a:ext cx="3179978" cy="777240"/>
+            <a:off x="640080" y="3154680"/>
+            <a:ext cx="2522143" cy="548640"/>
           </a:xfrm>
           <a:prstGeom prst="rect">
             <a:avLst/>
@@ -8248,7 +8060,7 @@
                 </a:solidFill>
                 <a:latin typeface="Calibri"/>
               </a:rPr>
-              <a:t>Smoother handovers (KT)</a:t>
+              <a:t>Sentinel</a:t>
             </a:r>
           </a:p>
         </p:txBody>
@@ -8261,8 +8073,8 @@
         </p:nvSpPr>
         <p:spPr>
           <a:xfrm>
-            <a:off x="868680" y="3246120"/>
-            <a:ext cx="2997098" cy="1920240"/>
+            <a:off x="640080" y="3813048"/>
+            <a:ext cx="2522143" cy="731520"/>
           </a:xfrm>
           <a:prstGeom prst="rect">
             <a:avLst/>
@@ -8271,136 +8083,6 @@
         </p:spPr>
         <p:txBody>
           <a:bodyPr wrap="square" anchor="t">
-            <a:spAutoFit/>
-          </a:bodyPr>
-          <a:lstStyle/>
-          <a:p>
-            <a:pPr algn="l">
-              <a:lnSpc>
-                <a:spcPct val="105000"/>
-              </a:lnSpc>
-              <a:spcAft>
-                <a:spcPts val="600"/>
-              </a:spcAft>
-            </a:pPr>
-            <a:r>
-              <a:rPr sz="1350" b="0">
-                <a:solidFill>
-                  <a:srgbClr val="333F4A"/>
-                </a:solidFill>
-                <a:latin typeface="Calibri"/>
-              </a:rPr>
-              <a:t>Dev → support knowledge transfer gets a structured, lasting home instead of fading meetings — and it's reusable for every future joiner.</a:t>
-            </a:r>
-          </a:p>
-        </p:txBody>
-      </p:sp>
-      <p:sp>
-        <p:nvSpPr>
-          <p:cNvPr id="11" name="Rectangle 10"/>
-          <p:cNvSpPr/>
-          <p:nvPr/>
-        </p:nvSpPr>
-        <p:spPr>
-          <a:xfrm>
-            <a:off x="4368698" y="2286000"/>
-            <a:ext cx="3454298" cy="3017520"/>
-          </a:xfrm>
-          <a:prstGeom prst="rect">
-            <a:avLst/>
-          </a:prstGeom>
-          <a:solidFill>
-            <a:srgbClr val="F2F5F7"/>
-          </a:solidFill>
-          <a:ln>
-            <a:noFill/>
-          </a:ln>
-          <a:effectLst/>
-        </p:spPr>
-        <p:style>
-          <a:lnRef idx="1">
-            <a:schemeClr val="accent1"/>
-          </a:lnRef>
-          <a:fillRef idx="3">
-            <a:schemeClr val="accent1"/>
-          </a:fillRef>
-          <a:effectRef idx="2">
-            <a:schemeClr val="accent1"/>
-          </a:effectRef>
-          <a:fontRef idx="minor">
-            <a:schemeClr val="lt1"/>
-          </a:fontRef>
-        </p:style>
-        <p:txBody>
-          <a:bodyPr rtlCol="0" anchor="ctr"/>
-          <a:lstStyle/>
-          <a:p>
-            <a:pPr algn="ctr"/>
-          </a:p>
-        </p:txBody>
-      </p:sp>
-      <p:sp>
-        <p:nvSpPr>
-          <p:cNvPr id="12" name="Rectangle 11"/>
-          <p:cNvSpPr/>
-          <p:nvPr/>
-        </p:nvSpPr>
-        <p:spPr>
-          <a:xfrm>
-            <a:off x="4368698" y="2286000"/>
-            <a:ext cx="3454298" cy="777240"/>
-          </a:xfrm>
-          <a:prstGeom prst="rect">
-            <a:avLst/>
-          </a:prstGeom>
-          <a:solidFill>
-            <a:srgbClr val="0F2A47"/>
-          </a:solidFill>
-          <a:ln>
-            <a:noFill/>
-          </a:ln>
-          <a:effectLst/>
-        </p:spPr>
-        <p:style>
-          <a:lnRef idx="1">
-            <a:schemeClr val="accent1"/>
-          </a:lnRef>
-          <a:fillRef idx="3">
-            <a:schemeClr val="accent1"/>
-          </a:fillRef>
-          <a:effectRef idx="2">
-            <a:schemeClr val="accent1"/>
-          </a:effectRef>
-          <a:fontRef idx="minor">
-            <a:schemeClr val="lt1"/>
-          </a:fontRef>
-        </p:style>
-        <p:txBody>
-          <a:bodyPr rtlCol="0" anchor="ctr"/>
-          <a:lstStyle/>
-          <a:p>
-            <a:pPr algn="ctr"/>
-          </a:p>
-        </p:txBody>
-      </p:sp>
-      <p:sp>
-        <p:nvSpPr>
-          <p:cNvPr id="13" name="TextBox 12"/>
-          <p:cNvSpPr txBox="1"/>
-          <p:nvPr/>
-        </p:nvSpPr>
-        <p:spPr>
-          <a:xfrm>
-            <a:off x="4505858" y="2286000"/>
-            <a:ext cx="3179978" cy="777240"/>
-          </a:xfrm>
-          <a:prstGeom prst="rect">
-            <a:avLst/>
-          </a:prstGeom>
-          <a:noFill/>
-        </p:spPr>
-        <p:txBody>
-          <a:bodyPr wrap="square" anchor="ctr">
             <a:spAutoFit/>
           </a:bodyPr>
           <a:lstStyle/>
@@ -8414,27 +8096,28 @@
               </a:spcAft>
             </a:pPr>
             <a:r>
-              <a:rPr sz="1500" b="1">
-                <a:solidFill>
-                  <a:srgbClr val="FFFFFF"/>
-                </a:solidFill>
-                <a:latin typeface="Calibri"/>
-              </a:rPr>
-              <a:t>Tribal knowledge, captured</a:t>
-            </a:r>
-          </a:p>
-        </p:txBody>
-      </p:sp>
-      <p:sp>
-        <p:nvSpPr>
-          <p:cNvPr id="14" name="TextBox 13"/>
+              <a:rPr sz="1250" b="0">
+                <a:solidFill>
+                  <a:srgbClr val="333F4A"/>
+                </a:solidFill>
+                <a:latin typeface="Calibri"/>
+              </a:rPr>
+              <a:t>Auto-investigation
+&amp; resolution</a:t>
+            </a:r>
+          </a:p>
+        </p:txBody>
+      </p:sp>
+      <p:sp>
+        <p:nvSpPr>
+          <p:cNvPr id="11" name="TextBox 10"/>
           <p:cNvSpPr txBox="1"/>
           <p:nvPr/>
         </p:nvSpPr>
         <p:spPr>
           <a:xfrm>
-            <a:off x="4597298" y="3246120"/>
-            <a:ext cx="2997098" cy="1920240"/>
+            <a:off x="640080" y="4453128"/>
+            <a:ext cx="2522143" cy="274320"/>
           </a:xfrm>
           <a:prstGeom prst="rect">
             <a:avLst/>
@@ -8443,136 +8126,6 @@
         </p:spPr>
         <p:txBody>
           <a:bodyPr wrap="square" anchor="t">
-            <a:spAutoFit/>
-          </a:bodyPr>
-          <a:lstStyle/>
-          <a:p>
-            <a:pPr algn="l">
-              <a:lnSpc>
-                <a:spcPct val="105000"/>
-              </a:lnSpc>
-              <a:spcAft>
-                <a:spcPts val="600"/>
-              </a:spcAft>
-            </a:pPr>
-            <a:r>
-              <a:rPr sz="1350" b="0">
-                <a:solidFill>
-                  <a:srgbClr val="333F4A"/>
-                </a:solidFill>
-                <a:latin typeface="Calibri"/>
-              </a:rPr>
-              <a:t>The quirks, edge cases and process lore that live in people's heads become explicit and durable — de-risking key-person dependency. Knowledge survives staff turnover.</a:t>
-            </a:r>
-          </a:p>
-        </p:txBody>
-      </p:sp>
-      <p:sp>
-        <p:nvSpPr>
-          <p:cNvPr id="15" name="Rectangle 14"/>
-          <p:cNvSpPr/>
-          <p:nvPr/>
-        </p:nvSpPr>
-        <p:spPr>
-          <a:xfrm>
-            <a:off x="8097316" y="2286000"/>
-            <a:ext cx="3454298" cy="3017520"/>
-          </a:xfrm>
-          <a:prstGeom prst="rect">
-            <a:avLst/>
-          </a:prstGeom>
-          <a:solidFill>
-            <a:srgbClr val="F2F5F7"/>
-          </a:solidFill>
-          <a:ln>
-            <a:noFill/>
-          </a:ln>
-          <a:effectLst/>
-        </p:spPr>
-        <p:style>
-          <a:lnRef idx="1">
-            <a:schemeClr val="accent1"/>
-          </a:lnRef>
-          <a:fillRef idx="3">
-            <a:schemeClr val="accent1"/>
-          </a:fillRef>
-          <a:effectRef idx="2">
-            <a:schemeClr val="accent1"/>
-          </a:effectRef>
-          <a:fontRef idx="minor">
-            <a:schemeClr val="lt1"/>
-          </a:fontRef>
-        </p:style>
-        <p:txBody>
-          <a:bodyPr rtlCol="0" anchor="ctr"/>
-          <a:lstStyle/>
-          <a:p>
-            <a:pPr algn="ctr"/>
-          </a:p>
-        </p:txBody>
-      </p:sp>
-      <p:sp>
-        <p:nvSpPr>
-          <p:cNvPr id="16" name="Rectangle 15"/>
-          <p:cNvSpPr/>
-          <p:nvPr/>
-        </p:nvSpPr>
-        <p:spPr>
-          <a:xfrm>
-            <a:off x="8097316" y="2286000"/>
-            <a:ext cx="3454298" cy="777240"/>
-          </a:xfrm>
-          <a:prstGeom prst="rect">
-            <a:avLst/>
-          </a:prstGeom>
-          <a:solidFill>
-            <a:srgbClr val="0F2A47"/>
-          </a:solidFill>
-          <a:ln>
-            <a:noFill/>
-          </a:ln>
-          <a:effectLst/>
-        </p:spPr>
-        <p:style>
-          <a:lnRef idx="1">
-            <a:schemeClr val="accent1"/>
-          </a:lnRef>
-          <a:fillRef idx="3">
-            <a:schemeClr val="accent1"/>
-          </a:fillRef>
-          <a:effectRef idx="2">
-            <a:schemeClr val="accent1"/>
-          </a:effectRef>
-          <a:fontRef idx="minor">
-            <a:schemeClr val="lt1"/>
-          </a:fontRef>
-        </p:style>
-        <p:txBody>
-          <a:bodyPr rtlCol="0" anchor="ctr"/>
-          <a:lstStyle/>
-          <a:p>
-            <a:pPr algn="ctr"/>
-          </a:p>
-        </p:txBody>
-      </p:sp>
-      <p:sp>
-        <p:nvSpPr>
-          <p:cNvPr id="17" name="TextBox 16"/>
-          <p:cNvSpPr txBox="1"/>
-          <p:nvPr/>
-        </p:nvSpPr>
-        <p:spPr>
-          <a:xfrm>
-            <a:off x="8234476" y="2286000"/>
-            <a:ext cx="3179978" cy="777240"/>
-          </a:xfrm>
-          <a:prstGeom prst="rect">
-            <a:avLst/>
-          </a:prstGeom>
-          <a:noFill/>
-        </p:spPr>
-        <p:txBody>
-          <a:bodyPr wrap="square" anchor="ctr">
             <a:spAutoFit/>
           </a:bodyPr>
           <a:lstStyle/>
@@ -8586,27 +8139,115 @@
               </a:spcAft>
             </a:pPr>
             <a:r>
-              <a:rPr sz="1500" b="1">
-                <a:solidFill>
-                  <a:srgbClr val="FFFFFF"/>
-                </a:solidFill>
-                <a:latin typeface="Calibri"/>
-              </a:rPr>
-              <a:t>Documentation that pays off</a:t>
-            </a:r>
-          </a:p>
-        </p:txBody>
-      </p:sp>
-      <p:sp>
-        <p:nvSpPr>
-          <p:cNvPr id="18" name="TextBox 17"/>
+              <a:rPr sz="1100" b="1">
+                <a:solidFill>
+                  <a:srgbClr val="189AB4"/>
+                </a:solidFill>
+                <a:latin typeface="Calibri"/>
+              </a:rPr>
+              <a:t>◆ ships first</a:t>
+            </a:r>
+          </a:p>
+        </p:txBody>
+      </p:sp>
+      <p:sp>
+        <p:nvSpPr>
+          <p:cNvPr id="12" name="Rectangle 11"/>
+          <p:cNvSpPr/>
+          <p:nvPr/>
+        </p:nvSpPr>
+        <p:spPr>
+          <a:xfrm>
+            <a:off x="3436543" y="3154680"/>
+            <a:ext cx="2522143" cy="1600200"/>
+          </a:xfrm>
+          <a:prstGeom prst="rect">
+            <a:avLst/>
+          </a:prstGeom>
+          <a:solidFill>
+            <a:srgbClr val="F2F5F7"/>
+          </a:solidFill>
+          <a:ln>
+            <a:noFill/>
+          </a:ln>
+          <a:effectLst/>
+        </p:spPr>
+        <p:style>
+          <a:lnRef idx="1">
+            <a:schemeClr val="accent1"/>
+          </a:lnRef>
+          <a:fillRef idx="3">
+            <a:schemeClr val="accent1"/>
+          </a:fillRef>
+          <a:effectRef idx="2">
+            <a:schemeClr val="accent1"/>
+          </a:effectRef>
+          <a:fontRef idx="minor">
+            <a:schemeClr val="lt1"/>
+          </a:fontRef>
+        </p:style>
+        <p:txBody>
+          <a:bodyPr rtlCol="0" anchor="ctr"/>
+          <a:lstStyle/>
+          <a:p>
+            <a:pPr algn="ctr"/>
+          </a:p>
+        </p:txBody>
+      </p:sp>
+      <p:sp>
+        <p:nvSpPr>
+          <p:cNvPr id="13" name="Rectangle 12"/>
+          <p:cNvSpPr/>
+          <p:nvPr/>
+        </p:nvSpPr>
+        <p:spPr>
+          <a:xfrm>
+            <a:off x="3436543" y="3154680"/>
+            <a:ext cx="2522143" cy="548640"/>
+          </a:xfrm>
+          <a:prstGeom prst="rect">
+            <a:avLst/>
+          </a:prstGeom>
+          <a:solidFill>
+            <a:srgbClr val="0F2A47"/>
+          </a:solidFill>
+          <a:ln>
+            <a:noFill/>
+          </a:ln>
+          <a:effectLst/>
+        </p:spPr>
+        <p:style>
+          <a:lnRef idx="1">
+            <a:schemeClr val="accent1"/>
+          </a:lnRef>
+          <a:fillRef idx="3">
+            <a:schemeClr val="accent1"/>
+          </a:fillRef>
+          <a:effectRef idx="2">
+            <a:schemeClr val="accent1"/>
+          </a:effectRef>
+          <a:fontRef idx="minor">
+            <a:schemeClr val="lt1"/>
+          </a:fontRef>
+        </p:style>
+        <p:txBody>
+          <a:bodyPr rtlCol="0" anchor="ctr"/>
+          <a:lstStyle/>
+          <a:p>
+            <a:pPr algn="ctr"/>
+          </a:p>
+        </p:txBody>
+      </p:sp>
+      <p:sp>
+        <p:nvSpPr>
+          <p:cNvPr id="14" name="TextBox 13"/>
           <p:cNvSpPr txBox="1"/>
           <p:nvPr/>
         </p:nvSpPr>
         <p:spPr>
           <a:xfrm>
-            <a:off x="8325916" y="3246120"/>
-            <a:ext cx="2997098" cy="1920240"/>
+            <a:off x="3436543" y="3154680"/>
+            <a:ext cx="2522143" cy="548640"/>
           </a:xfrm>
           <a:prstGeom prst="rect">
             <a:avLst/>
@@ -8614,49 +8255,7 @@
           <a:noFill/>
         </p:spPr>
         <p:txBody>
-          <a:bodyPr wrap="square" anchor="t">
-            <a:spAutoFit/>
-          </a:bodyPr>
-          <a:lstStyle/>
-          <a:p>
-            <a:pPr algn="l">
-              <a:lnSpc>
-                <a:spcPct val="105000"/>
-              </a:lnSpc>
-              <a:spcAft>
-                <a:spcPts val="600"/>
-              </a:spcAft>
-            </a:pPr>
-            <a:r>
-              <a:rPr sz="1350" b="0">
-                <a:solidFill>
-                  <a:srgbClr val="333F4A"/>
-                </a:solidFill>
-                <a:latin typeface="Calibri"/>
-              </a:rPr>
-              <a:t>Sentinel uses your docs to diagnose incidents, so good documentation finally shows measurable payoff — faster, better resolution, visible per app.</a:t>
-            </a:r>
-          </a:p>
-        </p:txBody>
-      </p:sp>
-      <p:sp>
-        <p:nvSpPr>
-          <p:cNvPr id="19" name="TextBox 18"/>
-          <p:cNvSpPr txBox="1"/>
-          <p:nvPr/>
-        </p:nvSpPr>
-        <p:spPr>
-          <a:xfrm>
-            <a:off x="640080" y="5623560"/>
-            <a:ext cx="10972800" cy="822960"/>
-          </a:xfrm>
-          <a:prstGeom prst="rect">
-            <a:avLst/>
-          </a:prstGeom>
-          <a:noFill/>
-        </p:spPr>
-        <p:txBody>
-          <a:bodyPr wrap="square" anchor="t">
+          <a:bodyPr wrap="square" anchor="ctr">
             <a:spAutoFit/>
           </a:bodyPr>
           <a:lstStyle/>
@@ -8672,11 +8271,528 @@
             <a:r>
               <a:rPr sz="1500" b="1">
                 <a:solidFill>
+                  <a:srgbClr val="FFFFFF"/>
+                </a:solidFill>
+                <a:latin typeface="Calibri"/>
+              </a:rPr>
+              <a:t>Incident cockpit</a:t>
+            </a:r>
+          </a:p>
+        </p:txBody>
+      </p:sp>
+      <p:sp>
+        <p:nvSpPr>
+          <p:cNvPr id="15" name="TextBox 14"/>
+          <p:cNvSpPr txBox="1"/>
+          <p:nvPr/>
+        </p:nvSpPr>
+        <p:spPr>
+          <a:xfrm>
+            <a:off x="3436543" y="3813048"/>
+            <a:ext cx="2522143" cy="731520"/>
+          </a:xfrm>
+          <a:prstGeom prst="rect">
+            <a:avLst/>
+          </a:prstGeom>
+          <a:noFill/>
+        </p:spPr>
+        <p:txBody>
+          <a:bodyPr wrap="square" anchor="t">
+            <a:spAutoFit/>
+          </a:bodyPr>
+          <a:lstStyle/>
+          <a:p>
+            <a:pPr algn="ctr">
+              <a:lnSpc>
+                <a:spcPct val="105000"/>
+              </a:lnSpc>
+              <a:spcAft>
+                <a:spcPts val="600"/>
+              </a:spcAft>
+            </a:pPr>
+            <a:r>
+              <a:rPr sz="1250" b="0">
+                <a:solidFill>
+                  <a:srgbClr val="333F4A"/>
+                </a:solidFill>
+                <a:latin typeface="Calibri"/>
+              </a:rPr>
+              <a:t>Per-application,
+historical view</a:t>
+            </a:r>
+          </a:p>
+        </p:txBody>
+      </p:sp>
+      <p:sp>
+        <p:nvSpPr>
+          <p:cNvPr id="16" name="Rectangle 15"/>
+          <p:cNvSpPr/>
+          <p:nvPr/>
+        </p:nvSpPr>
+        <p:spPr>
+          <a:xfrm>
+            <a:off x="6233006" y="3154680"/>
+            <a:ext cx="2522143" cy="1600200"/>
+          </a:xfrm>
+          <a:prstGeom prst="rect">
+            <a:avLst/>
+          </a:prstGeom>
+          <a:solidFill>
+            <a:srgbClr val="F2F5F7"/>
+          </a:solidFill>
+          <a:ln>
+            <a:noFill/>
+          </a:ln>
+          <a:effectLst/>
+        </p:spPr>
+        <p:style>
+          <a:lnRef idx="1">
+            <a:schemeClr val="accent1"/>
+          </a:lnRef>
+          <a:fillRef idx="3">
+            <a:schemeClr val="accent1"/>
+          </a:fillRef>
+          <a:effectRef idx="2">
+            <a:schemeClr val="accent1"/>
+          </a:effectRef>
+          <a:fontRef idx="minor">
+            <a:schemeClr val="lt1"/>
+          </a:fontRef>
+        </p:style>
+        <p:txBody>
+          <a:bodyPr rtlCol="0" anchor="ctr"/>
+          <a:lstStyle/>
+          <a:p>
+            <a:pPr algn="ctr"/>
+          </a:p>
+        </p:txBody>
+      </p:sp>
+      <p:sp>
+        <p:nvSpPr>
+          <p:cNvPr id="17" name="Rectangle 16"/>
+          <p:cNvSpPr/>
+          <p:nvPr/>
+        </p:nvSpPr>
+        <p:spPr>
+          <a:xfrm>
+            <a:off x="6233006" y="3154680"/>
+            <a:ext cx="2522143" cy="548640"/>
+          </a:xfrm>
+          <a:prstGeom prst="rect">
+            <a:avLst/>
+          </a:prstGeom>
+          <a:solidFill>
+            <a:srgbClr val="0F2A47"/>
+          </a:solidFill>
+          <a:ln>
+            <a:noFill/>
+          </a:ln>
+          <a:effectLst/>
+        </p:spPr>
+        <p:style>
+          <a:lnRef idx="1">
+            <a:schemeClr val="accent1"/>
+          </a:lnRef>
+          <a:fillRef idx="3">
+            <a:schemeClr val="accent1"/>
+          </a:fillRef>
+          <a:effectRef idx="2">
+            <a:schemeClr val="accent1"/>
+          </a:effectRef>
+          <a:fontRef idx="minor">
+            <a:schemeClr val="lt1"/>
+          </a:fontRef>
+        </p:style>
+        <p:txBody>
+          <a:bodyPr rtlCol="0" anchor="ctr"/>
+          <a:lstStyle/>
+          <a:p>
+            <a:pPr algn="ctr"/>
+          </a:p>
+        </p:txBody>
+      </p:sp>
+      <p:sp>
+        <p:nvSpPr>
+          <p:cNvPr id="18" name="TextBox 17"/>
+          <p:cNvSpPr txBox="1"/>
+          <p:nvPr/>
+        </p:nvSpPr>
+        <p:spPr>
+          <a:xfrm>
+            <a:off x="6233006" y="3154680"/>
+            <a:ext cx="2522143" cy="548640"/>
+          </a:xfrm>
+          <a:prstGeom prst="rect">
+            <a:avLst/>
+          </a:prstGeom>
+          <a:noFill/>
+        </p:spPr>
+        <p:txBody>
+          <a:bodyPr wrap="square" anchor="ctr">
+            <a:spAutoFit/>
+          </a:bodyPr>
+          <a:lstStyle/>
+          <a:p>
+            <a:pPr algn="ctr">
+              <a:lnSpc>
+                <a:spcPct val="105000"/>
+              </a:lnSpc>
+              <a:spcAft>
+                <a:spcPts val="600"/>
+              </a:spcAft>
+            </a:pPr>
+            <a:r>
+              <a:rPr sz="1500" b="1">
+                <a:solidFill>
+                  <a:srgbClr val="FFFFFF"/>
+                </a:solidFill>
+                <a:latin typeface="Calibri"/>
+              </a:rPr>
+              <a:t>Dashboard hub</a:t>
+            </a:r>
+          </a:p>
+        </p:txBody>
+      </p:sp>
+      <p:sp>
+        <p:nvSpPr>
+          <p:cNvPr id="19" name="TextBox 18"/>
+          <p:cNvSpPr txBox="1"/>
+          <p:nvPr/>
+        </p:nvSpPr>
+        <p:spPr>
+          <a:xfrm>
+            <a:off x="6233006" y="3813048"/>
+            <a:ext cx="2522143" cy="731520"/>
+          </a:xfrm>
+          <a:prstGeom prst="rect">
+            <a:avLst/>
+          </a:prstGeom>
+          <a:noFill/>
+        </p:spPr>
+        <p:txBody>
+          <a:bodyPr wrap="square" anchor="t">
+            <a:spAutoFit/>
+          </a:bodyPr>
+          <a:lstStyle/>
+          <a:p>
+            <a:pPr algn="ctr">
+              <a:lnSpc>
+                <a:spcPct val="105000"/>
+              </a:lnSpc>
+              <a:spcAft>
+                <a:spcPts val="600"/>
+              </a:spcAft>
+            </a:pPr>
+            <a:r>
+              <a:rPr sz="1250" b="0">
+                <a:solidFill>
+                  <a:srgbClr val="333F4A"/>
+                </a:solidFill>
+                <a:latin typeface="Calibri"/>
+              </a:rPr>
+              <a:t>QuickSight, Tableau
+in one place</a:t>
+            </a:r>
+          </a:p>
+        </p:txBody>
+      </p:sp>
+      <p:sp>
+        <p:nvSpPr>
+          <p:cNvPr id="20" name="Rectangle 19"/>
+          <p:cNvSpPr/>
+          <p:nvPr/>
+        </p:nvSpPr>
+        <p:spPr>
+          <a:xfrm>
+            <a:off x="9029469" y="3154680"/>
+            <a:ext cx="2522143" cy="1600200"/>
+          </a:xfrm>
+          <a:prstGeom prst="rect">
+            <a:avLst/>
+          </a:prstGeom>
+          <a:solidFill>
+            <a:srgbClr val="F2F5F7"/>
+          </a:solidFill>
+          <a:ln>
+            <a:noFill/>
+          </a:ln>
+          <a:effectLst/>
+        </p:spPr>
+        <p:style>
+          <a:lnRef idx="1">
+            <a:schemeClr val="accent1"/>
+          </a:lnRef>
+          <a:fillRef idx="3">
+            <a:schemeClr val="accent1"/>
+          </a:fillRef>
+          <a:effectRef idx="2">
+            <a:schemeClr val="accent1"/>
+          </a:effectRef>
+          <a:fontRef idx="minor">
+            <a:schemeClr val="lt1"/>
+          </a:fontRef>
+        </p:style>
+        <p:txBody>
+          <a:bodyPr rtlCol="0" anchor="ctr"/>
+          <a:lstStyle/>
+          <a:p>
+            <a:pPr algn="ctr"/>
+          </a:p>
+        </p:txBody>
+      </p:sp>
+      <p:sp>
+        <p:nvSpPr>
+          <p:cNvPr id="21" name="Rectangle 20"/>
+          <p:cNvSpPr/>
+          <p:nvPr/>
+        </p:nvSpPr>
+        <p:spPr>
+          <a:xfrm>
+            <a:off x="9029469" y="3154680"/>
+            <a:ext cx="2522143" cy="548640"/>
+          </a:xfrm>
+          <a:prstGeom prst="rect">
+            <a:avLst/>
+          </a:prstGeom>
+          <a:solidFill>
+            <a:srgbClr val="0F2A47"/>
+          </a:solidFill>
+          <a:ln>
+            <a:noFill/>
+          </a:ln>
+          <a:effectLst/>
+        </p:spPr>
+        <p:style>
+          <a:lnRef idx="1">
+            <a:schemeClr val="accent1"/>
+          </a:lnRef>
+          <a:fillRef idx="3">
+            <a:schemeClr val="accent1"/>
+          </a:fillRef>
+          <a:effectRef idx="2">
+            <a:schemeClr val="accent1"/>
+          </a:effectRef>
+          <a:fontRef idx="minor">
+            <a:schemeClr val="lt1"/>
+          </a:fontRef>
+        </p:style>
+        <p:txBody>
+          <a:bodyPr rtlCol="0" anchor="ctr"/>
+          <a:lstStyle/>
+          <a:p>
+            <a:pPr algn="ctr"/>
+          </a:p>
+        </p:txBody>
+      </p:sp>
+      <p:sp>
+        <p:nvSpPr>
+          <p:cNvPr id="22" name="TextBox 21"/>
+          <p:cNvSpPr txBox="1"/>
+          <p:nvPr/>
+        </p:nvSpPr>
+        <p:spPr>
+          <a:xfrm>
+            <a:off x="9029469" y="3154680"/>
+            <a:ext cx="2522143" cy="548640"/>
+          </a:xfrm>
+          <a:prstGeom prst="rect">
+            <a:avLst/>
+          </a:prstGeom>
+          <a:noFill/>
+        </p:spPr>
+        <p:txBody>
+          <a:bodyPr wrap="square" anchor="ctr">
+            <a:spAutoFit/>
+          </a:bodyPr>
+          <a:lstStyle/>
+          <a:p>
+            <a:pPr algn="ctr">
+              <a:lnSpc>
+                <a:spcPct val="105000"/>
+              </a:lnSpc>
+              <a:spcAft>
+                <a:spcPts val="600"/>
+              </a:spcAft>
+            </a:pPr>
+            <a:r>
+              <a:rPr sz="1500" b="1">
+                <a:solidFill>
+                  <a:srgbClr val="FFFFFF"/>
+                </a:solidFill>
+                <a:latin typeface="Calibri"/>
+              </a:rPr>
+              <a:t>Ask Mission Control</a:t>
+            </a:r>
+          </a:p>
+        </p:txBody>
+      </p:sp>
+      <p:sp>
+        <p:nvSpPr>
+          <p:cNvPr id="23" name="TextBox 22"/>
+          <p:cNvSpPr txBox="1"/>
+          <p:nvPr/>
+        </p:nvSpPr>
+        <p:spPr>
+          <a:xfrm>
+            <a:off x="9029469" y="3813048"/>
+            <a:ext cx="2522143" cy="731520"/>
+          </a:xfrm>
+          <a:prstGeom prst="rect">
+            <a:avLst/>
+          </a:prstGeom>
+          <a:noFill/>
+        </p:spPr>
+        <p:txBody>
+          <a:bodyPr wrap="square" anchor="t">
+            <a:spAutoFit/>
+          </a:bodyPr>
+          <a:lstStyle/>
+          <a:p>
+            <a:pPr algn="ctr">
+              <a:lnSpc>
+                <a:spcPct val="105000"/>
+              </a:lnSpc>
+              <a:spcAft>
+                <a:spcPts val="600"/>
+              </a:spcAft>
+            </a:pPr>
+            <a:r>
+              <a:rPr sz="1250" b="0">
+                <a:solidFill>
+                  <a:srgbClr val="333F4A"/>
+                </a:solidFill>
+                <a:latin typeface="Calibri"/>
+              </a:rPr>
+              <a:t>Docs + deployed code
+Q&amp;A · future</a:t>
+            </a:r>
+          </a:p>
+        </p:txBody>
+      </p:sp>
+      <p:sp>
+        <p:nvSpPr>
+          <p:cNvPr id="24" name="Rectangle 23"/>
+          <p:cNvSpPr/>
+          <p:nvPr/>
+        </p:nvSpPr>
+        <p:spPr>
+          <a:xfrm>
+            <a:off x="640080" y="4983480"/>
+            <a:ext cx="10911535" cy="566928"/>
+          </a:xfrm>
+          <a:prstGeom prst="rect">
+            <a:avLst/>
+          </a:prstGeom>
+          <a:solidFill>
+            <a:srgbClr val="E4F3F6"/>
+          </a:solidFill>
+          <a:ln>
+            <a:noFill/>
+          </a:ln>
+          <a:effectLst/>
+        </p:spPr>
+        <p:style>
+          <a:lnRef idx="1">
+            <a:schemeClr val="accent1"/>
+          </a:lnRef>
+          <a:fillRef idx="3">
+            <a:schemeClr val="accent1"/>
+          </a:fillRef>
+          <a:effectRef idx="2">
+            <a:schemeClr val="accent1"/>
+          </a:effectRef>
+          <a:fontRef idx="minor">
+            <a:schemeClr val="lt1"/>
+          </a:fontRef>
+        </p:style>
+        <p:txBody>
+          <a:bodyPr rtlCol="0" anchor="ctr"/>
+          <a:lstStyle/>
+          <a:p>
+            <a:pPr algn="ctr"/>
+          </a:p>
+        </p:txBody>
+      </p:sp>
+      <p:sp>
+        <p:nvSpPr>
+          <p:cNvPr id="25" name="TextBox 24"/>
+          <p:cNvSpPr txBox="1"/>
+          <p:nvPr/>
+        </p:nvSpPr>
+        <p:spPr>
+          <a:xfrm>
+            <a:off x="640080" y="4983480"/>
+            <a:ext cx="10911535" cy="566928"/>
+          </a:xfrm>
+          <a:prstGeom prst="rect">
+            <a:avLst/>
+          </a:prstGeom>
+          <a:noFill/>
+        </p:spPr>
+        <p:txBody>
+          <a:bodyPr wrap="square" anchor="ctr">
+            <a:spAutoFit/>
+          </a:bodyPr>
+          <a:lstStyle/>
+          <a:p>
+            <a:pPr algn="ctr">
+              <a:lnSpc>
+                <a:spcPct val="105000"/>
+              </a:lnSpc>
+              <a:spcAft>
+                <a:spcPts val="600"/>
+              </a:spcAft>
+            </a:pPr>
+            <a:r>
+              <a:rPr sz="1300" b="1">
+                <a:solidFill>
                   <a:srgbClr val="0F2A47"/>
                 </a:solidFill>
                 <a:latin typeface="Calibri"/>
               </a:rPr>
-              <a:t>A virtuous cycle: the more you capture, the better Sentinel and your support team perform — and the more visible the payoff of capturing it.</a:t>
+              <a:t>Application catalog — shared foundation (apps · repos · log sources · required docs · playbooks)</a:t>
+            </a:r>
+          </a:p>
+        </p:txBody>
+      </p:sp>
+      <p:sp>
+        <p:nvSpPr>
+          <p:cNvPr id="26" name="TextBox 25"/>
+          <p:cNvSpPr txBox="1"/>
+          <p:nvPr/>
+        </p:nvSpPr>
+        <p:spPr>
+          <a:xfrm>
+            <a:off x="640080" y="5779008"/>
+            <a:ext cx="10972800" cy="685800"/>
+          </a:xfrm>
+          <a:prstGeom prst="rect">
+            <a:avLst/>
+          </a:prstGeom>
+          <a:noFill/>
+        </p:spPr>
+        <p:txBody>
+          <a:bodyPr wrap="square" anchor="t">
+            <a:spAutoFit/>
+          </a:bodyPr>
+          <a:lstStyle/>
+          <a:p>
+            <a:pPr algn="ctr">
+              <a:lnSpc>
+                <a:spcPct val="105000"/>
+              </a:lnSpc>
+              <a:spcAft>
+                <a:spcPts val="600"/>
+              </a:spcAft>
+            </a:pPr>
+            <a:r>
+              <a:rPr sz="1320" b="1">
+                <a:solidFill>
+                  <a:srgbClr val="6B7780"/>
+                </a:solidFill>
+                <a:latin typeface="Calibri"/>
+              </a:rPr>
+              <a:t>ServiceNow owns incidents. Confluence owns documentation. Mission Control indexes, enriches and acts — it does not replace either.</a:t>
             </a:r>
           </a:p>
         </p:txBody>
@@ -8824,7 +8940,7 @@
                 </a:solidFill>
                 <a:latin typeface="Calibri"/>
               </a:rPr>
-              <a:t>THE VALUE</a:t>
+              <a:t>OPERATIONAL KNOWLEDGE</a:t>
             </a:r>
           </a:p>
         </p:txBody>
@@ -8866,109 +8982,21 @@
                 </a:solidFill>
                 <a:latin typeface="Calibri"/>
               </a:rPr>
-              <a:t>Why this matters</a:t>
-            </a:r>
-          </a:p>
-        </p:txBody>
-      </p:sp>
-      <p:sp>
-        <p:nvSpPr>
-          <p:cNvPr id="6" name="Rectangle 5"/>
-          <p:cNvSpPr/>
-          <p:nvPr/>
-        </p:nvSpPr>
-        <p:spPr>
-          <a:xfrm>
-            <a:off x="640080" y="1645920"/>
-            <a:ext cx="3611880" cy="1737360"/>
-          </a:xfrm>
-          <a:prstGeom prst="rect">
-            <a:avLst/>
-          </a:prstGeom>
-          <a:solidFill>
-            <a:srgbClr val="F2F5F7"/>
-          </a:solidFill>
-          <a:ln>
-            <a:noFill/>
-          </a:ln>
-          <a:effectLst/>
-        </p:spPr>
-        <p:style>
-          <a:lnRef idx="1">
-            <a:schemeClr val="accent1"/>
-          </a:lnRef>
-          <a:fillRef idx="3">
-            <a:schemeClr val="accent1"/>
-          </a:fillRef>
-          <a:effectRef idx="2">
-            <a:schemeClr val="accent1"/>
-          </a:effectRef>
-          <a:fontRef idx="minor">
-            <a:schemeClr val="lt1"/>
-          </a:fontRef>
-        </p:style>
-        <p:txBody>
-          <a:bodyPr rtlCol="0" anchor="ctr"/>
-          <a:lstStyle/>
-          <a:p>
-            <a:pPr algn="ctr"/>
-          </a:p>
-        </p:txBody>
-      </p:sp>
-      <p:sp>
-        <p:nvSpPr>
-          <p:cNvPr id="7" name="Rectangle 6"/>
-          <p:cNvSpPr/>
-          <p:nvPr/>
-        </p:nvSpPr>
-        <p:spPr>
-          <a:xfrm>
-            <a:off x="640080" y="1645920"/>
-            <a:ext cx="3611880" cy="63500"/>
-          </a:xfrm>
-          <a:prstGeom prst="rect">
-            <a:avLst/>
-          </a:prstGeom>
-          <a:solidFill>
-            <a:srgbClr val="189AB4"/>
-          </a:solidFill>
-          <a:ln>
-            <a:noFill/>
-          </a:ln>
-          <a:effectLst/>
-        </p:spPr>
-        <p:style>
-          <a:lnRef idx="1">
-            <a:schemeClr val="accent1"/>
-          </a:lnRef>
-          <a:fillRef idx="3">
-            <a:schemeClr val="accent1"/>
-          </a:fillRef>
-          <a:effectRef idx="2">
-            <a:schemeClr val="accent1"/>
-          </a:effectRef>
-          <a:fontRef idx="minor">
-            <a:schemeClr val="lt1"/>
-          </a:fontRef>
-        </p:style>
-        <p:txBody>
-          <a:bodyPr rtlCol="0" anchor="ctr"/>
-          <a:lstStyle/>
-          <a:p>
-            <a:pPr algn="ctr"/>
-          </a:p>
-        </p:txBody>
-      </p:sp>
-      <p:sp>
-        <p:nvSpPr>
-          <p:cNvPr id="8" name="TextBox 7"/>
+              <a:t>Better handovers — without creating another source of truth</a:t>
+            </a:r>
+          </a:p>
+        </p:txBody>
+      </p:sp>
+      <p:sp>
+        <p:nvSpPr>
+          <p:cNvPr id="6" name="TextBox 5"/>
           <p:cNvSpPr txBox="1"/>
           <p:nvPr/>
         </p:nvSpPr>
         <p:spPr>
           <a:xfrm>
-            <a:off x="822960" y="1828800"/>
-            <a:ext cx="3337560" cy="548640"/>
+            <a:off x="640080" y="1444752"/>
+            <a:ext cx="10972800" cy="731520"/>
           </a:xfrm>
           <a:prstGeom prst="rect">
             <a:avLst/>
@@ -8990,14 +9018,102 @@
               </a:spcAft>
             </a:pPr>
             <a:r>
-              <a:rPr sz="1500" b="1">
-                <a:solidFill>
-                  <a:srgbClr val="0F2A47"/>
-                </a:solidFill>
-                <a:latin typeface="Calibri"/>
-              </a:rPr>
-              <a:t>Faster resolution</a:t>
-            </a:r>
+              <a:rPr sz="1600" b="0">
+                <a:solidFill>
+                  <a:srgbClr val="333F4A"/>
+                </a:solidFill>
+                <a:latin typeface="Calibri"/>
+              </a:rPr>
+              <a:t>Onboarding defines what every support team needs; Mission Control validates and indexes it for day-to-day use:</a:t>
+            </a:r>
+          </a:p>
+        </p:txBody>
+      </p:sp>
+      <p:sp>
+        <p:nvSpPr>
+          <p:cNvPr id="7" name="Rectangle 6"/>
+          <p:cNvSpPr/>
+          <p:nvPr/>
+        </p:nvSpPr>
+        <p:spPr>
+          <a:xfrm>
+            <a:off x="640080" y="2286000"/>
+            <a:ext cx="3454298" cy="3063240"/>
+          </a:xfrm>
+          <a:prstGeom prst="rect">
+            <a:avLst/>
+          </a:prstGeom>
+          <a:solidFill>
+            <a:srgbClr val="F2F5F7"/>
+          </a:solidFill>
+          <a:ln>
+            <a:noFill/>
+          </a:ln>
+          <a:effectLst/>
+        </p:spPr>
+        <p:style>
+          <a:lnRef idx="1">
+            <a:schemeClr val="accent1"/>
+          </a:lnRef>
+          <a:fillRef idx="3">
+            <a:schemeClr val="accent1"/>
+          </a:fillRef>
+          <a:effectRef idx="2">
+            <a:schemeClr val="accent1"/>
+          </a:effectRef>
+          <a:fontRef idx="minor">
+            <a:schemeClr val="lt1"/>
+          </a:fontRef>
+        </p:style>
+        <p:txBody>
+          <a:bodyPr rtlCol="0" anchor="ctr"/>
+          <a:lstStyle/>
+          <a:p>
+            <a:pPr algn="ctr"/>
+          </a:p>
+        </p:txBody>
+      </p:sp>
+      <p:sp>
+        <p:nvSpPr>
+          <p:cNvPr id="8" name="Rectangle 7"/>
+          <p:cNvSpPr/>
+          <p:nvPr/>
+        </p:nvSpPr>
+        <p:spPr>
+          <a:xfrm>
+            <a:off x="640080" y="2286000"/>
+            <a:ext cx="3454298" cy="777240"/>
+          </a:xfrm>
+          <a:prstGeom prst="rect">
+            <a:avLst/>
+          </a:prstGeom>
+          <a:solidFill>
+            <a:srgbClr val="0F2A47"/>
+          </a:solidFill>
+          <a:ln>
+            <a:noFill/>
+          </a:ln>
+          <a:effectLst/>
+        </p:spPr>
+        <p:style>
+          <a:lnRef idx="1">
+            <a:schemeClr val="accent1"/>
+          </a:lnRef>
+          <a:fillRef idx="3">
+            <a:schemeClr val="accent1"/>
+          </a:fillRef>
+          <a:effectRef idx="2">
+            <a:schemeClr val="accent1"/>
+          </a:effectRef>
+          <a:fontRef idx="minor">
+            <a:schemeClr val="lt1"/>
+          </a:fontRef>
+        </p:style>
+        <p:txBody>
+          <a:bodyPr rtlCol="0" anchor="ctr"/>
+          <a:lstStyle/>
+          <a:p>
+            <a:pPr algn="ctr"/>
           </a:p>
         </p:txBody>
       </p:sp>
@@ -9009,8 +9125,50 @@
         </p:nvSpPr>
         <p:spPr>
           <a:xfrm>
-            <a:off x="822960" y="2377440"/>
-            <a:ext cx="3337560" cy="914400"/>
+            <a:off x="777240" y="2286000"/>
+            <a:ext cx="3179978" cy="777240"/>
+          </a:xfrm>
+          <a:prstGeom prst="rect">
+            <a:avLst/>
+          </a:prstGeom>
+          <a:noFill/>
+        </p:spPr>
+        <p:txBody>
+          <a:bodyPr wrap="square" anchor="ctr">
+            <a:spAutoFit/>
+          </a:bodyPr>
+          <a:lstStyle/>
+          <a:p>
+            <a:pPr algn="ctr">
+              <a:lnSpc>
+                <a:spcPct val="105000"/>
+              </a:lnSpc>
+              <a:spcAft>
+                <a:spcPts val="600"/>
+              </a:spcAft>
+            </a:pPr>
+            <a:r>
+              <a:rPr sz="1450" b="1">
+                <a:solidFill>
+                  <a:srgbClr val="FFFFFF"/>
+                </a:solidFill>
+                <a:latin typeface="Calibri"/>
+              </a:rPr>
+              <a:t>Confluence stays authoritative</a:t>
+            </a:r>
+          </a:p>
+        </p:txBody>
+      </p:sp>
+      <p:sp>
+        <p:nvSpPr>
+          <p:cNvPr id="10" name="TextBox 9"/>
+          <p:cNvSpPr txBox="1"/>
+          <p:nvPr/>
+        </p:nvSpPr>
+        <p:spPr>
+          <a:xfrm>
+            <a:off x="850392" y="3218688"/>
+            <a:ext cx="3033674" cy="1965960"/>
           </a:xfrm>
           <a:prstGeom prst="rect">
             <a:avLst/>
@@ -9032,27 +9190,27 @@
               </a:spcAft>
             </a:pPr>
             <a:r>
-              <a:rPr sz="1250" b="0">
+              <a:rPr sz="1280" b="0">
                 <a:solidFill>
                   <a:srgbClr val="333F4A"/>
                 </a:solidFill>
                 <a:latin typeface="Calibri"/>
               </a:rPr>
-              <a:t>Compresses the slowest phase — time-to-diagnosis.</a:t>
-            </a:r>
-          </a:p>
-        </p:txBody>
-      </p:sp>
-      <p:sp>
-        <p:nvSpPr>
-          <p:cNvPr id="10" name="Rectangle 9"/>
+              <a:t>Architecture, runbooks, ownership, dependencies, deployment/rollback and known failure modes are authored and governed in Confluence. Mission Control stores requirements, links, permissions and index freshness — not duplicate pages.</a:t>
+            </a:r>
+          </a:p>
+        </p:txBody>
+      </p:sp>
+      <p:sp>
+        <p:nvSpPr>
+          <p:cNvPr id="11" name="Rectangle 10"/>
           <p:cNvSpPr/>
           <p:nvPr/>
         </p:nvSpPr>
         <p:spPr>
           <a:xfrm>
-            <a:off x="4480560" y="1645920"/>
-            <a:ext cx="3611880" cy="1737360"/>
+            <a:off x="4368698" y="2286000"/>
+            <a:ext cx="3454298" cy="3063240"/>
           </a:xfrm>
           <a:prstGeom prst="rect">
             <a:avLst/>
@@ -9089,20 +9247,20 @@
       </p:sp>
       <p:sp>
         <p:nvSpPr>
-          <p:cNvPr id="11" name="Rectangle 10"/>
+          <p:cNvPr id="12" name="Rectangle 11"/>
           <p:cNvSpPr/>
           <p:nvPr/>
         </p:nvSpPr>
         <p:spPr>
           <a:xfrm>
-            <a:off x="4480560" y="1645920"/>
-            <a:ext cx="3611880" cy="63500"/>
+            <a:off x="4368698" y="2286000"/>
+            <a:ext cx="3454298" cy="777240"/>
           </a:xfrm>
           <a:prstGeom prst="rect">
             <a:avLst/>
           </a:prstGeom>
           <a:solidFill>
-            <a:srgbClr val="189AB4"/>
+            <a:srgbClr val="0F2A47"/>
           </a:solidFill>
           <a:ln>
             <a:noFill/>
@@ -9133,14 +9291,56 @@
       </p:sp>
       <p:sp>
         <p:nvSpPr>
-          <p:cNvPr id="12" name="TextBox 11"/>
+          <p:cNvPr id="13" name="TextBox 12"/>
           <p:cNvSpPr txBox="1"/>
           <p:nvPr/>
         </p:nvSpPr>
         <p:spPr>
           <a:xfrm>
-            <a:off x="4663440" y="1828800"/>
-            <a:ext cx="3337560" cy="548640"/>
+            <a:off x="4505858" y="2286000"/>
+            <a:ext cx="3179978" cy="777240"/>
+          </a:xfrm>
+          <a:prstGeom prst="rect">
+            <a:avLst/>
+          </a:prstGeom>
+          <a:noFill/>
+        </p:spPr>
+        <p:txBody>
+          <a:bodyPr wrap="square" anchor="ctr">
+            <a:spAutoFit/>
+          </a:bodyPr>
+          <a:lstStyle/>
+          <a:p>
+            <a:pPr algn="ctr">
+              <a:lnSpc>
+                <a:spcPct val="105000"/>
+              </a:lnSpc>
+              <a:spcAft>
+                <a:spcPts val="600"/>
+              </a:spcAft>
+            </a:pPr>
+            <a:r>
+              <a:rPr sz="1450" b="1">
+                <a:solidFill>
+                  <a:srgbClr val="FFFFFF"/>
+                </a:solidFill>
+                <a:latin typeface="Calibri"/>
+              </a:rPr>
+              <a:t>Support teams become self-sufficient</a:t>
+            </a:r>
+          </a:p>
+        </p:txBody>
+      </p:sp>
+      <p:sp>
+        <p:nvSpPr>
+          <p:cNvPr id="14" name="TextBox 13"/>
+          <p:cNvSpPr txBox="1"/>
+          <p:nvPr/>
+        </p:nvSpPr>
+        <p:spPr>
+          <a:xfrm>
+            <a:off x="4579010" y="3218688"/>
+            <a:ext cx="3033674" cy="1965960"/>
           </a:xfrm>
           <a:prstGeom prst="rect">
             <a:avLst/>
@@ -9162,27 +9362,157 @@
               </a:spcAft>
             </a:pPr>
             <a:r>
-              <a:rPr sz="1500" b="1">
-                <a:solidFill>
-                  <a:srgbClr val="0F2A47"/>
-                </a:solidFill>
-                <a:latin typeface="Calibri"/>
-              </a:rPr>
-              <a:t>Senior-engineer leverage</a:t>
-            </a:r>
-          </a:p>
-        </p:txBody>
-      </p:sp>
-      <p:sp>
-        <p:nvSpPr>
-          <p:cNvPr id="13" name="TextBox 12"/>
+              <a:rPr sz="1280" b="0">
+                <a:solidFill>
+                  <a:srgbClr val="333F4A"/>
+                </a:solidFill>
+                <a:latin typeface="Calibri"/>
+              </a:rPr>
+              <a:t>Indexed documentation, code context and incident learning make routine questions and investigations answerable without repeatedly returning to the original developers. Engineering expertise stays focused on genuinely novel issues.</a:t>
+            </a:r>
+          </a:p>
+        </p:txBody>
+      </p:sp>
+      <p:sp>
+        <p:nvSpPr>
+          <p:cNvPr id="15" name="Rectangle 14"/>
+          <p:cNvSpPr/>
+          <p:nvPr/>
+        </p:nvSpPr>
+        <p:spPr>
+          <a:xfrm>
+            <a:off x="8097316" y="2286000"/>
+            <a:ext cx="3454298" cy="3063240"/>
+          </a:xfrm>
+          <a:prstGeom prst="rect">
+            <a:avLst/>
+          </a:prstGeom>
+          <a:solidFill>
+            <a:srgbClr val="F2F5F7"/>
+          </a:solidFill>
+          <a:ln>
+            <a:noFill/>
+          </a:ln>
+          <a:effectLst/>
+        </p:spPr>
+        <p:style>
+          <a:lnRef idx="1">
+            <a:schemeClr val="accent1"/>
+          </a:lnRef>
+          <a:fillRef idx="3">
+            <a:schemeClr val="accent1"/>
+          </a:fillRef>
+          <a:effectRef idx="2">
+            <a:schemeClr val="accent1"/>
+          </a:effectRef>
+          <a:fontRef idx="minor">
+            <a:schemeClr val="lt1"/>
+          </a:fontRef>
+        </p:style>
+        <p:txBody>
+          <a:bodyPr rtlCol="0" anchor="ctr"/>
+          <a:lstStyle/>
+          <a:p>
+            <a:pPr algn="ctr"/>
+          </a:p>
+        </p:txBody>
+      </p:sp>
+      <p:sp>
+        <p:nvSpPr>
+          <p:cNvPr id="16" name="Rectangle 15"/>
+          <p:cNvSpPr/>
+          <p:nvPr/>
+        </p:nvSpPr>
+        <p:spPr>
+          <a:xfrm>
+            <a:off x="8097316" y="2286000"/>
+            <a:ext cx="3454298" cy="777240"/>
+          </a:xfrm>
+          <a:prstGeom prst="rect">
+            <a:avLst/>
+          </a:prstGeom>
+          <a:solidFill>
+            <a:srgbClr val="0F2A47"/>
+          </a:solidFill>
+          <a:ln>
+            <a:noFill/>
+          </a:ln>
+          <a:effectLst/>
+        </p:spPr>
+        <p:style>
+          <a:lnRef idx="1">
+            <a:schemeClr val="accent1"/>
+          </a:lnRef>
+          <a:fillRef idx="3">
+            <a:schemeClr val="accent1"/>
+          </a:fillRef>
+          <a:effectRef idx="2">
+            <a:schemeClr val="accent1"/>
+          </a:effectRef>
+          <a:fontRef idx="minor">
+            <a:schemeClr val="lt1"/>
+          </a:fontRef>
+        </p:style>
+        <p:txBody>
+          <a:bodyPr rtlCol="0" anchor="ctr"/>
+          <a:lstStyle/>
+          <a:p>
+            <a:pPr algn="ctr"/>
+          </a:p>
+        </p:txBody>
+      </p:sp>
+      <p:sp>
+        <p:nvSpPr>
+          <p:cNvPr id="17" name="TextBox 16"/>
           <p:cNvSpPr txBox="1"/>
           <p:nvPr/>
         </p:nvSpPr>
         <p:spPr>
           <a:xfrm>
-            <a:off x="4663440" y="2377440"/>
-            <a:ext cx="3337560" cy="914400"/>
+            <a:off x="8234476" y="2286000"/>
+            <a:ext cx="3179978" cy="777240"/>
+          </a:xfrm>
+          <a:prstGeom prst="rect">
+            <a:avLst/>
+          </a:prstGeom>
+          <a:noFill/>
+        </p:spPr>
+        <p:txBody>
+          <a:bodyPr wrap="square" anchor="ctr">
+            <a:spAutoFit/>
+          </a:bodyPr>
+          <a:lstStyle/>
+          <a:p>
+            <a:pPr algn="ctr">
+              <a:lnSpc>
+                <a:spcPct val="105000"/>
+              </a:lnSpc>
+              <a:spcAft>
+                <a:spcPts val="600"/>
+              </a:spcAft>
+            </a:pPr>
+            <a:r>
+              <a:rPr sz="1450" b="1">
+                <a:solidFill>
+                  <a:srgbClr val="FFFFFF"/>
+                </a:solidFill>
+                <a:latin typeface="Calibri"/>
+              </a:rPr>
+              <a:t>Future: code-aware Q&amp;A</a:t>
+            </a:r>
+          </a:p>
+        </p:txBody>
+      </p:sp>
+      <p:sp>
+        <p:nvSpPr>
+          <p:cNvPr id="18" name="TextBox 17"/>
+          <p:cNvSpPr txBox="1"/>
+          <p:nvPr/>
+        </p:nvSpPr>
+        <p:spPr>
+          <a:xfrm>
+            <a:off x="8307628" y="3218688"/>
+            <a:ext cx="3033674" cy="1965960"/>
           </a:xfrm>
           <a:prstGeom prst="rect">
             <a:avLst/>
@@ -9204,115 +9534,27 @@
               </a:spcAft>
             </a:pPr>
             <a:r>
-              <a:rPr sz="1250" b="0">
+              <a:rPr sz="1280" b="0">
                 <a:solidFill>
                   <a:srgbClr val="333F4A"/>
                 </a:solidFill>
                 <a:latin typeface="Calibri"/>
               </a:rPr>
-              <a:t>Frees scarce expertise from repetitive triage.</a:t>
-            </a:r>
-          </a:p>
-        </p:txBody>
-      </p:sp>
-      <p:sp>
-        <p:nvSpPr>
-          <p:cNvPr id="14" name="Rectangle 13"/>
-          <p:cNvSpPr/>
-          <p:nvPr/>
-        </p:nvSpPr>
-        <p:spPr>
-          <a:xfrm>
-            <a:off x="8321040" y="1645920"/>
-            <a:ext cx="3611880" cy="1737360"/>
-          </a:xfrm>
-          <a:prstGeom prst="rect">
-            <a:avLst/>
-          </a:prstGeom>
-          <a:solidFill>
-            <a:srgbClr val="F2F5F7"/>
-          </a:solidFill>
-          <a:ln>
-            <a:noFill/>
-          </a:ln>
-          <a:effectLst/>
-        </p:spPr>
-        <p:style>
-          <a:lnRef idx="1">
-            <a:schemeClr val="accent1"/>
-          </a:lnRef>
-          <a:fillRef idx="3">
-            <a:schemeClr val="accent1"/>
-          </a:fillRef>
-          <a:effectRef idx="2">
-            <a:schemeClr val="accent1"/>
-          </a:effectRef>
-          <a:fontRef idx="minor">
-            <a:schemeClr val="lt1"/>
-          </a:fontRef>
-        </p:style>
-        <p:txBody>
-          <a:bodyPr rtlCol="0" anchor="ctr"/>
-          <a:lstStyle/>
-          <a:p>
-            <a:pPr algn="ctr"/>
-          </a:p>
-        </p:txBody>
-      </p:sp>
-      <p:sp>
-        <p:nvSpPr>
-          <p:cNvPr id="15" name="Rectangle 14"/>
-          <p:cNvSpPr/>
-          <p:nvPr/>
-        </p:nvSpPr>
-        <p:spPr>
-          <a:xfrm>
-            <a:off x="8321040" y="1645920"/>
-            <a:ext cx="3611880" cy="63500"/>
-          </a:xfrm>
-          <a:prstGeom prst="rect">
-            <a:avLst/>
-          </a:prstGeom>
-          <a:solidFill>
-            <a:srgbClr val="189AB4"/>
-          </a:solidFill>
-          <a:ln>
-            <a:noFill/>
-          </a:ln>
-          <a:effectLst/>
-        </p:spPr>
-        <p:style>
-          <a:lnRef idx="1">
-            <a:schemeClr val="accent1"/>
-          </a:lnRef>
-          <a:fillRef idx="3">
-            <a:schemeClr val="accent1"/>
-          </a:fillRef>
-          <a:effectRef idx="2">
-            <a:schemeClr val="accent1"/>
-          </a:effectRef>
-          <a:fontRef idx="minor">
-            <a:schemeClr val="lt1"/>
-          </a:fontRef>
-        </p:style>
-        <p:txBody>
-          <a:bodyPr rtlCol="0" anchor="ctr"/>
-          <a:lstStyle/>
-          <a:p>
-            <a:pPr algn="ctr"/>
-          </a:p>
-        </p:txBody>
-      </p:sp>
-      <p:sp>
-        <p:nvSpPr>
-          <p:cNvPr id="16" name="TextBox 15"/>
+              <a:t>Ask Mission Control will combine approved Confluence content with the relevant deployed code / Intent Layer and authorised incident history — a cited answer grounded in more than documentation alone.</a:t>
+            </a:r>
+          </a:p>
+        </p:txBody>
+      </p:sp>
+      <p:sp>
+        <p:nvSpPr>
+          <p:cNvPr id="19" name="TextBox 18"/>
           <p:cNvSpPr txBox="1"/>
           <p:nvPr/>
         </p:nvSpPr>
         <p:spPr>
           <a:xfrm>
-            <a:off x="8503920" y="1828800"/>
-            <a:ext cx="3337560" cy="548640"/>
+            <a:off x="640080" y="5596128"/>
+            <a:ext cx="10972800" cy="777240"/>
           </a:xfrm>
           <a:prstGeom prst="rect">
             <a:avLst/>
@@ -9325,7 +9567,7 @@
           </a:bodyPr>
           <a:lstStyle/>
           <a:p>
-            <a:pPr algn="l">
+            <a:pPr algn="ctr">
               <a:lnSpc>
                 <a:spcPct val="105000"/>
               </a:lnSpc>
@@ -9334,571 +9576,13 @@
               </a:spcAft>
             </a:pPr>
             <a:r>
-              <a:rPr sz="1500" b="1">
+              <a:rPr sz="1450" b="1">
                 <a:solidFill>
                   <a:srgbClr val="0F2A47"/>
                 </a:solidFill>
                 <a:latin typeface="Calibri"/>
               </a:rPr>
-              <a:t>Consistency</a:t>
-            </a:r>
-          </a:p>
-        </p:txBody>
-      </p:sp>
-      <p:sp>
-        <p:nvSpPr>
-          <p:cNvPr id="17" name="TextBox 16"/>
-          <p:cNvSpPr txBox="1"/>
-          <p:nvPr/>
-        </p:nvSpPr>
-        <p:spPr>
-          <a:xfrm>
-            <a:off x="8503920" y="2377440"/>
-            <a:ext cx="3337560" cy="914400"/>
-          </a:xfrm>
-          <a:prstGeom prst="rect">
-            <a:avLst/>
-          </a:prstGeom>
-          <a:noFill/>
-        </p:spPr>
-        <p:txBody>
-          <a:bodyPr wrap="square" anchor="t">
-            <a:spAutoFit/>
-          </a:bodyPr>
-          <a:lstStyle/>
-          <a:p>
-            <a:pPr algn="l">
-              <a:lnSpc>
-                <a:spcPct val="105000"/>
-              </a:lnSpc>
-              <a:spcAft>
-                <a:spcPts val="600"/>
-              </a:spcAft>
-            </a:pPr>
-            <a:r>
-              <a:rPr sz="1250" b="0">
-                <a:solidFill>
-                  <a:srgbClr val="333F4A"/>
-                </a:solidFill>
-                <a:latin typeface="Calibri"/>
-              </a:rPr>
-              <a:t>Every in-scope incident gets a thorough investigation.</a:t>
-            </a:r>
-          </a:p>
-        </p:txBody>
-      </p:sp>
-      <p:sp>
-        <p:nvSpPr>
-          <p:cNvPr id="18" name="Rectangle 17"/>
-          <p:cNvSpPr/>
-          <p:nvPr/>
-        </p:nvSpPr>
-        <p:spPr>
-          <a:xfrm>
-            <a:off x="640080" y="3657600"/>
-            <a:ext cx="3611880" cy="1737360"/>
-          </a:xfrm>
-          <a:prstGeom prst="rect">
-            <a:avLst/>
-          </a:prstGeom>
-          <a:solidFill>
-            <a:srgbClr val="F2F5F7"/>
-          </a:solidFill>
-          <a:ln>
-            <a:noFill/>
-          </a:ln>
-          <a:effectLst/>
-        </p:spPr>
-        <p:style>
-          <a:lnRef idx="1">
-            <a:schemeClr val="accent1"/>
-          </a:lnRef>
-          <a:fillRef idx="3">
-            <a:schemeClr val="accent1"/>
-          </a:fillRef>
-          <a:effectRef idx="2">
-            <a:schemeClr val="accent1"/>
-          </a:effectRef>
-          <a:fontRef idx="minor">
-            <a:schemeClr val="lt1"/>
-          </a:fontRef>
-        </p:style>
-        <p:txBody>
-          <a:bodyPr rtlCol="0" anchor="ctr"/>
-          <a:lstStyle/>
-          <a:p>
-            <a:pPr algn="ctr"/>
-          </a:p>
-        </p:txBody>
-      </p:sp>
-      <p:sp>
-        <p:nvSpPr>
-          <p:cNvPr id="19" name="Rectangle 18"/>
-          <p:cNvSpPr/>
-          <p:nvPr/>
-        </p:nvSpPr>
-        <p:spPr>
-          <a:xfrm>
-            <a:off x="640080" y="3657600"/>
-            <a:ext cx="3611880" cy="63500"/>
-          </a:xfrm>
-          <a:prstGeom prst="rect">
-            <a:avLst/>
-          </a:prstGeom>
-          <a:solidFill>
-            <a:srgbClr val="189AB4"/>
-          </a:solidFill>
-          <a:ln>
-            <a:noFill/>
-          </a:ln>
-          <a:effectLst/>
-        </p:spPr>
-        <p:style>
-          <a:lnRef idx="1">
-            <a:schemeClr val="accent1"/>
-          </a:lnRef>
-          <a:fillRef idx="3">
-            <a:schemeClr val="accent1"/>
-          </a:fillRef>
-          <a:effectRef idx="2">
-            <a:schemeClr val="accent1"/>
-          </a:effectRef>
-          <a:fontRef idx="minor">
-            <a:schemeClr val="lt1"/>
-          </a:fontRef>
-        </p:style>
-        <p:txBody>
-          <a:bodyPr rtlCol="0" anchor="ctr"/>
-          <a:lstStyle/>
-          <a:p>
-            <a:pPr algn="ctr"/>
-          </a:p>
-        </p:txBody>
-      </p:sp>
-      <p:sp>
-        <p:nvSpPr>
-          <p:cNvPr id="20" name="TextBox 19"/>
-          <p:cNvSpPr txBox="1"/>
-          <p:nvPr/>
-        </p:nvSpPr>
-        <p:spPr>
-          <a:xfrm>
-            <a:off x="822960" y="3840480"/>
-            <a:ext cx="3337560" cy="548640"/>
-          </a:xfrm>
-          <a:prstGeom prst="rect">
-            <a:avLst/>
-          </a:prstGeom>
-          <a:noFill/>
-        </p:spPr>
-        <p:txBody>
-          <a:bodyPr wrap="square" anchor="t">
-            <a:spAutoFit/>
-          </a:bodyPr>
-          <a:lstStyle/>
-          <a:p>
-            <a:pPr algn="l">
-              <a:lnSpc>
-                <a:spcPct val="105000"/>
-              </a:lnSpc>
-              <a:spcAft>
-                <a:spcPts val="600"/>
-              </a:spcAft>
-            </a:pPr>
-            <a:r>
-              <a:rPr sz="1500" b="1">
-                <a:solidFill>
-                  <a:srgbClr val="0F2A47"/>
-                </a:solidFill>
-                <a:latin typeface="Calibri"/>
-              </a:rPr>
-              <a:t>Knowledge capture</a:t>
-            </a:r>
-          </a:p>
-        </p:txBody>
-      </p:sp>
-      <p:sp>
-        <p:nvSpPr>
-          <p:cNvPr id="21" name="TextBox 20"/>
-          <p:cNvSpPr txBox="1"/>
-          <p:nvPr/>
-        </p:nvSpPr>
-        <p:spPr>
-          <a:xfrm>
-            <a:off x="822960" y="4389120"/>
-            <a:ext cx="3337560" cy="914400"/>
-          </a:xfrm>
-          <a:prstGeom prst="rect">
-            <a:avLst/>
-          </a:prstGeom>
-          <a:noFill/>
-        </p:spPr>
-        <p:txBody>
-          <a:bodyPr wrap="square" anchor="t">
-            <a:spAutoFit/>
-          </a:bodyPr>
-          <a:lstStyle/>
-          <a:p>
-            <a:pPr algn="l">
-              <a:lnSpc>
-                <a:spcPct val="105000"/>
-              </a:lnSpc>
-              <a:spcAft>
-                <a:spcPts val="600"/>
-              </a:spcAft>
-            </a:pPr>
-            <a:r>
-              <a:rPr sz="1250" b="0">
-                <a:solidFill>
-                  <a:srgbClr val="333F4A"/>
-                </a:solidFill>
-                <a:latin typeface="Calibri"/>
-              </a:rPr>
-              <a:t>Recurring failure patterns become a durable asset.</a:t>
-            </a:r>
-          </a:p>
-        </p:txBody>
-      </p:sp>
-      <p:sp>
-        <p:nvSpPr>
-          <p:cNvPr id="22" name="Rectangle 21"/>
-          <p:cNvSpPr/>
-          <p:nvPr/>
-        </p:nvSpPr>
-        <p:spPr>
-          <a:xfrm>
-            <a:off x="4480560" y="3657600"/>
-            <a:ext cx="3611880" cy="1737360"/>
-          </a:xfrm>
-          <a:prstGeom prst="rect">
-            <a:avLst/>
-          </a:prstGeom>
-          <a:solidFill>
-            <a:srgbClr val="F2F5F7"/>
-          </a:solidFill>
-          <a:ln>
-            <a:noFill/>
-          </a:ln>
-          <a:effectLst/>
-        </p:spPr>
-        <p:style>
-          <a:lnRef idx="1">
-            <a:schemeClr val="accent1"/>
-          </a:lnRef>
-          <a:fillRef idx="3">
-            <a:schemeClr val="accent1"/>
-          </a:fillRef>
-          <a:effectRef idx="2">
-            <a:schemeClr val="accent1"/>
-          </a:effectRef>
-          <a:fontRef idx="minor">
-            <a:schemeClr val="lt1"/>
-          </a:fontRef>
-        </p:style>
-        <p:txBody>
-          <a:bodyPr rtlCol="0" anchor="ctr"/>
-          <a:lstStyle/>
-          <a:p>
-            <a:pPr algn="ctr"/>
-          </a:p>
-        </p:txBody>
-      </p:sp>
-      <p:sp>
-        <p:nvSpPr>
-          <p:cNvPr id="23" name="Rectangle 22"/>
-          <p:cNvSpPr/>
-          <p:nvPr/>
-        </p:nvSpPr>
-        <p:spPr>
-          <a:xfrm>
-            <a:off x="4480560" y="3657600"/>
-            <a:ext cx="3611880" cy="63500"/>
-          </a:xfrm>
-          <a:prstGeom prst="rect">
-            <a:avLst/>
-          </a:prstGeom>
-          <a:solidFill>
-            <a:srgbClr val="189AB4"/>
-          </a:solidFill>
-          <a:ln>
-            <a:noFill/>
-          </a:ln>
-          <a:effectLst/>
-        </p:spPr>
-        <p:style>
-          <a:lnRef idx="1">
-            <a:schemeClr val="accent1"/>
-          </a:lnRef>
-          <a:fillRef idx="3">
-            <a:schemeClr val="accent1"/>
-          </a:fillRef>
-          <a:effectRef idx="2">
-            <a:schemeClr val="accent1"/>
-          </a:effectRef>
-          <a:fontRef idx="minor">
-            <a:schemeClr val="lt1"/>
-          </a:fontRef>
-        </p:style>
-        <p:txBody>
-          <a:bodyPr rtlCol="0" anchor="ctr"/>
-          <a:lstStyle/>
-          <a:p>
-            <a:pPr algn="ctr"/>
-          </a:p>
-        </p:txBody>
-      </p:sp>
-      <p:sp>
-        <p:nvSpPr>
-          <p:cNvPr id="24" name="TextBox 23"/>
-          <p:cNvSpPr txBox="1"/>
-          <p:nvPr/>
-        </p:nvSpPr>
-        <p:spPr>
-          <a:xfrm>
-            <a:off x="4663440" y="3840480"/>
-            <a:ext cx="3337560" cy="548640"/>
-          </a:xfrm>
-          <a:prstGeom prst="rect">
-            <a:avLst/>
-          </a:prstGeom>
-          <a:noFill/>
-        </p:spPr>
-        <p:txBody>
-          <a:bodyPr wrap="square" anchor="t">
-            <a:spAutoFit/>
-          </a:bodyPr>
-          <a:lstStyle/>
-          <a:p>
-            <a:pPr algn="l">
-              <a:lnSpc>
-                <a:spcPct val="105000"/>
-              </a:lnSpc>
-              <a:spcAft>
-                <a:spcPts val="600"/>
-              </a:spcAft>
-            </a:pPr>
-            <a:r>
-              <a:rPr sz="1500" b="1">
-                <a:solidFill>
-                  <a:srgbClr val="0F2A47"/>
-                </a:solidFill>
-                <a:latin typeface="Calibri"/>
-              </a:rPr>
-              <a:t>Low-risk proving ground</a:t>
-            </a:r>
-          </a:p>
-        </p:txBody>
-      </p:sp>
-      <p:sp>
-        <p:nvSpPr>
-          <p:cNvPr id="25" name="TextBox 24"/>
-          <p:cNvSpPr txBox="1"/>
-          <p:nvPr/>
-        </p:nvSpPr>
-        <p:spPr>
-          <a:xfrm>
-            <a:off x="4663440" y="4389120"/>
-            <a:ext cx="3337560" cy="914400"/>
-          </a:xfrm>
-          <a:prstGeom prst="rect">
-            <a:avLst/>
-          </a:prstGeom>
-          <a:noFill/>
-        </p:spPr>
-        <p:txBody>
-          <a:bodyPr wrap="square" anchor="t">
-            <a:spAutoFit/>
-          </a:bodyPr>
-          <a:lstStyle/>
-          <a:p>
-            <a:pPr algn="l">
-              <a:lnSpc>
-                <a:spcPct val="105000"/>
-              </a:lnSpc>
-              <a:spcAft>
-                <a:spcPts val="600"/>
-              </a:spcAft>
-            </a:pPr>
-            <a:r>
-              <a:rPr sz="1250" b="0">
-                <a:solidFill>
-                  <a:srgbClr val="333F4A"/>
-                </a:solidFill>
-                <a:latin typeface="Calibri"/>
-              </a:rPr>
-              <a:t>KPI gains on Tier 3 before critical systems.</a:t>
-            </a:r>
-          </a:p>
-        </p:txBody>
-      </p:sp>
-      <p:sp>
-        <p:nvSpPr>
-          <p:cNvPr id="26" name="Rectangle 25"/>
-          <p:cNvSpPr/>
-          <p:nvPr/>
-        </p:nvSpPr>
-        <p:spPr>
-          <a:xfrm>
-            <a:off x="8321040" y="3657600"/>
-            <a:ext cx="3611880" cy="1737360"/>
-          </a:xfrm>
-          <a:prstGeom prst="rect">
-            <a:avLst/>
-          </a:prstGeom>
-          <a:solidFill>
-            <a:srgbClr val="F2F5F7"/>
-          </a:solidFill>
-          <a:ln>
-            <a:noFill/>
-          </a:ln>
-          <a:effectLst/>
-        </p:spPr>
-        <p:style>
-          <a:lnRef idx="1">
-            <a:schemeClr val="accent1"/>
-          </a:lnRef>
-          <a:fillRef idx="3">
-            <a:schemeClr val="accent1"/>
-          </a:fillRef>
-          <a:effectRef idx="2">
-            <a:schemeClr val="accent1"/>
-          </a:effectRef>
-          <a:fontRef idx="minor">
-            <a:schemeClr val="lt1"/>
-          </a:fontRef>
-        </p:style>
-        <p:txBody>
-          <a:bodyPr rtlCol="0" anchor="ctr"/>
-          <a:lstStyle/>
-          <a:p>
-            <a:pPr algn="ctr"/>
-          </a:p>
-        </p:txBody>
-      </p:sp>
-      <p:sp>
-        <p:nvSpPr>
-          <p:cNvPr id="27" name="Rectangle 26"/>
-          <p:cNvSpPr/>
-          <p:nvPr/>
-        </p:nvSpPr>
-        <p:spPr>
-          <a:xfrm>
-            <a:off x="8321040" y="3657600"/>
-            <a:ext cx="3611880" cy="63500"/>
-          </a:xfrm>
-          <a:prstGeom prst="rect">
-            <a:avLst/>
-          </a:prstGeom>
-          <a:solidFill>
-            <a:srgbClr val="189AB4"/>
-          </a:solidFill>
-          <a:ln>
-            <a:noFill/>
-          </a:ln>
-          <a:effectLst/>
-        </p:spPr>
-        <p:style>
-          <a:lnRef idx="1">
-            <a:schemeClr val="accent1"/>
-          </a:lnRef>
-          <a:fillRef idx="3">
-            <a:schemeClr val="accent1"/>
-          </a:fillRef>
-          <a:effectRef idx="2">
-            <a:schemeClr val="accent1"/>
-          </a:effectRef>
-          <a:fontRef idx="minor">
-            <a:schemeClr val="lt1"/>
-          </a:fontRef>
-        </p:style>
-        <p:txBody>
-          <a:bodyPr rtlCol="0" anchor="ctr"/>
-          <a:lstStyle/>
-          <a:p>
-            <a:pPr algn="ctr"/>
-          </a:p>
-        </p:txBody>
-      </p:sp>
-      <p:sp>
-        <p:nvSpPr>
-          <p:cNvPr id="28" name="TextBox 27"/>
-          <p:cNvSpPr txBox="1"/>
-          <p:nvPr/>
-        </p:nvSpPr>
-        <p:spPr>
-          <a:xfrm>
-            <a:off x="8503920" y="3840480"/>
-            <a:ext cx="3337560" cy="548640"/>
-          </a:xfrm>
-          <a:prstGeom prst="rect">
-            <a:avLst/>
-          </a:prstGeom>
-          <a:noFill/>
-        </p:spPr>
-        <p:txBody>
-          <a:bodyPr wrap="square" anchor="t">
-            <a:spAutoFit/>
-          </a:bodyPr>
-          <a:lstStyle/>
-          <a:p>
-            <a:pPr algn="l">
-              <a:lnSpc>
-                <a:spcPct val="105000"/>
-              </a:lnSpc>
-              <a:spcAft>
-                <a:spcPts val="600"/>
-              </a:spcAft>
-            </a:pPr>
-            <a:r>
-              <a:rPr sz="1500" b="1">
-                <a:solidFill>
-                  <a:srgbClr val="0F2A47"/>
-                </a:solidFill>
-                <a:latin typeface="Calibri"/>
-              </a:rPr>
-              <a:t>Partial automation wins</a:t>
-            </a:r>
-          </a:p>
-        </p:txBody>
-      </p:sp>
-      <p:sp>
-        <p:nvSpPr>
-          <p:cNvPr id="29" name="TextBox 28"/>
-          <p:cNvSpPr txBox="1"/>
-          <p:nvPr/>
-        </p:nvSpPr>
-        <p:spPr>
-          <a:xfrm>
-            <a:off x="8503920" y="4389120"/>
-            <a:ext cx="3337560" cy="914400"/>
-          </a:xfrm>
-          <a:prstGeom prst="rect">
-            <a:avLst/>
-          </a:prstGeom>
-          <a:noFill/>
-        </p:spPr>
-        <p:txBody>
-          <a:bodyPr wrap="square" anchor="t">
-            <a:spAutoFit/>
-          </a:bodyPr>
-          <a:lstStyle/>
-          <a:p>
-            <a:pPr algn="l">
-              <a:lnSpc>
-                <a:spcPct val="105000"/>
-              </a:lnSpc>
-              <a:spcAft>
-                <a:spcPts val="600"/>
-              </a:spcAft>
-            </a:pPr>
-            <a:r>
-              <a:rPr sz="1250" b="0">
-                <a:solidFill>
-                  <a:srgbClr val="333F4A"/>
-                </a:solidFill>
-                <a:latin typeface="Calibri"/>
-              </a:rPr>
-              <a:t>Resolve some, accelerate the rest — net big gain.</a:t>
+              <a:t>Outcome: a durable handover, fewer routine developer escalations, and application knowledge that improves with use.</a:t>
             </a:r>
           </a:p>
         </p:txBody>
@@ -10046,7 +9730,7 @@
                 </a:solidFill>
                 <a:latin typeface="Calibri"/>
               </a:rPr>
-              <a:t>ENGAGEMENT MODEL</a:t>
+              <a:t>THE VALUE</a:t>
             </a:r>
           </a:p>
         </p:txBody>
@@ -10088,7 +9772,7 @@
                 </a:solidFill>
                 <a:latin typeface="Calibri"/>
               </a:rPr>
-              <a:t>Low-commitment start, scalable rollout</a:t>
+              <a:t>Why this matters</a:t>
             </a:r>
           </a:p>
         </p:txBody>
@@ -10101,8 +9785,8 @@
         </p:nvSpPr>
         <p:spPr>
           <a:xfrm>
-            <a:off x="640080" y="1920240"/>
-            <a:ext cx="3454298" cy="3108960"/>
+            <a:off x="640080" y="1645920"/>
+            <a:ext cx="3611880" cy="1737360"/>
           </a:xfrm>
           <a:prstGeom prst="rect">
             <a:avLst/>
@@ -10145,14 +9829,14 @@
         </p:nvSpPr>
         <p:spPr>
           <a:xfrm>
-            <a:off x="640080" y="1920240"/>
-            <a:ext cx="3454298" cy="731520"/>
+            <a:off x="640080" y="1645920"/>
+            <a:ext cx="3611880" cy="63500"/>
           </a:xfrm>
           <a:prstGeom prst="rect">
             <a:avLst/>
           </a:prstGeom>
           <a:solidFill>
-            <a:srgbClr val="0F2A47"/>
+            <a:srgbClr val="189AB4"/>
           </a:solidFill>
           <a:ln>
             <a:noFill/>
@@ -10189,50 +9873,8 @@
         </p:nvSpPr>
         <p:spPr>
           <a:xfrm>
-            <a:off x="640080" y="1920240"/>
-            <a:ext cx="3454298" cy="731520"/>
-          </a:xfrm>
-          <a:prstGeom prst="rect">
-            <a:avLst/>
-          </a:prstGeom>
-          <a:noFill/>
-        </p:spPr>
-        <p:txBody>
-          <a:bodyPr wrap="square" anchor="ctr">
-            <a:spAutoFit/>
-          </a:bodyPr>
-          <a:lstStyle/>
-          <a:p>
-            <a:pPr algn="ctr">
-              <a:lnSpc>
-                <a:spcPct val="105000"/>
-              </a:lnSpc>
-              <a:spcAft>
-                <a:spcPts val="600"/>
-              </a:spcAft>
-            </a:pPr>
-            <a:r>
-              <a:rPr sz="1600" b="1">
-                <a:solidFill>
-                  <a:srgbClr val="FFFFFF"/>
-                </a:solidFill>
-                <a:latin typeface="Calibri"/>
-              </a:rPr>
-              <a:t>1 · Platform analysis</a:t>
-            </a:r>
-          </a:p>
-        </p:txBody>
-      </p:sp>
-      <p:sp>
-        <p:nvSpPr>
-          <p:cNvPr id="9" name="TextBox 8"/>
-          <p:cNvSpPr txBox="1"/>
-          <p:nvPr/>
-        </p:nvSpPr>
-        <p:spPr>
-          <a:xfrm>
-            <a:off x="868680" y="2834640"/>
-            <a:ext cx="2997098" cy="2103120"/>
+            <a:off x="822960" y="1828800"/>
+            <a:ext cx="3337560" cy="548640"/>
           </a:xfrm>
           <a:prstGeom prst="rect">
             <a:avLst/>
@@ -10254,157 +9896,27 @@
               </a:spcAft>
             </a:pPr>
             <a:r>
-              <a:rPr sz="1400" b="0">
-                <a:solidFill>
-                  <a:srgbClr val="333F4A"/>
-                </a:solidFill>
-                <a:latin typeface="Calibri"/>
-              </a:rPr>
-              <a:t>A short, fixed-fee analysis of a target platform — scopes the work and prices the implementation up front.</a:t>
-            </a:r>
-          </a:p>
-        </p:txBody>
-      </p:sp>
-      <p:sp>
-        <p:nvSpPr>
-          <p:cNvPr id="10" name="Rectangle 9"/>
-          <p:cNvSpPr/>
-          <p:nvPr/>
-        </p:nvSpPr>
-        <p:spPr>
-          <a:xfrm>
-            <a:off x="4368698" y="1920240"/>
-            <a:ext cx="3454298" cy="3108960"/>
-          </a:xfrm>
-          <a:prstGeom prst="rect">
-            <a:avLst/>
-          </a:prstGeom>
-          <a:solidFill>
-            <a:srgbClr val="F2F5F7"/>
-          </a:solidFill>
-          <a:ln>
-            <a:noFill/>
-          </a:ln>
-          <a:effectLst/>
-        </p:spPr>
-        <p:style>
-          <a:lnRef idx="1">
-            <a:schemeClr val="accent1"/>
-          </a:lnRef>
-          <a:fillRef idx="3">
-            <a:schemeClr val="accent1"/>
-          </a:fillRef>
-          <a:effectRef idx="2">
-            <a:schemeClr val="accent1"/>
-          </a:effectRef>
-          <a:fontRef idx="minor">
-            <a:schemeClr val="lt1"/>
-          </a:fontRef>
-        </p:style>
-        <p:txBody>
-          <a:bodyPr rtlCol="0" anchor="ctr"/>
-          <a:lstStyle/>
-          <a:p>
-            <a:pPr algn="ctr"/>
-          </a:p>
-        </p:txBody>
-      </p:sp>
-      <p:sp>
-        <p:nvSpPr>
-          <p:cNvPr id="11" name="Rectangle 10"/>
-          <p:cNvSpPr/>
-          <p:nvPr/>
-        </p:nvSpPr>
-        <p:spPr>
-          <a:xfrm>
-            <a:off x="4368698" y="1920240"/>
-            <a:ext cx="3454298" cy="731520"/>
-          </a:xfrm>
-          <a:prstGeom prst="rect">
-            <a:avLst/>
-          </a:prstGeom>
-          <a:solidFill>
-            <a:srgbClr val="0F2A47"/>
-          </a:solidFill>
-          <a:ln>
-            <a:noFill/>
-          </a:ln>
-          <a:effectLst/>
-        </p:spPr>
-        <p:style>
-          <a:lnRef idx="1">
-            <a:schemeClr val="accent1"/>
-          </a:lnRef>
-          <a:fillRef idx="3">
-            <a:schemeClr val="accent1"/>
-          </a:fillRef>
-          <a:effectRef idx="2">
-            <a:schemeClr val="accent1"/>
-          </a:effectRef>
-          <a:fontRef idx="minor">
-            <a:schemeClr val="lt1"/>
-          </a:fontRef>
-        </p:style>
-        <p:txBody>
-          <a:bodyPr rtlCol="0" anchor="ctr"/>
-          <a:lstStyle/>
-          <a:p>
-            <a:pPr algn="ctr"/>
-          </a:p>
-        </p:txBody>
-      </p:sp>
-      <p:sp>
-        <p:nvSpPr>
-          <p:cNvPr id="12" name="TextBox 11"/>
+              <a:rPr sz="1500" b="1">
+                <a:solidFill>
+                  <a:srgbClr val="0F2A47"/>
+                </a:solidFill>
+                <a:latin typeface="Calibri"/>
+              </a:rPr>
+              <a:t>Faster resolution</a:t>
+            </a:r>
+          </a:p>
+        </p:txBody>
+      </p:sp>
+      <p:sp>
+        <p:nvSpPr>
+          <p:cNvPr id="9" name="TextBox 8"/>
           <p:cNvSpPr txBox="1"/>
           <p:nvPr/>
         </p:nvSpPr>
         <p:spPr>
           <a:xfrm>
-            <a:off x="4368698" y="1920240"/>
-            <a:ext cx="3454298" cy="731520"/>
-          </a:xfrm>
-          <a:prstGeom prst="rect">
-            <a:avLst/>
-          </a:prstGeom>
-          <a:noFill/>
-        </p:spPr>
-        <p:txBody>
-          <a:bodyPr wrap="square" anchor="ctr">
-            <a:spAutoFit/>
-          </a:bodyPr>
-          <a:lstStyle/>
-          <a:p>
-            <a:pPr algn="ctr">
-              <a:lnSpc>
-                <a:spcPct val="105000"/>
-              </a:lnSpc>
-              <a:spcAft>
-                <a:spcPts val="600"/>
-              </a:spcAft>
-            </a:pPr>
-            <a:r>
-              <a:rPr sz="1600" b="1">
-                <a:solidFill>
-                  <a:srgbClr val="FFFFFF"/>
-                </a:solidFill>
-                <a:latin typeface="Calibri"/>
-              </a:rPr>
-              <a:t>2 · Proof of Concept</a:t>
-            </a:r>
-          </a:p>
-        </p:txBody>
-      </p:sp>
-      <p:sp>
-        <p:nvSpPr>
-          <p:cNvPr id="13" name="TextBox 12"/>
-          <p:cNvSpPr txBox="1"/>
-          <p:nvPr/>
-        </p:nvSpPr>
-        <p:spPr>
-          <a:xfrm>
-            <a:off x="4597298" y="2834640"/>
-            <a:ext cx="2997098" cy="2103120"/>
+            <a:off x="822960" y="2377440"/>
+            <a:ext cx="3337560" cy="914400"/>
           </a:xfrm>
           <a:prstGeom prst="rect">
             <a:avLst/>
@@ -10426,27 +9938,27 @@
               </a:spcAft>
             </a:pPr>
             <a:r>
-              <a:rPr sz="1400" b="0">
+              <a:rPr sz="1250" b="0">
                 <a:solidFill>
                   <a:srgbClr val="333F4A"/>
                 </a:solidFill>
                 <a:latin typeface="Calibri"/>
               </a:rPr>
-              <a:t>Stand up Sentinel on that platform and demonstrate it on real incidents — proof before commitment.</a:t>
-            </a:r>
-          </a:p>
-        </p:txBody>
-      </p:sp>
-      <p:sp>
-        <p:nvSpPr>
-          <p:cNvPr id="14" name="Rectangle 13"/>
+              <a:t>Compresses the slowest phase — time-to-diagnosis.</a:t>
+            </a:r>
+          </a:p>
+        </p:txBody>
+      </p:sp>
+      <p:sp>
+        <p:nvSpPr>
+          <p:cNvPr id="10" name="Rectangle 9"/>
           <p:cNvSpPr/>
           <p:nvPr/>
         </p:nvSpPr>
         <p:spPr>
           <a:xfrm>
-            <a:off x="8097316" y="1920240"/>
-            <a:ext cx="3454298" cy="3108960"/>
+            <a:off x="4480560" y="1645920"/>
+            <a:ext cx="3611880" cy="1737360"/>
           </a:xfrm>
           <a:prstGeom prst="rect">
             <a:avLst/>
@@ -10483,20 +9995,20 @@
       </p:sp>
       <p:sp>
         <p:nvSpPr>
-          <p:cNvPr id="15" name="Rectangle 14"/>
+          <p:cNvPr id="11" name="Rectangle 10"/>
           <p:cNvSpPr/>
           <p:nvPr/>
         </p:nvSpPr>
         <p:spPr>
           <a:xfrm>
-            <a:off x="8097316" y="1920240"/>
-            <a:ext cx="3454298" cy="731520"/>
+            <a:off x="4480560" y="1645920"/>
+            <a:ext cx="3611880" cy="63500"/>
           </a:xfrm>
           <a:prstGeom prst="rect">
             <a:avLst/>
           </a:prstGeom>
           <a:solidFill>
-            <a:srgbClr val="0F2A47"/>
+            <a:srgbClr val="189AB4"/>
           </a:solidFill>
           <a:ln>
             <a:noFill/>
@@ -10527,56 +10039,14 @@
       </p:sp>
       <p:sp>
         <p:nvSpPr>
-          <p:cNvPr id="16" name="TextBox 15"/>
+          <p:cNvPr id="12" name="TextBox 11"/>
           <p:cNvSpPr txBox="1"/>
           <p:nvPr/>
         </p:nvSpPr>
         <p:spPr>
           <a:xfrm>
-            <a:off x="8097316" y="1920240"/>
-            <a:ext cx="3454298" cy="731520"/>
-          </a:xfrm>
-          <a:prstGeom prst="rect">
-            <a:avLst/>
-          </a:prstGeom>
-          <a:noFill/>
-        </p:spPr>
-        <p:txBody>
-          <a:bodyPr wrap="square" anchor="ctr">
-            <a:spAutoFit/>
-          </a:bodyPr>
-          <a:lstStyle/>
-          <a:p>
-            <a:pPr algn="ctr">
-              <a:lnSpc>
-                <a:spcPct val="105000"/>
-              </a:lnSpc>
-              <a:spcAft>
-                <a:spcPts val="600"/>
-              </a:spcAft>
-            </a:pPr>
-            <a:r>
-              <a:rPr sz="1600" b="1">
-                <a:solidFill>
-                  <a:srgbClr val="FFFFFF"/>
-                </a:solidFill>
-                <a:latin typeface="Calibri"/>
-              </a:rPr>
-              <a:t>3 · Scaled rollout</a:t>
-            </a:r>
-          </a:p>
-        </p:txBody>
-      </p:sp>
-      <p:sp>
-        <p:nvSpPr>
-          <p:cNvPr id="17" name="TextBox 16"/>
-          <p:cNvSpPr txBox="1"/>
-          <p:nvPr/>
-        </p:nvSpPr>
-        <p:spPr>
-          <a:xfrm>
-            <a:off x="8325916" y="2834640"/>
-            <a:ext cx="2997098" cy="2103120"/>
+            <a:off x="4663440" y="1828800"/>
+            <a:ext cx="3337560" cy="548640"/>
           </a:xfrm>
           <a:prstGeom prst="rect">
             <a:avLst/>
@@ -10598,27 +10068,27 @@
               </a:spcAft>
             </a:pPr>
             <a:r>
-              <a:rPr sz="1400" b="0">
-                <a:solidFill>
-                  <a:srgbClr val="333F4A"/>
-                </a:solidFill>
-                <a:latin typeface="Calibri"/>
-              </a:rPr>
-              <a:t>Implement platform by platform (fixed-price or T&amp;M). Shared components built once; only platform-specific work per system.</a:t>
-            </a:r>
-          </a:p>
-        </p:txBody>
-      </p:sp>
-      <p:sp>
-        <p:nvSpPr>
-          <p:cNvPr id="18" name="TextBox 17"/>
+              <a:rPr sz="1500" b="1">
+                <a:solidFill>
+                  <a:srgbClr val="0F2A47"/>
+                </a:solidFill>
+                <a:latin typeface="Calibri"/>
+              </a:rPr>
+              <a:t>Senior-engineer leverage</a:t>
+            </a:r>
+          </a:p>
+        </p:txBody>
+      </p:sp>
+      <p:sp>
+        <p:nvSpPr>
+          <p:cNvPr id="13" name="TextBox 12"/>
           <p:cNvSpPr txBox="1"/>
           <p:nvPr/>
         </p:nvSpPr>
         <p:spPr>
           <a:xfrm>
-            <a:off x="640080" y="5394960"/>
-            <a:ext cx="10972800" cy="914400"/>
+            <a:off x="4663440" y="2377440"/>
+            <a:ext cx="3337560" cy="914400"/>
           </a:xfrm>
           <a:prstGeom prst="rect">
             <a:avLst/>
@@ -10631,7 +10101,7 @@
           </a:bodyPr>
           <a:lstStyle/>
           <a:p>
-            <a:pPr algn="ctr">
+            <a:pPr algn="l">
               <a:lnSpc>
                 <a:spcPct val="105000"/>
               </a:lnSpc>
@@ -10640,13 +10110,701 @@
               </a:spcAft>
             </a:pPr>
             <a:r>
-              <a:rPr sz="1400" b="0">
-                <a:solidFill>
-                  <a:srgbClr val="6B7780"/>
-                </a:solidFill>
-                <a:latin typeface="Calibri"/>
-              </a:rPr>
-              <a:t>Each platform is slightly different — its knowledge base and data-access needs drive the incremental cost.</a:t>
+              <a:rPr sz="1250" b="0">
+                <a:solidFill>
+                  <a:srgbClr val="333F4A"/>
+                </a:solidFill>
+                <a:latin typeface="Calibri"/>
+              </a:rPr>
+              <a:t>Frees scarce expertise from repetitive triage.</a:t>
+            </a:r>
+          </a:p>
+        </p:txBody>
+      </p:sp>
+      <p:sp>
+        <p:nvSpPr>
+          <p:cNvPr id="14" name="Rectangle 13"/>
+          <p:cNvSpPr/>
+          <p:nvPr/>
+        </p:nvSpPr>
+        <p:spPr>
+          <a:xfrm>
+            <a:off x="8321040" y="1645920"/>
+            <a:ext cx="3611880" cy="1737360"/>
+          </a:xfrm>
+          <a:prstGeom prst="rect">
+            <a:avLst/>
+          </a:prstGeom>
+          <a:solidFill>
+            <a:srgbClr val="F2F5F7"/>
+          </a:solidFill>
+          <a:ln>
+            <a:noFill/>
+          </a:ln>
+          <a:effectLst/>
+        </p:spPr>
+        <p:style>
+          <a:lnRef idx="1">
+            <a:schemeClr val="accent1"/>
+          </a:lnRef>
+          <a:fillRef idx="3">
+            <a:schemeClr val="accent1"/>
+          </a:fillRef>
+          <a:effectRef idx="2">
+            <a:schemeClr val="accent1"/>
+          </a:effectRef>
+          <a:fontRef idx="minor">
+            <a:schemeClr val="lt1"/>
+          </a:fontRef>
+        </p:style>
+        <p:txBody>
+          <a:bodyPr rtlCol="0" anchor="ctr"/>
+          <a:lstStyle/>
+          <a:p>
+            <a:pPr algn="ctr"/>
+          </a:p>
+        </p:txBody>
+      </p:sp>
+      <p:sp>
+        <p:nvSpPr>
+          <p:cNvPr id="15" name="Rectangle 14"/>
+          <p:cNvSpPr/>
+          <p:nvPr/>
+        </p:nvSpPr>
+        <p:spPr>
+          <a:xfrm>
+            <a:off x="8321040" y="1645920"/>
+            <a:ext cx="3611880" cy="63500"/>
+          </a:xfrm>
+          <a:prstGeom prst="rect">
+            <a:avLst/>
+          </a:prstGeom>
+          <a:solidFill>
+            <a:srgbClr val="189AB4"/>
+          </a:solidFill>
+          <a:ln>
+            <a:noFill/>
+          </a:ln>
+          <a:effectLst/>
+        </p:spPr>
+        <p:style>
+          <a:lnRef idx="1">
+            <a:schemeClr val="accent1"/>
+          </a:lnRef>
+          <a:fillRef idx="3">
+            <a:schemeClr val="accent1"/>
+          </a:fillRef>
+          <a:effectRef idx="2">
+            <a:schemeClr val="accent1"/>
+          </a:effectRef>
+          <a:fontRef idx="minor">
+            <a:schemeClr val="lt1"/>
+          </a:fontRef>
+        </p:style>
+        <p:txBody>
+          <a:bodyPr rtlCol="0" anchor="ctr"/>
+          <a:lstStyle/>
+          <a:p>
+            <a:pPr algn="ctr"/>
+          </a:p>
+        </p:txBody>
+      </p:sp>
+      <p:sp>
+        <p:nvSpPr>
+          <p:cNvPr id="16" name="TextBox 15"/>
+          <p:cNvSpPr txBox="1"/>
+          <p:nvPr/>
+        </p:nvSpPr>
+        <p:spPr>
+          <a:xfrm>
+            <a:off x="8503920" y="1828800"/>
+            <a:ext cx="3337560" cy="548640"/>
+          </a:xfrm>
+          <a:prstGeom prst="rect">
+            <a:avLst/>
+          </a:prstGeom>
+          <a:noFill/>
+        </p:spPr>
+        <p:txBody>
+          <a:bodyPr wrap="square" anchor="t">
+            <a:spAutoFit/>
+          </a:bodyPr>
+          <a:lstStyle/>
+          <a:p>
+            <a:pPr algn="l">
+              <a:lnSpc>
+                <a:spcPct val="105000"/>
+              </a:lnSpc>
+              <a:spcAft>
+                <a:spcPts val="600"/>
+              </a:spcAft>
+            </a:pPr>
+            <a:r>
+              <a:rPr sz="1500" b="1">
+                <a:solidFill>
+                  <a:srgbClr val="0F2A47"/>
+                </a:solidFill>
+                <a:latin typeface="Calibri"/>
+              </a:rPr>
+              <a:t>Measured quality</a:t>
+            </a:r>
+          </a:p>
+        </p:txBody>
+      </p:sp>
+      <p:sp>
+        <p:nvSpPr>
+          <p:cNvPr id="17" name="TextBox 16"/>
+          <p:cNvSpPr txBox="1"/>
+          <p:nvPr/>
+        </p:nvSpPr>
+        <p:spPr>
+          <a:xfrm>
+            <a:off x="8503920" y="2377440"/>
+            <a:ext cx="3337560" cy="914400"/>
+          </a:xfrm>
+          <a:prstGeom prst="rect">
+            <a:avLst/>
+          </a:prstGeom>
+          <a:noFill/>
+        </p:spPr>
+        <p:txBody>
+          <a:bodyPr wrap="square" anchor="t">
+            <a:spAutoFit/>
+          </a:bodyPr>
+          <a:lstStyle/>
+          <a:p>
+            <a:pPr algn="l">
+              <a:lnSpc>
+                <a:spcPct val="105000"/>
+              </a:lnSpc>
+              <a:spcAft>
+                <a:spcPts val="600"/>
+              </a:spcAft>
+            </a:pPr>
+            <a:r>
+              <a:rPr sz="1250" b="0">
+                <a:solidFill>
+                  <a:srgbClr val="333F4A"/>
+                </a:solidFill>
+                <a:latin typeface="Calibri"/>
+              </a:rPr>
+              <a:t>Human verdicts + golden-set replay track accuracy and acceptance.</a:t>
+            </a:r>
+          </a:p>
+        </p:txBody>
+      </p:sp>
+      <p:sp>
+        <p:nvSpPr>
+          <p:cNvPr id="18" name="Rectangle 17"/>
+          <p:cNvSpPr/>
+          <p:nvPr/>
+        </p:nvSpPr>
+        <p:spPr>
+          <a:xfrm>
+            <a:off x="640080" y="3657600"/>
+            <a:ext cx="3611880" cy="1737360"/>
+          </a:xfrm>
+          <a:prstGeom prst="rect">
+            <a:avLst/>
+          </a:prstGeom>
+          <a:solidFill>
+            <a:srgbClr val="F2F5F7"/>
+          </a:solidFill>
+          <a:ln>
+            <a:noFill/>
+          </a:ln>
+          <a:effectLst/>
+        </p:spPr>
+        <p:style>
+          <a:lnRef idx="1">
+            <a:schemeClr val="accent1"/>
+          </a:lnRef>
+          <a:fillRef idx="3">
+            <a:schemeClr val="accent1"/>
+          </a:fillRef>
+          <a:effectRef idx="2">
+            <a:schemeClr val="accent1"/>
+          </a:effectRef>
+          <a:fontRef idx="minor">
+            <a:schemeClr val="lt1"/>
+          </a:fontRef>
+        </p:style>
+        <p:txBody>
+          <a:bodyPr rtlCol="0" anchor="ctr"/>
+          <a:lstStyle/>
+          <a:p>
+            <a:pPr algn="ctr"/>
+          </a:p>
+        </p:txBody>
+      </p:sp>
+      <p:sp>
+        <p:nvSpPr>
+          <p:cNvPr id="19" name="Rectangle 18"/>
+          <p:cNvSpPr/>
+          <p:nvPr/>
+        </p:nvSpPr>
+        <p:spPr>
+          <a:xfrm>
+            <a:off x="640080" y="3657600"/>
+            <a:ext cx="3611880" cy="63500"/>
+          </a:xfrm>
+          <a:prstGeom prst="rect">
+            <a:avLst/>
+          </a:prstGeom>
+          <a:solidFill>
+            <a:srgbClr val="189AB4"/>
+          </a:solidFill>
+          <a:ln>
+            <a:noFill/>
+          </a:ln>
+          <a:effectLst/>
+        </p:spPr>
+        <p:style>
+          <a:lnRef idx="1">
+            <a:schemeClr val="accent1"/>
+          </a:lnRef>
+          <a:fillRef idx="3">
+            <a:schemeClr val="accent1"/>
+          </a:fillRef>
+          <a:effectRef idx="2">
+            <a:schemeClr val="accent1"/>
+          </a:effectRef>
+          <a:fontRef idx="minor">
+            <a:schemeClr val="lt1"/>
+          </a:fontRef>
+        </p:style>
+        <p:txBody>
+          <a:bodyPr rtlCol="0" anchor="ctr"/>
+          <a:lstStyle/>
+          <a:p>
+            <a:pPr algn="ctr"/>
+          </a:p>
+        </p:txBody>
+      </p:sp>
+      <p:sp>
+        <p:nvSpPr>
+          <p:cNvPr id="20" name="TextBox 19"/>
+          <p:cNvSpPr txBox="1"/>
+          <p:nvPr/>
+        </p:nvSpPr>
+        <p:spPr>
+          <a:xfrm>
+            <a:off x="822960" y="3840480"/>
+            <a:ext cx="3337560" cy="548640"/>
+          </a:xfrm>
+          <a:prstGeom prst="rect">
+            <a:avLst/>
+          </a:prstGeom>
+          <a:noFill/>
+        </p:spPr>
+        <p:txBody>
+          <a:bodyPr wrap="square" anchor="t">
+            <a:spAutoFit/>
+          </a:bodyPr>
+          <a:lstStyle/>
+          <a:p>
+            <a:pPr algn="l">
+              <a:lnSpc>
+                <a:spcPct val="105000"/>
+              </a:lnSpc>
+              <a:spcAft>
+                <a:spcPts val="600"/>
+              </a:spcAft>
+            </a:pPr>
+            <a:r>
+              <a:rPr sz="1500" b="1">
+                <a:solidFill>
+                  <a:srgbClr val="0F2A47"/>
+                </a:solidFill>
+                <a:latin typeface="Calibri"/>
+              </a:rPr>
+              <a:t>Support independence</a:t>
+            </a:r>
+          </a:p>
+        </p:txBody>
+      </p:sp>
+      <p:sp>
+        <p:nvSpPr>
+          <p:cNvPr id="21" name="TextBox 20"/>
+          <p:cNvSpPr txBox="1"/>
+          <p:nvPr/>
+        </p:nvSpPr>
+        <p:spPr>
+          <a:xfrm>
+            <a:off x="822960" y="4389120"/>
+            <a:ext cx="3337560" cy="914400"/>
+          </a:xfrm>
+          <a:prstGeom prst="rect">
+            <a:avLst/>
+          </a:prstGeom>
+          <a:noFill/>
+        </p:spPr>
+        <p:txBody>
+          <a:bodyPr wrap="square" anchor="t">
+            <a:spAutoFit/>
+          </a:bodyPr>
+          <a:lstStyle/>
+          <a:p>
+            <a:pPr algn="l">
+              <a:lnSpc>
+                <a:spcPct val="105000"/>
+              </a:lnSpc>
+              <a:spcAft>
+                <a:spcPts val="600"/>
+              </a:spcAft>
+            </a:pPr>
+            <a:r>
+              <a:rPr sz="1250" b="0">
+                <a:solidFill>
+                  <a:srgbClr val="333F4A"/>
+                </a:solidFill>
+                <a:latin typeface="Calibri"/>
+              </a:rPr>
+              <a:t>Structured handover reduces routine developer escalations.</a:t>
+            </a:r>
+          </a:p>
+        </p:txBody>
+      </p:sp>
+      <p:sp>
+        <p:nvSpPr>
+          <p:cNvPr id="22" name="Rectangle 21"/>
+          <p:cNvSpPr/>
+          <p:nvPr/>
+        </p:nvSpPr>
+        <p:spPr>
+          <a:xfrm>
+            <a:off x="4480560" y="3657600"/>
+            <a:ext cx="3611880" cy="1737360"/>
+          </a:xfrm>
+          <a:prstGeom prst="rect">
+            <a:avLst/>
+          </a:prstGeom>
+          <a:solidFill>
+            <a:srgbClr val="F2F5F7"/>
+          </a:solidFill>
+          <a:ln>
+            <a:noFill/>
+          </a:ln>
+          <a:effectLst/>
+        </p:spPr>
+        <p:style>
+          <a:lnRef idx="1">
+            <a:schemeClr val="accent1"/>
+          </a:lnRef>
+          <a:fillRef idx="3">
+            <a:schemeClr val="accent1"/>
+          </a:fillRef>
+          <a:effectRef idx="2">
+            <a:schemeClr val="accent1"/>
+          </a:effectRef>
+          <a:fontRef idx="minor">
+            <a:schemeClr val="lt1"/>
+          </a:fontRef>
+        </p:style>
+        <p:txBody>
+          <a:bodyPr rtlCol="0" anchor="ctr"/>
+          <a:lstStyle/>
+          <a:p>
+            <a:pPr algn="ctr"/>
+          </a:p>
+        </p:txBody>
+      </p:sp>
+      <p:sp>
+        <p:nvSpPr>
+          <p:cNvPr id="23" name="Rectangle 22"/>
+          <p:cNvSpPr/>
+          <p:nvPr/>
+        </p:nvSpPr>
+        <p:spPr>
+          <a:xfrm>
+            <a:off x="4480560" y="3657600"/>
+            <a:ext cx="3611880" cy="63500"/>
+          </a:xfrm>
+          <a:prstGeom prst="rect">
+            <a:avLst/>
+          </a:prstGeom>
+          <a:solidFill>
+            <a:srgbClr val="189AB4"/>
+          </a:solidFill>
+          <a:ln>
+            <a:noFill/>
+          </a:ln>
+          <a:effectLst/>
+        </p:spPr>
+        <p:style>
+          <a:lnRef idx="1">
+            <a:schemeClr val="accent1"/>
+          </a:lnRef>
+          <a:fillRef idx="3">
+            <a:schemeClr val="accent1"/>
+          </a:fillRef>
+          <a:effectRef idx="2">
+            <a:schemeClr val="accent1"/>
+          </a:effectRef>
+          <a:fontRef idx="minor">
+            <a:schemeClr val="lt1"/>
+          </a:fontRef>
+        </p:style>
+        <p:txBody>
+          <a:bodyPr rtlCol="0" anchor="ctr"/>
+          <a:lstStyle/>
+          <a:p>
+            <a:pPr algn="ctr"/>
+          </a:p>
+        </p:txBody>
+      </p:sp>
+      <p:sp>
+        <p:nvSpPr>
+          <p:cNvPr id="24" name="TextBox 23"/>
+          <p:cNvSpPr txBox="1"/>
+          <p:nvPr/>
+        </p:nvSpPr>
+        <p:spPr>
+          <a:xfrm>
+            <a:off x="4663440" y="3840480"/>
+            <a:ext cx="3337560" cy="548640"/>
+          </a:xfrm>
+          <a:prstGeom prst="rect">
+            <a:avLst/>
+          </a:prstGeom>
+          <a:noFill/>
+        </p:spPr>
+        <p:txBody>
+          <a:bodyPr wrap="square" anchor="t">
+            <a:spAutoFit/>
+          </a:bodyPr>
+          <a:lstStyle/>
+          <a:p>
+            <a:pPr algn="l">
+              <a:lnSpc>
+                <a:spcPct val="105000"/>
+              </a:lnSpc>
+              <a:spcAft>
+                <a:spcPts val="600"/>
+              </a:spcAft>
+            </a:pPr>
+            <a:r>
+              <a:rPr sz="1500" b="1">
+                <a:solidFill>
+                  <a:srgbClr val="0F2A47"/>
+                </a:solidFill>
+                <a:latin typeface="Calibri"/>
+              </a:rPr>
+              <a:t>Low-risk proving ground</a:t>
+            </a:r>
+          </a:p>
+        </p:txBody>
+      </p:sp>
+      <p:sp>
+        <p:nvSpPr>
+          <p:cNvPr id="25" name="TextBox 24"/>
+          <p:cNvSpPr txBox="1"/>
+          <p:nvPr/>
+        </p:nvSpPr>
+        <p:spPr>
+          <a:xfrm>
+            <a:off x="4663440" y="4389120"/>
+            <a:ext cx="3337560" cy="914400"/>
+          </a:xfrm>
+          <a:prstGeom prst="rect">
+            <a:avLst/>
+          </a:prstGeom>
+          <a:noFill/>
+        </p:spPr>
+        <p:txBody>
+          <a:bodyPr wrap="square" anchor="t">
+            <a:spAutoFit/>
+          </a:bodyPr>
+          <a:lstStyle/>
+          <a:p>
+            <a:pPr algn="l">
+              <a:lnSpc>
+                <a:spcPct val="105000"/>
+              </a:lnSpc>
+              <a:spcAft>
+                <a:spcPts val="600"/>
+              </a:spcAft>
+            </a:pPr>
+            <a:r>
+              <a:rPr sz="1250" b="0">
+                <a:solidFill>
+                  <a:srgbClr val="333F4A"/>
+                </a:solidFill>
+                <a:latin typeface="Calibri"/>
+              </a:rPr>
+              <a:t>KPI gains on Tier 3 before critical systems.</a:t>
+            </a:r>
+          </a:p>
+        </p:txBody>
+      </p:sp>
+      <p:sp>
+        <p:nvSpPr>
+          <p:cNvPr id="26" name="Rectangle 25"/>
+          <p:cNvSpPr/>
+          <p:nvPr/>
+        </p:nvSpPr>
+        <p:spPr>
+          <a:xfrm>
+            <a:off x="8321040" y="3657600"/>
+            <a:ext cx="3611880" cy="1737360"/>
+          </a:xfrm>
+          <a:prstGeom prst="rect">
+            <a:avLst/>
+          </a:prstGeom>
+          <a:solidFill>
+            <a:srgbClr val="F2F5F7"/>
+          </a:solidFill>
+          <a:ln>
+            <a:noFill/>
+          </a:ln>
+          <a:effectLst/>
+        </p:spPr>
+        <p:style>
+          <a:lnRef idx="1">
+            <a:schemeClr val="accent1"/>
+          </a:lnRef>
+          <a:fillRef idx="3">
+            <a:schemeClr val="accent1"/>
+          </a:fillRef>
+          <a:effectRef idx="2">
+            <a:schemeClr val="accent1"/>
+          </a:effectRef>
+          <a:fontRef idx="minor">
+            <a:schemeClr val="lt1"/>
+          </a:fontRef>
+        </p:style>
+        <p:txBody>
+          <a:bodyPr rtlCol="0" anchor="ctr"/>
+          <a:lstStyle/>
+          <a:p>
+            <a:pPr algn="ctr"/>
+          </a:p>
+        </p:txBody>
+      </p:sp>
+      <p:sp>
+        <p:nvSpPr>
+          <p:cNvPr id="27" name="Rectangle 26"/>
+          <p:cNvSpPr/>
+          <p:nvPr/>
+        </p:nvSpPr>
+        <p:spPr>
+          <a:xfrm>
+            <a:off x="8321040" y="3657600"/>
+            <a:ext cx="3611880" cy="63500"/>
+          </a:xfrm>
+          <a:prstGeom prst="rect">
+            <a:avLst/>
+          </a:prstGeom>
+          <a:solidFill>
+            <a:srgbClr val="189AB4"/>
+          </a:solidFill>
+          <a:ln>
+            <a:noFill/>
+          </a:ln>
+          <a:effectLst/>
+        </p:spPr>
+        <p:style>
+          <a:lnRef idx="1">
+            <a:schemeClr val="accent1"/>
+          </a:lnRef>
+          <a:fillRef idx="3">
+            <a:schemeClr val="accent1"/>
+          </a:fillRef>
+          <a:effectRef idx="2">
+            <a:schemeClr val="accent1"/>
+          </a:effectRef>
+          <a:fontRef idx="minor">
+            <a:schemeClr val="lt1"/>
+          </a:fontRef>
+        </p:style>
+        <p:txBody>
+          <a:bodyPr rtlCol="0" anchor="ctr"/>
+          <a:lstStyle/>
+          <a:p>
+            <a:pPr algn="ctr"/>
+          </a:p>
+        </p:txBody>
+      </p:sp>
+      <p:sp>
+        <p:nvSpPr>
+          <p:cNvPr id="28" name="TextBox 27"/>
+          <p:cNvSpPr txBox="1"/>
+          <p:nvPr/>
+        </p:nvSpPr>
+        <p:spPr>
+          <a:xfrm>
+            <a:off x="8503920" y="3840480"/>
+            <a:ext cx="3337560" cy="548640"/>
+          </a:xfrm>
+          <a:prstGeom prst="rect">
+            <a:avLst/>
+          </a:prstGeom>
+          <a:noFill/>
+        </p:spPr>
+        <p:txBody>
+          <a:bodyPr wrap="square" anchor="t">
+            <a:spAutoFit/>
+          </a:bodyPr>
+          <a:lstStyle/>
+          <a:p>
+            <a:pPr algn="l">
+              <a:lnSpc>
+                <a:spcPct val="105000"/>
+              </a:lnSpc>
+              <a:spcAft>
+                <a:spcPts val="600"/>
+              </a:spcAft>
+            </a:pPr>
+            <a:r>
+              <a:rPr sz="1500" b="1">
+                <a:solidFill>
+                  <a:srgbClr val="0F2A47"/>
+                </a:solidFill>
+                <a:latin typeface="Calibri"/>
+              </a:rPr>
+              <a:t>Partial automation wins</a:t>
+            </a:r>
+          </a:p>
+        </p:txBody>
+      </p:sp>
+      <p:sp>
+        <p:nvSpPr>
+          <p:cNvPr id="29" name="TextBox 28"/>
+          <p:cNvSpPr txBox="1"/>
+          <p:nvPr/>
+        </p:nvSpPr>
+        <p:spPr>
+          <a:xfrm>
+            <a:off x="8503920" y="4389120"/>
+            <a:ext cx="3337560" cy="914400"/>
+          </a:xfrm>
+          <a:prstGeom prst="rect">
+            <a:avLst/>
+          </a:prstGeom>
+          <a:noFill/>
+        </p:spPr>
+        <p:txBody>
+          <a:bodyPr wrap="square" anchor="t">
+            <a:spAutoFit/>
+          </a:bodyPr>
+          <a:lstStyle/>
+          <a:p>
+            <a:pPr algn="l">
+              <a:lnSpc>
+                <a:spcPct val="105000"/>
+              </a:lnSpc>
+              <a:spcAft>
+                <a:spcPts val="600"/>
+              </a:spcAft>
+            </a:pPr>
+            <a:r>
+              <a:rPr sz="1250" b="0">
+                <a:solidFill>
+                  <a:srgbClr val="333F4A"/>
+                </a:solidFill>
+                <a:latin typeface="Calibri"/>
+              </a:rPr>
+              <a:t>Resolve some, accelerate the rest — net big gain.</a:t>
             </a:r>
           </a:p>
         </p:txBody>
@@ -10678,6 +10836,754 @@
         <p:spPr>
           <a:xfrm>
             <a:off x="0" y="0"/>
+            <a:ext cx="12191695" cy="1234440"/>
+          </a:xfrm>
+          <a:prstGeom prst="rect">
+            <a:avLst/>
+          </a:prstGeom>
+          <a:solidFill>
+            <a:srgbClr val="0F2A47"/>
+          </a:solidFill>
+          <a:ln>
+            <a:noFill/>
+          </a:ln>
+          <a:effectLst/>
+        </p:spPr>
+        <p:style>
+          <a:lnRef idx="1">
+            <a:schemeClr val="accent1"/>
+          </a:lnRef>
+          <a:fillRef idx="3">
+            <a:schemeClr val="accent1"/>
+          </a:fillRef>
+          <a:effectRef idx="2">
+            <a:schemeClr val="accent1"/>
+          </a:effectRef>
+          <a:fontRef idx="minor">
+            <a:schemeClr val="lt1"/>
+          </a:fontRef>
+        </p:style>
+        <p:txBody>
+          <a:bodyPr rtlCol="0" anchor="ctr"/>
+          <a:lstStyle/>
+          <a:p>
+            <a:pPr algn="ctr"/>
+          </a:p>
+        </p:txBody>
+      </p:sp>
+      <p:sp>
+        <p:nvSpPr>
+          <p:cNvPr id="3" name="Rectangle 2"/>
+          <p:cNvSpPr/>
+          <p:nvPr/>
+        </p:nvSpPr>
+        <p:spPr>
+          <a:xfrm>
+            <a:off x="0" y="1234440"/>
+            <a:ext cx="12191695" cy="50800"/>
+          </a:xfrm>
+          <a:prstGeom prst="rect">
+            <a:avLst/>
+          </a:prstGeom>
+          <a:solidFill>
+            <a:srgbClr val="189AB4"/>
+          </a:solidFill>
+          <a:ln>
+            <a:noFill/>
+          </a:ln>
+          <a:effectLst/>
+        </p:spPr>
+        <p:style>
+          <a:lnRef idx="1">
+            <a:schemeClr val="accent1"/>
+          </a:lnRef>
+          <a:fillRef idx="3">
+            <a:schemeClr val="accent1"/>
+          </a:fillRef>
+          <a:effectRef idx="2">
+            <a:schemeClr val="accent1"/>
+          </a:effectRef>
+          <a:fontRef idx="minor">
+            <a:schemeClr val="lt1"/>
+          </a:fontRef>
+        </p:style>
+        <p:txBody>
+          <a:bodyPr rtlCol="0" anchor="ctr"/>
+          <a:lstStyle/>
+          <a:p>
+            <a:pPr algn="ctr"/>
+          </a:p>
+        </p:txBody>
+      </p:sp>
+      <p:sp>
+        <p:nvSpPr>
+          <p:cNvPr id="4" name="TextBox 3"/>
+          <p:cNvSpPr txBox="1"/>
+          <p:nvPr/>
+        </p:nvSpPr>
+        <p:spPr>
+          <a:xfrm>
+            <a:off x="548640" y="164592"/>
+            <a:ext cx="10972800" cy="365760"/>
+          </a:xfrm>
+          <a:prstGeom prst="rect">
+            <a:avLst/>
+          </a:prstGeom>
+          <a:noFill/>
+        </p:spPr>
+        <p:txBody>
+          <a:bodyPr wrap="square" anchor="t">
+            <a:spAutoFit/>
+          </a:bodyPr>
+          <a:lstStyle/>
+          <a:p>
+            <a:pPr algn="l">
+              <a:lnSpc>
+                <a:spcPct val="105000"/>
+              </a:lnSpc>
+              <a:spcAft>
+                <a:spcPts val="600"/>
+              </a:spcAft>
+            </a:pPr>
+            <a:r>
+              <a:rPr sz="1200" b="1">
+                <a:solidFill>
+                  <a:srgbClr val="189AB4"/>
+                </a:solidFill>
+                <a:latin typeface="Calibri"/>
+              </a:rPr>
+              <a:t>ENGAGEMENT MODEL</a:t>
+            </a:r>
+          </a:p>
+        </p:txBody>
+      </p:sp>
+      <p:sp>
+        <p:nvSpPr>
+          <p:cNvPr id="5" name="TextBox 4"/>
+          <p:cNvSpPr txBox="1"/>
+          <p:nvPr/>
+        </p:nvSpPr>
+        <p:spPr>
+          <a:xfrm>
+            <a:off x="548640" y="457200"/>
+            <a:ext cx="11064240" cy="731520"/>
+          </a:xfrm>
+          <a:prstGeom prst="rect">
+            <a:avLst/>
+          </a:prstGeom>
+          <a:noFill/>
+        </p:spPr>
+        <p:txBody>
+          <a:bodyPr wrap="square" anchor="t">
+            <a:spAutoFit/>
+          </a:bodyPr>
+          <a:lstStyle/>
+          <a:p>
+            <a:pPr algn="l">
+              <a:lnSpc>
+                <a:spcPct val="105000"/>
+              </a:lnSpc>
+              <a:spcAft>
+                <a:spcPts val="600"/>
+              </a:spcAft>
+            </a:pPr>
+            <a:r>
+              <a:rPr sz="2800" b="1">
+                <a:solidFill>
+                  <a:srgbClr val="FFFFFF"/>
+                </a:solidFill>
+                <a:latin typeface="Calibri"/>
+              </a:rPr>
+              <a:t>Low-commitment start, scalable rollout</a:t>
+            </a:r>
+          </a:p>
+        </p:txBody>
+      </p:sp>
+      <p:sp>
+        <p:nvSpPr>
+          <p:cNvPr id="6" name="Rectangle 5"/>
+          <p:cNvSpPr/>
+          <p:nvPr/>
+        </p:nvSpPr>
+        <p:spPr>
+          <a:xfrm>
+            <a:off x="640080" y="1920240"/>
+            <a:ext cx="3454298" cy="3108960"/>
+          </a:xfrm>
+          <a:prstGeom prst="rect">
+            <a:avLst/>
+          </a:prstGeom>
+          <a:solidFill>
+            <a:srgbClr val="F2F5F7"/>
+          </a:solidFill>
+          <a:ln>
+            <a:noFill/>
+          </a:ln>
+          <a:effectLst/>
+        </p:spPr>
+        <p:style>
+          <a:lnRef idx="1">
+            <a:schemeClr val="accent1"/>
+          </a:lnRef>
+          <a:fillRef idx="3">
+            <a:schemeClr val="accent1"/>
+          </a:fillRef>
+          <a:effectRef idx="2">
+            <a:schemeClr val="accent1"/>
+          </a:effectRef>
+          <a:fontRef idx="minor">
+            <a:schemeClr val="lt1"/>
+          </a:fontRef>
+        </p:style>
+        <p:txBody>
+          <a:bodyPr rtlCol="0" anchor="ctr"/>
+          <a:lstStyle/>
+          <a:p>
+            <a:pPr algn="ctr"/>
+          </a:p>
+        </p:txBody>
+      </p:sp>
+      <p:sp>
+        <p:nvSpPr>
+          <p:cNvPr id="7" name="Rectangle 6"/>
+          <p:cNvSpPr/>
+          <p:nvPr/>
+        </p:nvSpPr>
+        <p:spPr>
+          <a:xfrm>
+            <a:off x="640080" y="1920240"/>
+            <a:ext cx="3454298" cy="731520"/>
+          </a:xfrm>
+          <a:prstGeom prst="rect">
+            <a:avLst/>
+          </a:prstGeom>
+          <a:solidFill>
+            <a:srgbClr val="0F2A47"/>
+          </a:solidFill>
+          <a:ln>
+            <a:noFill/>
+          </a:ln>
+          <a:effectLst/>
+        </p:spPr>
+        <p:style>
+          <a:lnRef idx="1">
+            <a:schemeClr val="accent1"/>
+          </a:lnRef>
+          <a:fillRef idx="3">
+            <a:schemeClr val="accent1"/>
+          </a:fillRef>
+          <a:effectRef idx="2">
+            <a:schemeClr val="accent1"/>
+          </a:effectRef>
+          <a:fontRef idx="minor">
+            <a:schemeClr val="lt1"/>
+          </a:fontRef>
+        </p:style>
+        <p:txBody>
+          <a:bodyPr rtlCol="0" anchor="ctr"/>
+          <a:lstStyle/>
+          <a:p>
+            <a:pPr algn="ctr"/>
+          </a:p>
+        </p:txBody>
+      </p:sp>
+      <p:sp>
+        <p:nvSpPr>
+          <p:cNvPr id="8" name="TextBox 7"/>
+          <p:cNvSpPr txBox="1"/>
+          <p:nvPr/>
+        </p:nvSpPr>
+        <p:spPr>
+          <a:xfrm>
+            <a:off x="640080" y="1920240"/>
+            <a:ext cx="3454298" cy="731520"/>
+          </a:xfrm>
+          <a:prstGeom prst="rect">
+            <a:avLst/>
+          </a:prstGeom>
+          <a:noFill/>
+        </p:spPr>
+        <p:txBody>
+          <a:bodyPr wrap="square" anchor="ctr">
+            <a:spAutoFit/>
+          </a:bodyPr>
+          <a:lstStyle/>
+          <a:p>
+            <a:pPr algn="ctr">
+              <a:lnSpc>
+                <a:spcPct val="105000"/>
+              </a:lnSpc>
+              <a:spcAft>
+                <a:spcPts val="600"/>
+              </a:spcAft>
+            </a:pPr>
+            <a:r>
+              <a:rPr sz="1600" b="1">
+                <a:solidFill>
+                  <a:srgbClr val="FFFFFF"/>
+                </a:solidFill>
+                <a:latin typeface="Calibri"/>
+              </a:rPr>
+              <a:t>1 · Platform analysis</a:t>
+            </a:r>
+          </a:p>
+        </p:txBody>
+      </p:sp>
+      <p:sp>
+        <p:nvSpPr>
+          <p:cNvPr id="9" name="TextBox 8"/>
+          <p:cNvSpPr txBox="1"/>
+          <p:nvPr/>
+        </p:nvSpPr>
+        <p:spPr>
+          <a:xfrm>
+            <a:off x="868680" y="2834640"/>
+            <a:ext cx="2997098" cy="2103120"/>
+          </a:xfrm>
+          <a:prstGeom prst="rect">
+            <a:avLst/>
+          </a:prstGeom>
+          <a:noFill/>
+        </p:spPr>
+        <p:txBody>
+          <a:bodyPr wrap="square" anchor="t">
+            <a:spAutoFit/>
+          </a:bodyPr>
+          <a:lstStyle/>
+          <a:p>
+            <a:pPr algn="l">
+              <a:lnSpc>
+                <a:spcPct val="105000"/>
+              </a:lnSpc>
+              <a:spcAft>
+                <a:spcPts val="600"/>
+              </a:spcAft>
+            </a:pPr>
+            <a:r>
+              <a:rPr sz="1400" b="0">
+                <a:solidFill>
+                  <a:srgbClr val="333F4A"/>
+                </a:solidFill>
+                <a:latin typeface="Calibri"/>
+              </a:rPr>
+              <a:t>A short, fixed-fee analysis of a target platform — scope evidence access, documentation readiness, security and success baselines up front.</a:t>
+            </a:r>
+          </a:p>
+        </p:txBody>
+      </p:sp>
+      <p:sp>
+        <p:nvSpPr>
+          <p:cNvPr id="10" name="Rectangle 9"/>
+          <p:cNvSpPr/>
+          <p:nvPr/>
+        </p:nvSpPr>
+        <p:spPr>
+          <a:xfrm>
+            <a:off x="4368698" y="1920240"/>
+            <a:ext cx="3454298" cy="3108960"/>
+          </a:xfrm>
+          <a:prstGeom prst="rect">
+            <a:avLst/>
+          </a:prstGeom>
+          <a:solidFill>
+            <a:srgbClr val="F2F5F7"/>
+          </a:solidFill>
+          <a:ln>
+            <a:noFill/>
+          </a:ln>
+          <a:effectLst/>
+        </p:spPr>
+        <p:style>
+          <a:lnRef idx="1">
+            <a:schemeClr val="accent1"/>
+          </a:lnRef>
+          <a:fillRef idx="3">
+            <a:schemeClr val="accent1"/>
+          </a:fillRef>
+          <a:effectRef idx="2">
+            <a:schemeClr val="accent1"/>
+          </a:effectRef>
+          <a:fontRef idx="minor">
+            <a:schemeClr val="lt1"/>
+          </a:fontRef>
+        </p:style>
+        <p:txBody>
+          <a:bodyPr rtlCol="0" anchor="ctr"/>
+          <a:lstStyle/>
+          <a:p>
+            <a:pPr algn="ctr"/>
+          </a:p>
+        </p:txBody>
+      </p:sp>
+      <p:sp>
+        <p:nvSpPr>
+          <p:cNvPr id="11" name="Rectangle 10"/>
+          <p:cNvSpPr/>
+          <p:nvPr/>
+        </p:nvSpPr>
+        <p:spPr>
+          <a:xfrm>
+            <a:off x="4368698" y="1920240"/>
+            <a:ext cx="3454298" cy="731520"/>
+          </a:xfrm>
+          <a:prstGeom prst="rect">
+            <a:avLst/>
+          </a:prstGeom>
+          <a:solidFill>
+            <a:srgbClr val="0F2A47"/>
+          </a:solidFill>
+          <a:ln>
+            <a:noFill/>
+          </a:ln>
+          <a:effectLst/>
+        </p:spPr>
+        <p:style>
+          <a:lnRef idx="1">
+            <a:schemeClr val="accent1"/>
+          </a:lnRef>
+          <a:fillRef idx="3">
+            <a:schemeClr val="accent1"/>
+          </a:fillRef>
+          <a:effectRef idx="2">
+            <a:schemeClr val="accent1"/>
+          </a:effectRef>
+          <a:fontRef idx="minor">
+            <a:schemeClr val="lt1"/>
+          </a:fontRef>
+        </p:style>
+        <p:txBody>
+          <a:bodyPr rtlCol="0" anchor="ctr"/>
+          <a:lstStyle/>
+          <a:p>
+            <a:pPr algn="ctr"/>
+          </a:p>
+        </p:txBody>
+      </p:sp>
+      <p:sp>
+        <p:nvSpPr>
+          <p:cNvPr id="12" name="TextBox 11"/>
+          <p:cNvSpPr txBox="1"/>
+          <p:nvPr/>
+        </p:nvSpPr>
+        <p:spPr>
+          <a:xfrm>
+            <a:off x="4368698" y="1920240"/>
+            <a:ext cx="3454298" cy="731520"/>
+          </a:xfrm>
+          <a:prstGeom prst="rect">
+            <a:avLst/>
+          </a:prstGeom>
+          <a:noFill/>
+        </p:spPr>
+        <p:txBody>
+          <a:bodyPr wrap="square" anchor="ctr">
+            <a:spAutoFit/>
+          </a:bodyPr>
+          <a:lstStyle/>
+          <a:p>
+            <a:pPr algn="ctr">
+              <a:lnSpc>
+                <a:spcPct val="105000"/>
+              </a:lnSpc>
+              <a:spcAft>
+                <a:spcPts val="600"/>
+              </a:spcAft>
+            </a:pPr>
+            <a:r>
+              <a:rPr sz="1600" b="1">
+                <a:solidFill>
+                  <a:srgbClr val="FFFFFF"/>
+                </a:solidFill>
+                <a:latin typeface="Calibri"/>
+              </a:rPr>
+              <a:t>2 · Proof of Concept</a:t>
+            </a:r>
+          </a:p>
+        </p:txBody>
+      </p:sp>
+      <p:sp>
+        <p:nvSpPr>
+          <p:cNvPr id="13" name="TextBox 12"/>
+          <p:cNvSpPr txBox="1"/>
+          <p:nvPr/>
+        </p:nvSpPr>
+        <p:spPr>
+          <a:xfrm>
+            <a:off x="4597298" y="2834640"/>
+            <a:ext cx="2997098" cy="2103120"/>
+          </a:xfrm>
+          <a:prstGeom prst="rect">
+            <a:avLst/>
+          </a:prstGeom>
+          <a:noFill/>
+        </p:spPr>
+        <p:txBody>
+          <a:bodyPr wrap="square" anchor="t">
+            <a:spAutoFit/>
+          </a:bodyPr>
+          <a:lstStyle/>
+          <a:p>
+            <a:pPr algn="l">
+              <a:lnSpc>
+                <a:spcPct val="105000"/>
+              </a:lnSpc>
+              <a:spcAft>
+                <a:spcPts val="600"/>
+              </a:spcAft>
+            </a:pPr>
+            <a:r>
+              <a:rPr sz="1400" b="0">
+                <a:solidFill>
+                  <a:srgbClr val="333F4A"/>
+                </a:solidFill>
+                <a:latin typeface="Calibri"/>
+              </a:rPr>
+              <a:t>Configure Sentinel, preflight every dependency and demonstrate it on real or historical incidents — proof before commitment.</a:t>
+            </a:r>
+          </a:p>
+        </p:txBody>
+      </p:sp>
+      <p:sp>
+        <p:nvSpPr>
+          <p:cNvPr id="14" name="Rectangle 13"/>
+          <p:cNvSpPr/>
+          <p:nvPr/>
+        </p:nvSpPr>
+        <p:spPr>
+          <a:xfrm>
+            <a:off x="8097316" y="1920240"/>
+            <a:ext cx="3454298" cy="3108960"/>
+          </a:xfrm>
+          <a:prstGeom prst="rect">
+            <a:avLst/>
+          </a:prstGeom>
+          <a:solidFill>
+            <a:srgbClr val="F2F5F7"/>
+          </a:solidFill>
+          <a:ln>
+            <a:noFill/>
+          </a:ln>
+          <a:effectLst/>
+        </p:spPr>
+        <p:style>
+          <a:lnRef idx="1">
+            <a:schemeClr val="accent1"/>
+          </a:lnRef>
+          <a:fillRef idx="3">
+            <a:schemeClr val="accent1"/>
+          </a:fillRef>
+          <a:effectRef idx="2">
+            <a:schemeClr val="accent1"/>
+          </a:effectRef>
+          <a:fontRef idx="minor">
+            <a:schemeClr val="lt1"/>
+          </a:fontRef>
+        </p:style>
+        <p:txBody>
+          <a:bodyPr rtlCol="0" anchor="ctr"/>
+          <a:lstStyle/>
+          <a:p>
+            <a:pPr algn="ctr"/>
+          </a:p>
+        </p:txBody>
+      </p:sp>
+      <p:sp>
+        <p:nvSpPr>
+          <p:cNvPr id="15" name="Rectangle 14"/>
+          <p:cNvSpPr/>
+          <p:nvPr/>
+        </p:nvSpPr>
+        <p:spPr>
+          <a:xfrm>
+            <a:off x="8097316" y="1920240"/>
+            <a:ext cx="3454298" cy="731520"/>
+          </a:xfrm>
+          <a:prstGeom prst="rect">
+            <a:avLst/>
+          </a:prstGeom>
+          <a:solidFill>
+            <a:srgbClr val="0F2A47"/>
+          </a:solidFill>
+          <a:ln>
+            <a:noFill/>
+          </a:ln>
+          <a:effectLst/>
+        </p:spPr>
+        <p:style>
+          <a:lnRef idx="1">
+            <a:schemeClr val="accent1"/>
+          </a:lnRef>
+          <a:fillRef idx="3">
+            <a:schemeClr val="accent1"/>
+          </a:fillRef>
+          <a:effectRef idx="2">
+            <a:schemeClr val="accent1"/>
+          </a:effectRef>
+          <a:fontRef idx="minor">
+            <a:schemeClr val="lt1"/>
+          </a:fontRef>
+        </p:style>
+        <p:txBody>
+          <a:bodyPr rtlCol="0" anchor="ctr"/>
+          <a:lstStyle/>
+          <a:p>
+            <a:pPr algn="ctr"/>
+          </a:p>
+        </p:txBody>
+      </p:sp>
+      <p:sp>
+        <p:nvSpPr>
+          <p:cNvPr id="16" name="TextBox 15"/>
+          <p:cNvSpPr txBox="1"/>
+          <p:nvPr/>
+        </p:nvSpPr>
+        <p:spPr>
+          <a:xfrm>
+            <a:off x="8097316" y="1920240"/>
+            <a:ext cx="3454298" cy="731520"/>
+          </a:xfrm>
+          <a:prstGeom prst="rect">
+            <a:avLst/>
+          </a:prstGeom>
+          <a:noFill/>
+        </p:spPr>
+        <p:txBody>
+          <a:bodyPr wrap="square" anchor="ctr">
+            <a:spAutoFit/>
+          </a:bodyPr>
+          <a:lstStyle/>
+          <a:p>
+            <a:pPr algn="ctr">
+              <a:lnSpc>
+                <a:spcPct val="105000"/>
+              </a:lnSpc>
+              <a:spcAft>
+                <a:spcPts val="600"/>
+              </a:spcAft>
+            </a:pPr>
+            <a:r>
+              <a:rPr sz="1600" b="1">
+                <a:solidFill>
+                  <a:srgbClr val="FFFFFF"/>
+                </a:solidFill>
+                <a:latin typeface="Calibri"/>
+              </a:rPr>
+              <a:t>3 · Scaled rollout</a:t>
+            </a:r>
+          </a:p>
+        </p:txBody>
+      </p:sp>
+      <p:sp>
+        <p:nvSpPr>
+          <p:cNvPr id="17" name="TextBox 16"/>
+          <p:cNvSpPr txBox="1"/>
+          <p:nvPr/>
+        </p:nvSpPr>
+        <p:spPr>
+          <a:xfrm>
+            <a:off x="8325916" y="2834640"/>
+            <a:ext cx="2997098" cy="2103120"/>
+          </a:xfrm>
+          <a:prstGeom prst="rect">
+            <a:avLst/>
+          </a:prstGeom>
+          <a:noFill/>
+        </p:spPr>
+        <p:txBody>
+          <a:bodyPr wrap="square" anchor="t">
+            <a:spAutoFit/>
+          </a:bodyPr>
+          <a:lstStyle/>
+          <a:p>
+            <a:pPr algn="l">
+              <a:lnSpc>
+                <a:spcPct val="105000"/>
+              </a:lnSpc>
+              <a:spcAft>
+                <a:spcPts val="600"/>
+              </a:spcAft>
+            </a:pPr>
+            <a:r>
+              <a:rPr sz="1400" b="0">
+                <a:solidFill>
+                  <a:srgbClr val="333F4A"/>
+                </a:solidFill>
+                <a:latin typeface="Calibri"/>
+              </a:rPr>
+              <a:t>Implement platform by platform (fixed-price or T&amp;M). Shared components built once; only platform-specific work per system.</a:t>
+            </a:r>
+          </a:p>
+        </p:txBody>
+      </p:sp>
+      <p:sp>
+        <p:nvSpPr>
+          <p:cNvPr id="18" name="TextBox 17"/>
+          <p:cNvSpPr txBox="1"/>
+          <p:nvPr/>
+        </p:nvSpPr>
+        <p:spPr>
+          <a:xfrm>
+            <a:off x="640080" y="5394960"/>
+            <a:ext cx="10972800" cy="914400"/>
+          </a:xfrm>
+          <a:prstGeom prst="rect">
+            <a:avLst/>
+          </a:prstGeom>
+          <a:noFill/>
+        </p:spPr>
+        <p:txBody>
+          <a:bodyPr wrap="square" anchor="t">
+            <a:spAutoFit/>
+          </a:bodyPr>
+          <a:lstStyle/>
+          <a:p>
+            <a:pPr algn="ctr">
+              <a:lnSpc>
+                <a:spcPct val="105000"/>
+              </a:lnSpc>
+              <a:spcAft>
+                <a:spcPts val="600"/>
+              </a:spcAft>
+            </a:pPr>
+            <a:r>
+              <a:rPr sz="1350" b="0">
+                <a:solidFill>
+                  <a:srgbClr val="6B7780"/>
+                </a:solidFill>
+                <a:latin typeface="Calibri"/>
+              </a:rPr>
+              <a:t>The product stays shared: each rollout adds a reviewed config bundle, approved knowledge sources, connectors and playbooks — not a fork.</a:t>
+            </a:r>
+          </a:p>
+        </p:txBody>
+      </p:sp>
+    </p:spTree>
+  </p:cSld>
+  <p:clrMapOvr>
+    <a:masterClrMapping/>
+  </p:clrMapOvr>
+</p:sld>
+</file>
+
+<file path=ppt/slides/slide18.xml><?xml version="1.0" encoding="utf-8"?>
+<p:sld xmlns:a="http://schemas.openxmlformats.org/drawingml/2006/main" xmlns:p="http://schemas.openxmlformats.org/presentationml/2006/main" xmlns:r="http://schemas.openxmlformats.org/officeDocument/2006/relationships">
+  <p:cSld>
+    <p:spTree>
+      <p:nvGrpSpPr>
+        <p:cNvPr id="1" name=""/>
+        <p:cNvGrpSpPr/>
+        <p:nvPr/>
+      </p:nvGrpSpPr>
+      <p:grpSpPr/>
+      <p:sp>
+        <p:nvSpPr>
+          <p:cNvPr id="2" name="Rectangle 1"/>
+          <p:cNvSpPr/>
+          <p:nvPr/>
+        </p:nvSpPr>
+        <p:spPr>
+          <a:xfrm>
+            <a:off x="0" y="0"/>
             <a:ext cx="12191695" cy="6858000"/>
           </a:xfrm>
           <a:prstGeom prst="rect">
@@ -13426,8 +14332,8 @@
         </p:nvSpPr>
         <p:spPr>
           <a:xfrm>
-            <a:off x="640080" y="3931920"/>
-            <a:ext cx="10972800" cy="4937760"/>
+            <a:off x="640080" y="3822191"/>
+            <a:ext cx="10972800" cy="2331720"/>
           </a:xfrm>
           <a:prstGeom prst="rect">
             <a:avLst/>
@@ -13445,11 +14351,11 @@
                 <a:spcPct val="105000"/>
               </a:lnSpc>
               <a:spcAft>
-                <a:spcPts val="800"/>
+                <a:spcPts val="700"/>
               </a:spcAft>
             </a:pPr>
             <a:r>
-              <a:rPr sz="1600" b="0">
+              <a:rPr sz="1550" b="0">
                 <a:solidFill>
                   <a:srgbClr val="333F4A"/>
                 </a:solidFill>
@@ -13464,11 +14370,11 @@
                 <a:spcPct val="105000"/>
               </a:lnSpc>
               <a:spcAft>
-                <a:spcPts val="800"/>
+                <a:spcPts val="700"/>
               </a:spcAft>
             </a:pPr>
             <a:r>
-              <a:rPr sz="1600" b="0">
+              <a:rPr sz="1550" b="0">
                 <a:solidFill>
                   <a:srgbClr val="333F4A"/>
                 </a:solidFill>
@@ -13483,17 +14389,36 @@
                 <a:spcPct val="105000"/>
               </a:lnSpc>
               <a:spcAft>
-                <a:spcPts val="800"/>
+                <a:spcPts val="700"/>
               </a:spcAft>
             </a:pPr>
             <a:r>
-              <a:rPr sz="1600" b="0">
+              <a:rPr sz="1550" b="0">
                 <a:solidFill>
                   <a:srgbClr val="333F4A"/>
                 </a:solidFill>
                 <a:latin typeface="Calibri"/>
               </a:rPr>
               <a:t>•  Every tool call and decision is logged for a complete audit trail.</a:t>
+            </a:r>
+          </a:p>
+          <a:p>
+            <a:pPr algn="l">
+              <a:lnSpc>
+                <a:spcPct val="105000"/>
+              </a:lnSpc>
+              <a:spcAft>
+                <a:spcPts val="700"/>
+              </a:spcAft>
+            </a:pPr>
+            <a:r>
+              <a:rPr sz="1550" b="0">
+                <a:solidFill>
+                  <a:srgbClr val="333F4A"/>
+                </a:solidFill>
+                <a:latin typeface="Calibri"/>
+              </a:rPr>
+              <a:t>•  Human verdicts feed a golden dataset — tracking accuracy, fix acceptance and MTTD over time.</a:t>
             </a:r>
           </a:p>
         </p:txBody>
@@ -14348,7 +15273,7 @@
         </p:nvSpPr>
         <p:spPr>
           <a:xfrm>
-            <a:off x="640080" y="1645920"/>
+            <a:off x="640080" y="1572768"/>
             <a:ext cx="10972800" cy="4937760"/>
           </a:xfrm>
           <a:prstGeom prst="rect">
@@ -14371,13 +15296,13 @@
               </a:spcAft>
             </a:pPr>
             <a:r>
-              <a:rPr sz="1700" b="0">
+              <a:rPr sz="1600" b="0">
                 <a:solidFill>
                   <a:srgbClr val="333F4A"/>
                 </a:solidFill>
                 <a:latin typeface="Calibri"/>
               </a:rPr>
-              <a:t>•  LangGraph orchestration — a stateful, multi-phase investigation graph with durable state, human-in-the-loop, and full observability.</a:t>
+              <a:t>•  Agent orchestration (OpenAI Agents SDK) — a deterministic pipeline with agentic loops for evidence-gathering and fix-validation; full audit trace.</a:t>
             </a:r>
           </a:p>
           <a:p>
@@ -14390,7 +15315,7 @@
               </a:spcAft>
             </a:pPr>
             <a:r>
-              <a:rPr sz="1700" b="0">
+              <a:rPr sz="1600" b="0">
                 <a:solidFill>
                   <a:srgbClr val="333F4A"/>
                 </a:solidFill>
@@ -14409,7 +15334,7 @@
               </a:spcAft>
             </a:pPr>
             <a:r>
-              <a:rPr sz="1700" b="0">
+              <a:rPr sz="1600" b="0">
                 <a:solidFill>
                   <a:srgbClr val="333F4A"/>
                 </a:solidFill>
@@ -14428,7 +15353,7 @@
               </a:spcAft>
             </a:pPr>
             <a:r>
-              <a:rPr sz="1700" b="0">
+              <a:rPr sz="1600" b="0">
                 <a:solidFill>
                   <a:srgbClr val="333F4A"/>
                 </a:solidFill>
@@ -14447,13 +15372,32 @@
               </a:spcAft>
             </a:pPr>
             <a:r>
-              <a:rPr sz="1700" b="0">
+              <a:rPr sz="1600" b="0">
                 <a:solidFill>
                   <a:srgbClr val="333F4A"/>
                 </a:solidFill>
                 <a:latin typeface="Calibri"/>
               </a:rPr>
               <a:t>•  Fully deployed inside the client environment — one isolated instance per client.</a:t>
+            </a:r>
+          </a:p>
+          <a:p>
+            <a:pPr algn="l">
+              <a:lnSpc>
+                <a:spcPct val="105000"/>
+              </a:lnSpc>
+              <a:spcAft>
+                <a:spcPts val="1000"/>
+              </a:spcAft>
+            </a:pPr>
+            <a:r>
+              <a:rPr sz="1600" b="0">
+                <a:solidFill>
+                  <a:srgbClr val="333F4A"/>
+                </a:solidFill>
+                <a:latin typeface="Calibri"/>
+              </a:rPr>
+              <a:t>•  Portable by design — the same versioned containers run on-prem or in any cloud via Compose / Helm; air-gap capable and built on open protocols.</a:t>
             </a:r>
           </a:p>
         </p:txBody>
